--- a/docs/presentation/isr_rl_dmpc_presentation.pptx
+++ b/docs/presentation/isr_rl_dmpc_presentation.pptx
@@ -5,28 +5,20 @@
     <p:sldMasterId id="2147483648" r:id="rId1"/>
   </p:sldMasterIdLst>
   <p:sldIdLst>
-    <p:sldId id="256" r:id="rId7"/>
-    <p:sldId id="257" r:id="rId8"/>
-    <p:sldId id="258" r:id="rId9"/>
-    <p:sldId id="259" r:id="rId10"/>
-    <p:sldId id="260" r:id="rId11"/>
-    <p:sldId id="261" r:id="rId12"/>
-    <p:sldId id="262" r:id="rId13"/>
-    <p:sldId id="263" r:id="rId14"/>
-    <p:sldId id="264" r:id="rId15"/>
-    <p:sldId id="265" r:id="rId16"/>
-    <p:sldId id="266" r:id="rId17"/>
-    <p:sldId id="267" r:id="rId18"/>
-    <p:sldId id="268" r:id="rId19"/>
-    <p:sldId id="269" r:id="rId20"/>
-    <p:sldId id="270" r:id="rId21"/>
-    <p:sldId id="271" r:id="rId22"/>
-    <p:sldId id="272" r:id="rId23"/>
-    <p:sldId id="273" r:id="rId24"/>
-    <p:sldId id="274" r:id="rId25"/>
-    <p:sldId id="275" r:id="rId26"/>
+    <p:sldId id="256" r:id="rId2"/>
+    <p:sldId id="258" r:id="rId3"/>
+    <p:sldId id="260" r:id="rId4"/>
+    <p:sldId id="262" r:id="rId5"/>
+    <p:sldId id="264" r:id="rId6"/>
+    <p:sldId id="265" r:id="rId7"/>
+    <p:sldId id="266" r:id="rId8"/>
+    <p:sldId id="268" r:id="rId9"/>
+    <p:sldId id="270" r:id="rId10"/>
+    <p:sldId id="272" r:id="rId11"/>
+    <p:sldId id="274" r:id="rId12"/>
+    <p:sldId id="275" r:id="rId13"/>
   </p:sldIdLst>
-  <p:sldSz cx="12188952" cy="6858000" type="screen4x3"/>
+  <p:sldSz cx="12188825" cy="6858000"/>
   <p:notesSz cx="6858000" cy="9144000"/>
   <p:defaultTextStyle>
     <a:defPPr>
@@ -123,7 +115,31 @@
       </a:defRPr>
     </a:lvl9pPr>
   </p:defaultTextStyle>
+  <p:extLst>
+    <p:ext uri="{EFAFB233-063F-42B5-8137-9DF3F51BA10A}">
+      <p15:sldGuideLst xmlns:p15="http://schemas.microsoft.com/office/powerpoint/2012/main">
+        <p15:guide id="1" orient="horz" pos="2160">
+          <p15:clr>
+            <a:srgbClr val="A4A3A4"/>
+          </p15:clr>
+        </p15:guide>
+        <p15:guide id="2" pos="2880">
+          <p15:clr>
+            <a:srgbClr val="A4A3A4"/>
+          </p15:clr>
+        </p15:guide>
+      </p15:sldGuideLst>
+    </p:ext>
+  </p:extLst>
 </p:presentation>
+</file>
+
+<file path=ppt/revisionInfo.xml><?xml version="1.0" encoding="utf-8"?>
+<p1510:revInfo xmlns:a="http://schemas.openxmlformats.org/drawingml/2006/main" xmlns:r="http://schemas.openxmlformats.org/officeDocument/2006/relationships" xmlns:p1510="http://schemas.microsoft.com/office/powerpoint/2015/10/main">
+  <p1510:revLst>
+    <p1510:client id="{2B185AE1-F427-520B-8FBB-6AF137B14486}" v="538" dt="2026-05-07T15:33:46.490"/>
+  </p1510:revLst>
+</p1510:revInfo>
 </file>
 
 <file path=ppt/slideLayouts/slideLayout1.xml><?xml version="1.0" encoding="utf-8"?>
@@ -164,10 +180,9 @@
           <a:lstStyle/>
           <a:p>
             <a:r>
-              <a:rPr lang="en-US" smtClean="0"/>
+              <a:rPr lang="en-US"/>
               <a:t>Click to edit Master title style</a:t>
             </a:r>
-            <a:endParaRPr lang="en-US"/>
           </a:p>
         </p:txBody>
       </p:sp>
@@ -283,10 +298,9 @@
           </a:lstStyle>
           <a:p>
             <a:r>
-              <a:rPr lang="en-US" smtClean="0"/>
+              <a:rPr lang="en-US"/>
               <a:t>Click to edit Master subtitle style</a:t>
             </a:r>
-            <a:endParaRPr lang="en-US"/>
           </a:p>
         </p:txBody>
       </p:sp>
@@ -307,7 +321,7 @@
           <a:p>
             <a:fld id="{5BCAD085-E8A6-8845-BD4E-CB4CCA059FC4}" type="datetimeFigureOut">
               <a:rPr lang="en-US" smtClean="0"/>
-              <a:t>1/27/13</a:t>
+              <a:t>5/7/2026</a:t>
             </a:fld>
             <a:endParaRPr lang="en-US"/>
           </a:p>
@@ -401,10 +415,9 @@
           <a:lstStyle/>
           <a:p>
             <a:r>
-              <a:rPr lang="en-US" smtClean="0"/>
+              <a:rPr lang="en-US"/>
               <a:t>Click to edit Master title style</a:t>
             </a:r>
-            <a:endParaRPr lang="en-US"/>
           </a:p>
         </p:txBody>
       </p:sp>
@@ -425,38 +438,37 @@
           <a:p>
             <a:pPr lvl="0"/>
             <a:r>
-              <a:rPr lang="en-US" smtClean="0"/>
+              <a:rPr lang="en-US"/>
               <a:t>Click to edit Master text styles</a:t>
             </a:r>
           </a:p>
           <a:p>
             <a:pPr lvl="1"/>
             <a:r>
-              <a:rPr lang="en-US" smtClean="0"/>
+              <a:rPr lang="en-US"/>
               <a:t>Second level</a:t>
             </a:r>
           </a:p>
           <a:p>
             <a:pPr lvl="2"/>
             <a:r>
-              <a:rPr lang="en-US" smtClean="0"/>
+              <a:rPr lang="en-US"/>
               <a:t>Third level</a:t>
             </a:r>
           </a:p>
           <a:p>
             <a:pPr lvl="3"/>
             <a:r>
-              <a:rPr lang="en-US" smtClean="0"/>
+              <a:rPr lang="en-US"/>
               <a:t>Fourth level</a:t>
             </a:r>
           </a:p>
           <a:p>
             <a:pPr lvl="4"/>
             <a:r>
-              <a:rPr lang="en-US" smtClean="0"/>
+              <a:rPr lang="en-US"/>
               <a:t>Fifth level</a:t>
             </a:r>
-            <a:endParaRPr lang="en-US"/>
           </a:p>
         </p:txBody>
       </p:sp>
@@ -477,7 +489,7 @@
           <a:p>
             <a:fld id="{5BCAD085-E8A6-8845-BD4E-CB4CCA059FC4}" type="datetimeFigureOut">
               <a:rPr lang="en-US" smtClean="0"/>
-              <a:t>1/27/13</a:t>
+              <a:t>5/7/2026</a:t>
             </a:fld>
             <a:endParaRPr lang="en-US"/>
           </a:p>
@@ -576,10 +588,9 @@
           <a:lstStyle/>
           <a:p>
             <a:r>
-              <a:rPr lang="en-US" smtClean="0"/>
+              <a:rPr lang="en-US"/>
               <a:t>Click to edit Master title style</a:t>
             </a:r>
-            <a:endParaRPr lang="en-US"/>
           </a:p>
         </p:txBody>
       </p:sp>
@@ -605,38 +616,37 @@
           <a:p>
             <a:pPr lvl="0"/>
             <a:r>
-              <a:rPr lang="en-US" smtClean="0"/>
+              <a:rPr lang="en-US"/>
               <a:t>Click to edit Master text styles</a:t>
             </a:r>
           </a:p>
           <a:p>
             <a:pPr lvl="1"/>
             <a:r>
-              <a:rPr lang="en-US" smtClean="0"/>
+              <a:rPr lang="en-US"/>
               <a:t>Second level</a:t>
             </a:r>
           </a:p>
           <a:p>
             <a:pPr lvl="2"/>
             <a:r>
-              <a:rPr lang="en-US" smtClean="0"/>
+              <a:rPr lang="en-US"/>
               <a:t>Third level</a:t>
             </a:r>
           </a:p>
           <a:p>
             <a:pPr lvl="3"/>
             <a:r>
-              <a:rPr lang="en-US" smtClean="0"/>
+              <a:rPr lang="en-US"/>
               <a:t>Fourth level</a:t>
             </a:r>
           </a:p>
           <a:p>
             <a:pPr lvl="4"/>
             <a:r>
-              <a:rPr lang="en-US" smtClean="0"/>
+              <a:rPr lang="en-US"/>
               <a:t>Fifth level</a:t>
             </a:r>
-            <a:endParaRPr lang="en-US"/>
           </a:p>
         </p:txBody>
       </p:sp>
@@ -657,7 +667,7 @@
           <a:p>
             <a:fld id="{5BCAD085-E8A6-8845-BD4E-CB4CCA059FC4}" type="datetimeFigureOut">
               <a:rPr lang="en-US" smtClean="0"/>
-              <a:t>1/27/13</a:t>
+              <a:t>5/7/2026</a:t>
             </a:fld>
             <a:endParaRPr lang="en-US"/>
           </a:p>
@@ -751,10 +761,9 @@
           <a:lstStyle/>
           <a:p>
             <a:r>
-              <a:rPr lang="en-US" smtClean="0"/>
+              <a:rPr lang="en-US"/>
               <a:t>Click to edit Master title style</a:t>
             </a:r>
-            <a:endParaRPr lang="en-US"/>
           </a:p>
         </p:txBody>
       </p:sp>
@@ -775,38 +784,37 @@
           <a:p>
             <a:pPr lvl="0"/>
             <a:r>
-              <a:rPr lang="en-US" smtClean="0"/>
+              <a:rPr lang="en-US"/>
               <a:t>Click to edit Master text styles</a:t>
             </a:r>
           </a:p>
           <a:p>
             <a:pPr lvl="1"/>
             <a:r>
-              <a:rPr lang="en-US" smtClean="0"/>
+              <a:rPr lang="en-US"/>
               <a:t>Second level</a:t>
             </a:r>
           </a:p>
           <a:p>
             <a:pPr lvl="2"/>
             <a:r>
-              <a:rPr lang="en-US" smtClean="0"/>
+              <a:rPr lang="en-US"/>
               <a:t>Third level</a:t>
             </a:r>
           </a:p>
           <a:p>
             <a:pPr lvl="3"/>
             <a:r>
-              <a:rPr lang="en-US" smtClean="0"/>
+              <a:rPr lang="en-US"/>
               <a:t>Fourth level</a:t>
             </a:r>
           </a:p>
           <a:p>
             <a:pPr lvl="4"/>
             <a:r>
-              <a:rPr lang="en-US" smtClean="0"/>
+              <a:rPr lang="en-US"/>
               <a:t>Fifth level</a:t>
             </a:r>
-            <a:endParaRPr lang="en-US"/>
           </a:p>
         </p:txBody>
       </p:sp>
@@ -827,7 +835,7 @@
           <a:p>
             <a:fld id="{5BCAD085-E8A6-8845-BD4E-CB4CCA059FC4}" type="datetimeFigureOut">
               <a:rPr lang="en-US" smtClean="0"/>
-              <a:t>1/27/13</a:t>
+              <a:t>5/7/2026</a:t>
             </a:fld>
             <a:endParaRPr lang="en-US"/>
           </a:p>
@@ -930,10 +938,9 @@
           </a:lstStyle>
           <a:p>
             <a:r>
-              <a:rPr lang="en-US" smtClean="0"/>
+              <a:rPr lang="en-US"/>
               <a:t>Click to edit Master title style</a:t>
             </a:r>
-            <a:endParaRPr lang="en-US"/>
           </a:p>
         </p:txBody>
       </p:sp>
@@ -1050,7 +1057,7 @@
           <a:p>
             <a:pPr lvl="0"/>
             <a:r>
-              <a:rPr lang="en-US" smtClean="0"/>
+              <a:rPr lang="en-US"/>
               <a:t>Click to edit Master text styles</a:t>
             </a:r>
           </a:p>
@@ -1073,7 +1080,7 @@
           <a:p>
             <a:fld id="{5BCAD085-E8A6-8845-BD4E-CB4CCA059FC4}" type="datetimeFigureOut">
               <a:rPr lang="en-US" smtClean="0"/>
-              <a:t>1/27/13</a:t>
+              <a:t>5/7/2026</a:t>
             </a:fld>
             <a:endParaRPr lang="en-US"/>
           </a:p>
@@ -1167,10 +1174,9 @@
           <a:lstStyle/>
           <a:p>
             <a:r>
-              <a:rPr lang="en-US" smtClean="0"/>
+              <a:rPr lang="en-US"/>
               <a:t>Click to edit Master title style</a:t>
             </a:r>
-            <a:endParaRPr lang="en-US"/>
           </a:p>
         </p:txBody>
       </p:sp>
@@ -1224,38 +1230,37 @@
           <a:p>
             <a:pPr lvl="0"/>
             <a:r>
-              <a:rPr lang="en-US" smtClean="0"/>
+              <a:rPr lang="en-US"/>
               <a:t>Click to edit Master text styles</a:t>
             </a:r>
           </a:p>
           <a:p>
             <a:pPr lvl="1"/>
             <a:r>
-              <a:rPr lang="en-US" smtClean="0"/>
+              <a:rPr lang="en-US"/>
               <a:t>Second level</a:t>
             </a:r>
           </a:p>
           <a:p>
             <a:pPr lvl="2"/>
             <a:r>
-              <a:rPr lang="en-US" smtClean="0"/>
+              <a:rPr lang="en-US"/>
               <a:t>Third level</a:t>
             </a:r>
           </a:p>
           <a:p>
             <a:pPr lvl="3"/>
             <a:r>
-              <a:rPr lang="en-US" smtClean="0"/>
+              <a:rPr lang="en-US"/>
               <a:t>Fourth level</a:t>
             </a:r>
           </a:p>
           <a:p>
             <a:pPr lvl="4"/>
             <a:r>
-              <a:rPr lang="en-US" smtClean="0"/>
+              <a:rPr lang="en-US"/>
               <a:t>Fifth level</a:t>
             </a:r>
-            <a:endParaRPr lang="en-US"/>
           </a:p>
         </p:txBody>
       </p:sp>
@@ -1309,38 +1314,37 @@
           <a:p>
             <a:pPr lvl="0"/>
             <a:r>
-              <a:rPr lang="en-US" smtClean="0"/>
+              <a:rPr lang="en-US"/>
               <a:t>Click to edit Master text styles</a:t>
             </a:r>
           </a:p>
           <a:p>
             <a:pPr lvl="1"/>
             <a:r>
-              <a:rPr lang="en-US" smtClean="0"/>
+              <a:rPr lang="en-US"/>
               <a:t>Second level</a:t>
             </a:r>
           </a:p>
           <a:p>
             <a:pPr lvl="2"/>
             <a:r>
-              <a:rPr lang="en-US" smtClean="0"/>
+              <a:rPr lang="en-US"/>
               <a:t>Third level</a:t>
             </a:r>
           </a:p>
           <a:p>
             <a:pPr lvl="3"/>
             <a:r>
-              <a:rPr lang="en-US" smtClean="0"/>
+              <a:rPr lang="en-US"/>
               <a:t>Fourth level</a:t>
             </a:r>
           </a:p>
           <a:p>
             <a:pPr lvl="4"/>
             <a:r>
-              <a:rPr lang="en-US" smtClean="0"/>
+              <a:rPr lang="en-US"/>
               <a:t>Fifth level</a:t>
             </a:r>
-            <a:endParaRPr lang="en-US"/>
           </a:p>
         </p:txBody>
       </p:sp>
@@ -1361,7 +1365,7 @@
           <a:p>
             <a:fld id="{5BCAD085-E8A6-8845-BD4E-CB4CCA059FC4}" type="datetimeFigureOut">
               <a:rPr lang="en-US" smtClean="0"/>
-              <a:t>1/27/13</a:t>
+              <a:t>5/7/2026</a:t>
             </a:fld>
             <a:endParaRPr lang="en-US"/>
           </a:p>
@@ -1459,10 +1463,9 @@
           </a:lstStyle>
           <a:p>
             <a:r>
-              <a:rPr lang="en-US" smtClean="0"/>
+              <a:rPr lang="en-US"/>
               <a:t>Click to edit Master title style</a:t>
             </a:r>
-            <a:endParaRPr lang="en-US"/>
           </a:p>
         </p:txBody>
       </p:sp>
@@ -1525,7 +1528,7 @@
           <a:p>
             <a:pPr lvl="0"/>
             <a:r>
-              <a:rPr lang="en-US" smtClean="0"/>
+              <a:rPr lang="en-US"/>
               <a:t>Click to edit Master text styles</a:t>
             </a:r>
           </a:p>
@@ -1581,38 +1584,37 @@
           <a:p>
             <a:pPr lvl="0"/>
             <a:r>
-              <a:rPr lang="en-US" smtClean="0"/>
+              <a:rPr lang="en-US"/>
               <a:t>Click to edit Master text styles</a:t>
             </a:r>
           </a:p>
           <a:p>
             <a:pPr lvl="1"/>
             <a:r>
-              <a:rPr lang="en-US" smtClean="0"/>
+              <a:rPr lang="en-US"/>
               <a:t>Second level</a:t>
             </a:r>
           </a:p>
           <a:p>
             <a:pPr lvl="2"/>
             <a:r>
-              <a:rPr lang="en-US" smtClean="0"/>
+              <a:rPr lang="en-US"/>
               <a:t>Third level</a:t>
             </a:r>
           </a:p>
           <a:p>
             <a:pPr lvl="3"/>
             <a:r>
-              <a:rPr lang="en-US" smtClean="0"/>
+              <a:rPr lang="en-US"/>
               <a:t>Fourth level</a:t>
             </a:r>
           </a:p>
           <a:p>
             <a:pPr lvl="4"/>
             <a:r>
-              <a:rPr lang="en-US" smtClean="0"/>
+              <a:rPr lang="en-US"/>
               <a:t>Fifth level</a:t>
             </a:r>
-            <a:endParaRPr lang="en-US"/>
           </a:p>
         </p:txBody>
       </p:sp>
@@ -1675,7 +1677,7 @@
           <a:p>
             <a:pPr lvl="0"/>
             <a:r>
-              <a:rPr lang="en-US" smtClean="0"/>
+              <a:rPr lang="en-US"/>
               <a:t>Click to edit Master text styles</a:t>
             </a:r>
           </a:p>
@@ -1731,38 +1733,37 @@
           <a:p>
             <a:pPr lvl="0"/>
             <a:r>
-              <a:rPr lang="en-US" smtClean="0"/>
+              <a:rPr lang="en-US"/>
               <a:t>Click to edit Master text styles</a:t>
             </a:r>
           </a:p>
           <a:p>
             <a:pPr lvl="1"/>
             <a:r>
-              <a:rPr lang="en-US" smtClean="0"/>
+              <a:rPr lang="en-US"/>
               <a:t>Second level</a:t>
             </a:r>
           </a:p>
           <a:p>
             <a:pPr lvl="2"/>
             <a:r>
-              <a:rPr lang="en-US" smtClean="0"/>
+              <a:rPr lang="en-US"/>
               <a:t>Third level</a:t>
             </a:r>
           </a:p>
           <a:p>
             <a:pPr lvl="3"/>
             <a:r>
-              <a:rPr lang="en-US" smtClean="0"/>
+              <a:rPr lang="en-US"/>
               <a:t>Fourth level</a:t>
             </a:r>
           </a:p>
           <a:p>
             <a:pPr lvl="4"/>
             <a:r>
-              <a:rPr lang="en-US" smtClean="0"/>
+              <a:rPr lang="en-US"/>
               <a:t>Fifth level</a:t>
             </a:r>
-            <a:endParaRPr lang="en-US"/>
           </a:p>
         </p:txBody>
       </p:sp>
@@ -1783,7 +1784,7 @@
           <a:p>
             <a:fld id="{5BCAD085-E8A6-8845-BD4E-CB4CCA059FC4}" type="datetimeFigureOut">
               <a:rPr lang="en-US" smtClean="0"/>
-              <a:t>1/27/13</a:t>
+              <a:t>5/7/2026</a:t>
             </a:fld>
             <a:endParaRPr lang="en-US"/>
           </a:p>
@@ -1877,10 +1878,9 @@
           <a:lstStyle/>
           <a:p>
             <a:r>
-              <a:rPr lang="en-US" smtClean="0"/>
+              <a:rPr lang="en-US"/>
               <a:t>Click to edit Master title style</a:t>
             </a:r>
-            <a:endParaRPr lang="en-US"/>
           </a:p>
         </p:txBody>
       </p:sp>
@@ -1901,7 +1901,7 @@
           <a:p>
             <a:fld id="{5BCAD085-E8A6-8845-BD4E-CB4CCA059FC4}" type="datetimeFigureOut">
               <a:rPr lang="en-US" smtClean="0"/>
-              <a:t>1/27/13</a:t>
+              <a:t>5/7/2026</a:t>
             </a:fld>
             <a:endParaRPr lang="en-US"/>
           </a:p>
@@ -1996,7 +1996,7 @@
           <a:p>
             <a:fld id="{5BCAD085-E8A6-8845-BD4E-CB4CCA059FC4}" type="datetimeFigureOut">
               <a:rPr lang="en-US" smtClean="0"/>
-              <a:t>1/27/13</a:t>
+              <a:t>5/7/2026</a:t>
             </a:fld>
             <a:endParaRPr lang="en-US"/>
           </a:p>
@@ -2099,10 +2099,9 @@
           </a:lstStyle>
           <a:p>
             <a:r>
-              <a:rPr lang="en-US" smtClean="0"/>
+              <a:rPr lang="en-US"/>
               <a:t>Click to edit Master title style</a:t>
             </a:r>
-            <a:endParaRPr lang="en-US"/>
           </a:p>
         </p:txBody>
       </p:sp>
@@ -2156,38 +2155,37 @@
           <a:p>
             <a:pPr lvl="0"/>
             <a:r>
-              <a:rPr lang="en-US" smtClean="0"/>
+              <a:rPr lang="en-US"/>
               <a:t>Click to edit Master text styles</a:t>
             </a:r>
           </a:p>
           <a:p>
             <a:pPr lvl="1"/>
             <a:r>
-              <a:rPr lang="en-US" smtClean="0"/>
+              <a:rPr lang="en-US"/>
               <a:t>Second level</a:t>
             </a:r>
           </a:p>
           <a:p>
             <a:pPr lvl="2"/>
             <a:r>
-              <a:rPr lang="en-US" smtClean="0"/>
+              <a:rPr lang="en-US"/>
               <a:t>Third level</a:t>
             </a:r>
           </a:p>
           <a:p>
             <a:pPr lvl="3"/>
             <a:r>
-              <a:rPr lang="en-US" smtClean="0"/>
+              <a:rPr lang="en-US"/>
               <a:t>Fourth level</a:t>
             </a:r>
           </a:p>
           <a:p>
             <a:pPr lvl="4"/>
             <a:r>
-              <a:rPr lang="en-US" smtClean="0"/>
+              <a:rPr lang="en-US"/>
               <a:t>Fifth level</a:t>
             </a:r>
-            <a:endParaRPr lang="en-US"/>
           </a:p>
         </p:txBody>
       </p:sp>
@@ -2250,7 +2248,7 @@
           <a:p>
             <a:pPr lvl="0"/>
             <a:r>
-              <a:rPr lang="en-US" smtClean="0"/>
+              <a:rPr lang="en-US"/>
               <a:t>Click to edit Master text styles</a:t>
             </a:r>
           </a:p>
@@ -2273,7 +2271,7 @@
           <a:p>
             <a:fld id="{5BCAD085-E8A6-8845-BD4E-CB4CCA059FC4}" type="datetimeFigureOut">
               <a:rPr lang="en-US" smtClean="0"/>
-              <a:t>1/27/13</a:t>
+              <a:t>5/7/2026</a:t>
             </a:fld>
             <a:endParaRPr lang="en-US"/>
           </a:p>
@@ -2376,10 +2374,9 @@
           </a:lstStyle>
           <a:p>
             <a:r>
-              <a:rPr lang="en-US" smtClean="0"/>
+              <a:rPr lang="en-US"/>
               <a:t>Click to edit Master title style</a:t>
             </a:r>
-            <a:endParaRPr lang="en-US"/>
           </a:p>
         </p:txBody>
       </p:sp>
@@ -2503,7 +2500,7 @@
           <a:p>
             <a:pPr lvl="0"/>
             <a:r>
-              <a:rPr lang="en-US" smtClean="0"/>
+              <a:rPr lang="en-US"/>
               <a:t>Click to edit Master text styles</a:t>
             </a:r>
           </a:p>
@@ -2526,7 +2523,7 @@
           <a:p>
             <a:fld id="{5BCAD085-E8A6-8845-BD4E-CB4CCA059FC4}" type="datetimeFigureOut">
               <a:rPr lang="en-US" smtClean="0"/>
-              <a:t>1/27/13</a:t>
+              <a:t>5/7/2026</a:t>
             </a:fld>
             <a:endParaRPr lang="en-US"/>
           </a:p>
@@ -2635,10 +2632,9 @@
           <a:lstStyle/>
           <a:p>
             <a:r>
-              <a:rPr lang="en-US" smtClean="0"/>
+              <a:rPr lang="en-US"/>
               <a:t>Click to edit Master title style</a:t>
             </a:r>
-            <a:endParaRPr lang="en-US"/>
           </a:p>
         </p:txBody>
       </p:sp>
@@ -2669,38 +2665,37 @@
           <a:p>
             <a:pPr lvl="0"/>
             <a:r>
-              <a:rPr lang="en-US" smtClean="0"/>
+              <a:rPr lang="en-US"/>
               <a:t>Click to edit Master text styles</a:t>
             </a:r>
           </a:p>
           <a:p>
             <a:pPr lvl="1"/>
             <a:r>
-              <a:rPr lang="en-US" smtClean="0"/>
+              <a:rPr lang="en-US"/>
               <a:t>Second level</a:t>
             </a:r>
           </a:p>
           <a:p>
             <a:pPr lvl="2"/>
             <a:r>
-              <a:rPr lang="en-US" smtClean="0"/>
+              <a:rPr lang="en-US"/>
               <a:t>Third level</a:t>
             </a:r>
           </a:p>
           <a:p>
             <a:pPr lvl="3"/>
             <a:r>
-              <a:rPr lang="en-US" smtClean="0"/>
+              <a:rPr lang="en-US"/>
               <a:t>Fourth level</a:t>
             </a:r>
           </a:p>
           <a:p>
             <a:pPr lvl="4"/>
             <a:r>
-              <a:rPr lang="en-US" smtClean="0"/>
+              <a:rPr lang="en-US"/>
               <a:t>Fifth level</a:t>
             </a:r>
-            <a:endParaRPr lang="en-US"/>
           </a:p>
         </p:txBody>
       </p:sp>
@@ -2739,7 +2734,7 @@
           <a:p>
             <a:fld id="{5BCAD085-E8A6-8845-BD4E-CB4CCA059FC4}" type="datetimeFigureOut">
               <a:rPr lang="en-US" smtClean="0"/>
-              <a:t>1/27/13</a:t>
+              <a:t>5/7/2026</a:t>
             </a:fld>
             <a:endParaRPr lang="en-US"/>
           </a:p>
@@ -3098,7 +3093,7 @@
 </file>
 
 <file path=ppt/slides/slide1.xml><?xml version="1.0" encoding="utf-8"?>
-<p:sld xmlns:a="http://schemas.openxmlformats.org/drawingml/2006/main" xmlns:p="http://schemas.openxmlformats.org/presentationml/2006/main" xmlns:r="http://schemas.openxmlformats.org/officeDocument/2006/relationships">
+<p:sld xmlns:a="http://schemas.openxmlformats.org/drawingml/2006/main" xmlns:r="http://schemas.openxmlformats.org/officeDocument/2006/relationships" xmlns:p="http://schemas.openxmlformats.org/presentationml/2006/main">
   <p:cSld>
     <p:bg>
       <p:bgPr>
@@ -3114,7 +3109,14 @@
         <p:cNvGrpSpPr/>
         <p:nvPr/>
       </p:nvGrpSpPr>
-      <p:grpSpPr/>
+      <p:grpSpPr>
+        <a:xfrm>
+          <a:off x="0" y="0"/>
+          <a:ext cx="0" cy="0"/>
+          <a:chOff x="0" y="0"/>
+          <a:chExt cx="0" cy="0"/>
+        </a:xfrm>
+      </p:grpSpPr>
       <p:sp>
         <p:nvSpPr>
           <p:cNvPr id="2" name="Rectangle 1"/>
@@ -3155,6 +3157,7 @@
           <a:lstStyle/>
           <a:p>
             <a:pPr algn="ctr"/>
+            <a:endParaRPr/>
           </a:p>
         </p:txBody>
       </p:sp>
@@ -3198,6 +3201,7 @@
           <a:lstStyle/>
           <a:p>
             <a:pPr algn="ctr"/>
+            <a:endParaRPr/>
           </a:p>
         </p:txBody>
       </p:sp>
@@ -3241,6 +3245,7 @@
           <a:lstStyle/>
           <a:p>
             <a:pPr algn="ctr"/>
+            <a:endParaRPr/>
           </a:p>
         </p:txBody>
       </p:sp>
@@ -3319,6 +3324,7 @@
           <a:lstStyle/>
           <a:p>
             <a:pPr algn="ctr"/>
+            <a:endParaRPr/>
           </a:p>
         </p:txBody>
       </p:sp>
@@ -3365,7 +3371,7 @@
         <p:spPr>
           <a:xfrm>
             <a:off x="365760" y="6035040"/>
-            <a:ext cx="11430000" cy="548640"/>
+            <a:ext cx="11430000" cy="292388"/>
           </a:xfrm>
           <a:prstGeom prst="rect">
             <a:avLst/>
@@ -3373,19 +3379,132 @@
           <a:noFill/>
         </p:spPr>
         <p:txBody>
-          <a:bodyPr wrap="square">
+          <a:bodyPr wrap="square" lIns="91440" tIns="45720" rIns="91440" bIns="45720" anchor="t">
             <a:spAutoFit/>
           </a:bodyPr>
           <a:lstStyle/>
           <a:p>
             <a:pPr algn="l"/>
             <a:r>
+              <a:rPr sz="1300" b="0" i="0" dirty="0">
+                <a:solidFill>
+                  <a:srgbClr val="8899AA"/>
+                </a:solidFill>
+              </a:rPr>
+              <a:t>Cornerstone Swarm Drones  ·  </a:t>
+            </a:r>
+            <a:r>
+              <a:rPr lang="en-US" sz="1300">
+                <a:solidFill>
+                  <a:srgbClr val="8899AA"/>
+                </a:solidFill>
+              </a:rPr>
+              <a:t>2025-2026</a:t>
+            </a:r>
+            <a:r>
               <a:rPr sz="1300" b="0" i="0">
                 <a:solidFill>
                   <a:srgbClr val="8899AA"/>
                 </a:solidFill>
               </a:rPr>
-              <a:t>Cornerstone Swarm Drones  ·  2024-2025  ·  Capstone Research Project</a:t>
+              <a:t> </a:t>
+            </a:r>
+          </a:p>
+        </p:txBody>
+      </p:sp>
+      <p:sp>
+        <p:nvSpPr>
+          <p:cNvPr id="9" name="TextBox 8">
+            <a:extLst>
+              <a:ext uri="{FF2B5EF4-FFF2-40B4-BE49-F238E27FC236}">
+                <a16:creationId xmlns:a16="http://schemas.microsoft.com/office/drawing/2014/main" id="{10555231-4912-52DE-FB6B-B58F81977AA6}"/>
+              </a:ext>
+            </a:extLst>
+          </p:cNvPr>
+          <p:cNvSpPr txBox="1"/>
+          <p:nvPr/>
+        </p:nvSpPr>
+        <p:spPr>
+          <a:xfrm>
+            <a:off x="3789750" y="4163313"/>
+            <a:ext cx="4124962" cy="1200329"/>
+          </a:xfrm>
+          <a:prstGeom prst="rect">
+            <a:avLst/>
+          </a:prstGeom>
+          <a:noFill/>
+        </p:spPr>
+        <p:txBody>
+          <a:bodyPr rot="0" spcFirstLastPara="0" vertOverflow="overflow" horzOverflow="overflow" vert="horz" wrap="square" lIns="91440" tIns="45720" rIns="91440" bIns="45720" numCol="1" spcCol="0" rtlCol="0" fromWordArt="0" anchor="t" anchorCtr="0" forceAA="0" compatLnSpc="1">
+            <a:prstTxWarp prst="textNoShape">
+              <a:avLst/>
+            </a:prstTxWarp>
+            <a:spAutoFit/>
+          </a:bodyPr>
+          <a:lstStyle/>
+          <a:p>
+            <a:pPr algn="ctr"/>
+            <a:r>
+              <a:rPr lang="en-US">
+                <a:solidFill>
+                  <a:schemeClr val="tx2">
+                    <a:lumMod val="40000"/>
+                    <a:lumOff val="60000"/>
+                  </a:schemeClr>
+                </a:solidFill>
+                <a:ea typeface="Calibri"/>
+                <a:cs typeface="Calibri"/>
+              </a:rPr>
+              <a:t>Team-</a:t>
+            </a:r>
+            <a:endParaRPr lang="en-US"/>
+          </a:p>
+          <a:p>
+            <a:pPr algn="ctr"/>
+            <a:r>
+              <a:rPr lang="en-US">
+                <a:solidFill>
+                  <a:schemeClr val="tx2">
+                    <a:lumMod val="40000"/>
+                    <a:lumOff val="60000"/>
+                  </a:schemeClr>
+                </a:solidFill>
+                <a:ea typeface="Calibri"/>
+                <a:cs typeface="Calibri"/>
+              </a:rPr>
+              <a:t>Jivesh Kesar – 2025JRB2026</a:t>
+            </a:r>
+          </a:p>
+          <a:p>
+            <a:pPr algn="ctr"/>
+            <a:r>
+              <a:rPr lang="en-US">
+                <a:solidFill>
+                  <a:schemeClr val="tx2">
+                    <a:lumMod val="40000"/>
+                    <a:lumOff val="60000"/>
+                  </a:schemeClr>
+                </a:solidFill>
+                <a:ea typeface="Calibri"/>
+                <a:cs typeface="Calibri"/>
+              </a:rPr>
+              <a:t>Harsh – 2025JRB2049</a:t>
+            </a:r>
+          </a:p>
+          <a:p>
+            <a:pPr algn="ctr"/>
+            <a:r>
+              <a:rPr lang="en-US">
+                <a:solidFill>
+                  <a:schemeClr val="tx2">
+                    <a:lumMod val="40000"/>
+                    <a:lumOff val="60000"/>
+                  </a:schemeClr>
+                </a:solidFill>
+                <a:ea typeface="Calibri"/>
+                <a:cs typeface="Calibri"/>
+              </a:rPr>
+              <a:t>Rohit Shankar Sinha - 2025JRB2051</a:t>
             </a:r>
           </a:p>
         </p:txBody>
@@ -3399,7 +3518,7 @@
 </file>
 
 <file path=ppt/slides/slide10.xml><?xml version="1.0" encoding="utf-8"?>
-<p:sld xmlns:a="http://schemas.openxmlformats.org/drawingml/2006/main" xmlns:p="http://schemas.openxmlformats.org/presentationml/2006/main" xmlns:r="http://schemas.openxmlformats.org/officeDocument/2006/relationships">
+<p:sld xmlns:a="http://schemas.openxmlformats.org/drawingml/2006/main" xmlns:r="http://schemas.openxmlformats.org/officeDocument/2006/relationships" xmlns:p="http://schemas.openxmlformats.org/presentationml/2006/main">
   <p:cSld>
     <p:bg>
       <p:bgPr>
@@ -3415,7 +3534,14 @@
         <p:cNvGrpSpPr/>
         <p:nvPr/>
       </p:nvGrpSpPr>
-      <p:grpSpPr/>
+      <p:grpSpPr>
+        <a:xfrm>
+          <a:off x="0" y="0"/>
+          <a:ext cx="0" cy="0"/>
+          <a:chOff x="0" y="0"/>
+          <a:chExt cx="0" cy="0"/>
+        </a:xfrm>
+      </p:grpSpPr>
       <p:sp>
         <p:nvSpPr>
           <p:cNvPr id="2" name="Rectangle 1"/>
@@ -3456,6 +3582,7 @@
           <a:lstStyle/>
           <a:p>
             <a:pPr algn="ctr"/>
+            <a:endParaRPr/>
           </a:p>
         </p:txBody>
       </p:sp>
@@ -3488,7 +3615,7 @@
                   <a:srgbClr val="00B4D8"/>
                 </a:solidFill>
               </a:rPr>
-              <a:t>Methodology — RL Layer (MAPPO)</a:t>
+              <a:t>Novelty</a:t>
             </a:r>
           </a:p>
         </p:txBody>
@@ -3533,6 +3660,7 @@
           <a:lstStyle/>
           <a:p>
             <a:pPr algn="ctr"/>
+            <a:endParaRPr/>
           </a:p>
         </p:txBody>
       </p:sp>
@@ -3544,8 +3672,8 @@
         </p:nvSpPr>
         <p:spPr>
           <a:xfrm>
-            <a:off x="274320" y="1005840"/>
-            <a:ext cx="11430000" cy="457200"/>
+            <a:off x="274320" y="1123821"/>
+            <a:ext cx="11430000" cy="4575612"/>
           </a:xfrm>
           <a:prstGeom prst="rect">
             <a:avLst/>
@@ -3553,45 +3681,11 @@
           <a:noFill/>
         </p:spPr>
         <p:txBody>
-          <a:bodyPr wrap="square">
+          <a:bodyPr wrap="square" lIns="91440" tIns="45720" rIns="91440" bIns="45720" anchor="t">
             <a:spAutoFit/>
           </a:bodyPr>
           <a:lstStyle/>
           <a:p>
-            <a:pPr algn="l"/>
-            <a:r>
-              <a:rPr sz="1600" b="0" i="1">
-                <a:solidFill>
-                  <a:srgbClr val="CCCCCC"/>
-                </a:solidFill>
-              </a:rPr>
-              <a:t>MAPPO policy outputs per-drone Q/R scale factors</a:t>
-            </a:r>
-          </a:p>
-        </p:txBody>
-      </p:sp>
-      <p:sp>
-        <p:nvSpPr>
-          <p:cNvPr id="6" name="TextBox 5"/>
-          <p:cNvSpPr txBox="1"/>
-          <p:nvPr/>
-        </p:nvSpPr>
-        <p:spPr>
-          <a:xfrm>
-            <a:off x="274320" y="1645920"/>
-            <a:ext cx="11430000" cy="5029200"/>
-          </a:xfrm>
-          <a:prstGeom prst="rect">
-            <a:avLst/>
-          </a:prstGeom>
-          <a:noFill/>
-        </p:spPr>
-        <p:txBody>
-          <a:bodyPr wrap="square">
-            <a:spAutoFit/>
-          </a:bodyPr>
-          <a:lstStyle/>
-          <a:p>
             <a:pPr>
               <a:spcBef>
                 <a:spcPts val="500"/>
@@ -3603,7 +3697,37 @@
                   <a:srgbClr val="FFFFFF"/>
                 </a:solidFill>
               </a:rPr>
-              <a:t>Architecture:  Shared actor-critic (Centralised Training / Decentralised Execution)</a:t>
+              <a:t>1.  Cost-matrix adaptation via MARL</a:t>
+            </a:r>
+          </a:p>
+          <a:p>
+            <a:pPr lvl="1">
+              <a:spcBef>
+                <a:spcPts val="500"/>
+              </a:spcBef>
+            </a:pPr>
+            <a:r>
+              <a:rPr sz="1500">
+                <a:solidFill>
+                  <a:srgbClr val="CCCCCC"/>
+                </a:solidFill>
+              </a:rPr>
+              <a:t>— Unlike prior work that fixes Q, R: MAPPO outputs  per-drone, per-step</a:t>
+            </a:r>
+          </a:p>
+          <a:p>
+            <a:pPr lvl="1">
+              <a:spcBef>
+                <a:spcPts val="500"/>
+              </a:spcBef>
+            </a:pPr>
+            <a:r>
+              <a:rPr sz="1500">
+                <a:solidFill>
+                  <a:srgbClr val="CCCCCC"/>
+                </a:solidFill>
+              </a:rPr>
+              <a:t>multiplicative scale factors, making the DMPC cost time-varying</a:t>
             </a:r>
           </a:p>
           <a:p>
@@ -3612,13 +3736,55 @@
                 <a:spcPts val="500"/>
               </a:spcBef>
             </a:pPr>
+            <a:endParaRPr sz="1500">
+              <a:solidFill>
+                <a:srgbClr val="CCCCCC"/>
+              </a:solidFill>
+            </a:endParaRPr>
+          </a:p>
+          <a:p>
+            <a:pPr>
+              <a:spcBef>
+                <a:spcPts val="500"/>
+              </a:spcBef>
+            </a:pPr>
             <a:r>
               <a:rPr sz="1700">
                 <a:solidFill>
                   <a:srgbClr val="FFFFFF"/>
                 </a:solidFill>
               </a:rPr>
-              <a:t/>
+              <a:t>2.  Safe-by-construction architecture</a:t>
+            </a:r>
+          </a:p>
+          <a:p>
+            <a:pPr lvl="1">
+              <a:spcBef>
+                <a:spcPts val="500"/>
+              </a:spcBef>
+            </a:pPr>
+            <a:r>
+              <a:rPr sz="1500">
+                <a:solidFill>
+                  <a:srgbClr val="CCCCCC"/>
+                </a:solidFill>
+              </a:rPr>
+              <a:t>— CBF constraints are never relaxed; RL only shapes the cost landscape</a:t>
+            </a:r>
+          </a:p>
+          <a:p>
+            <a:pPr lvl="1">
+              <a:spcBef>
+                <a:spcPts val="500"/>
+              </a:spcBef>
+            </a:pPr>
+            <a:r>
+              <a:rPr sz="1500">
+                <a:solidFill>
+                  <a:srgbClr val="CCCCCC"/>
+                </a:solidFill>
+              </a:rPr>
+              <a:t>— Collision avoidance holds regardless of policy quality</a:t>
             </a:r>
           </a:p>
           <a:p>
@@ -3627,13 +3793,25 @@
                 <a:spcPts val="500"/>
               </a:spcBef>
             </a:pPr>
+            <a:endParaRPr sz="1500">
+              <a:solidFill>
+                <a:srgbClr val="CCCCCC"/>
+              </a:solidFill>
+            </a:endParaRPr>
+          </a:p>
+          <a:p>
+            <a:pPr>
+              <a:spcBef>
+                <a:spcPts val="500"/>
+              </a:spcBef>
+            </a:pPr>
             <a:r>
               <a:rPr sz="1700">
                 <a:solidFill>
                   <a:srgbClr val="FFFFFF"/>
                 </a:solidFill>
               </a:rPr>
-              <a:t>Observation (40-D per drone):</a:t>
+              <a:t>3.  Staggered home-position spawning protocol</a:t>
             </a:r>
           </a:p>
           <a:p>
@@ -3648,7 +3826,7 @@
                   <a:srgbClr val="CCCCCC"/>
                 </a:solidFill>
               </a:rPr>
-              <a:t>[own state (11), ref_pos (3), ref_vel (3), tracking error (3),</a:t>
+              <a:t>— Novel launch sequencing that satisfies CBF constraints from t = 0</a:t>
             </a:r>
           </a:p>
           <a:p>
@@ -3658,12 +3836,77 @@
               </a:spcBef>
             </a:pPr>
             <a:r>
+              <a:rPr sz="1500" dirty="0">
+                <a:solidFill>
+                  <a:srgbClr val="CCCCCC"/>
+                </a:solidFill>
+              </a:rPr>
+              <a:t>— </a:t>
+            </a:r>
+            <a:r>
+              <a:rPr sz="1500" dirty="0" err="1">
+                <a:solidFill>
+                  <a:srgbClr val="CCCCCC"/>
+                </a:solidFill>
+              </a:rPr>
+              <a:t>Generalisable</a:t>
+            </a:r>
+            <a:r>
+              <a:rPr sz="1500" dirty="0">
+                <a:solidFill>
+                  <a:srgbClr val="CCCCCC"/>
+                </a:solidFill>
+              </a:rPr>
+              <a:t> to any home-basing strategy (carrier drone, landing pad)</a:t>
+            </a:r>
+            <a:endParaRPr sz="1500" dirty="0">
+              <a:solidFill>
+                <a:srgbClr val="CCCCCC"/>
+              </a:solidFill>
+              <a:ea typeface="Calibri"/>
+              <a:cs typeface="Calibri"/>
+            </a:endParaRPr>
+          </a:p>
+          <a:p>
+            <a:pPr>
+              <a:spcBef>
+                <a:spcPts val="500"/>
+              </a:spcBef>
+            </a:pPr>
+            <a:endParaRPr sz="1500">
+              <a:solidFill>
+                <a:srgbClr val="CCCCCC"/>
+              </a:solidFill>
+            </a:endParaRPr>
+          </a:p>
+          <a:p>
+            <a:pPr>
+              <a:spcBef>
+                <a:spcPts val="500"/>
+              </a:spcBef>
+            </a:pPr>
+            <a:r>
+              <a:rPr sz="1700">
+                <a:solidFill>
+                  <a:srgbClr val="FFFFFF"/>
+                </a:solidFill>
+              </a:rPr>
+              <a:t>4.  Scenario-aware reward shaping without hand-tuning per drone</a:t>
+            </a:r>
+          </a:p>
+          <a:p>
+            <a:pPr lvl="1">
+              <a:spcBef>
+                <a:spcPts val="500"/>
+              </a:spcBef>
+            </a:pPr>
+            <a:r>
               <a:rPr sz="1500">
                 <a:solidFill>
                   <a:srgbClr val="CCCCCC"/>
                 </a:solidFill>
               </a:rPr>
-              <a:t>nearest-neighbour Δp,Δv (6), mean swarm offset (3), battery (1),</a:t>
+              <a:t>— Shared MAPPO policy trained once, deployed across all three ISR scenarios</a:t>
             </a:r>
           </a:p>
           <a:p>
@@ -3678,127 +3921,7 @@
                   <a:srgbClr val="CCCCCC"/>
                 </a:solidFill>
               </a:rPr>
-              <a:t>health (1), last control (3), ADMM residual (3), solve time (1),</a:t>
-            </a:r>
-          </a:p>
-          <a:p>
-            <a:pPr lvl="1">
-              <a:spcBef>
-                <a:spcPts val="500"/>
-              </a:spcBef>
-            </a:pPr>
-            <a:r>
-              <a:rPr sz="1500">
-                <a:solidFill>
-                  <a:srgbClr val="CCCCCC"/>
-                </a:solidFill>
-              </a:rPr>
-              <a:t>collision margin (1), mission progress (1)]</a:t>
-            </a:r>
-          </a:p>
-          <a:p>
-            <a:pPr>
-              <a:spcBef>
-                <a:spcPts val="500"/>
-              </a:spcBef>
-            </a:pPr>
-            <a:r>
-              <a:rPr sz="1700">
-                <a:solidFill>
-                  <a:srgbClr val="FFFFFF"/>
-                </a:solidFill>
-              </a:rPr>
-              <a:t/>
-            </a:r>
-          </a:p>
-          <a:p>
-            <a:pPr>
-              <a:spcBef>
-                <a:spcPts val="500"/>
-              </a:spcBef>
-            </a:pPr>
-            <a:r>
-              <a:rPr sz="1700">
-                <a:solidFill>
-                  <a:srgbClr val="FFFFFF"/>
-                </a:solidFill>
-              </a:rPr>
-              <a:t>Action (14-D per drone):</a:t>
-            </a:r>
-          </a:p>
-          <a:p>
-            <a:pPr lvl="1">
-              <a:spcBef>
-                <a:spcPts val="500"/>
-              </a:spcBef>
-            </a:pPr>
-            <a:r>
-              <a:rPr sz="1500">
-                <a:solidFill>
-                  <a:srgbClr val="CCCCCC"/>
-                </a:solidFill>
-              </a:rPr>
-              <a:t>[q_scale (11) × R diagonal, r_scale (3) × R diagonal]  ∈ [0.1, 10.0]</a:t>
-            </a:r>
-          </a:p>
-          <a:p>
-            <a:pPr>
-              <a:spcBef>
-                <a:spcPts val="500"/>
-              </a:spcBef>
-            </a:pPr>
-            <a:r>
-              <a:rPr sz="1700">
-                <a:solidFill>
-                  <a:srgbClr val="FFFFFF"/>
-                </a:solidFill>
-              </a:rPr>
-              <a:t/>
-            </a:r>
-          </a:p>
-          <a:p>
-            <a:pPr>
-              <a:spcBef>
-                <a:spcPts val="500"/>
-              </a:spcBef>
-            </a:pPr>
-            <a:r>
-              <a:rPr sz="1700">
-                <a:solidFill>
-                  <a:srgbClr val="FFFFFF"/>
-                </a:solidFill>
-              </a:rPr>
-              <a:t>Training:  SB3 PPO  ·  shared policy weights across all drones</a:t>
-            </a:r>
-          </a:p>
-          <a:p>
-            <a:pPr>
-              <a:spcBef>
-                <a:spcPts val="500"/>
-              </a:spcBef>
-            </a:pPr>
-            <a:r>
-              <a:rPr sz="1700">
-                <a:solidFill>
-                  <a:srgbClr val="FFFFFF"/>
-                </a:solidFill>
-              </a:rPr>
-              <a:t>Reward: r = W_track·r_track + W_form·r_form + W_safe·r_safe</a:t>
-            </a:r>
-          </a:p>
-          <a:p>
-            <a:pPr lvl="1">
-              <a:spcBef>
-                <a:spcPts val="500"/>
-              </a:spcBef>
-            </a:pPr>
-            <a:r>
-              <a:rPr sz="1500">
-                <a:solidFill>
-                  <a:srgbClr val="CCCCCC"/>
-                </a:solidFill>
-              </a:rPr>
-              <a:t>+ W_eff·r_eff + W_cov·r_cov    (scenario-specific weights)</a:t>
+              <a:t>— Scenario context embedded in observation rather than separate policies</a:t>
             </a:r>
           </a:p>
         </p:txBody>
@@ -3812,7 +3935,7 @@
 </file>
 
 <file path=ppt/slides/slide11.xml><?xml version="1.0" encoding="utf-8"?>
-<p:sld xmlns:a="http://schemas.openxmlformats.org/drawingml/2006/main" xmlns:p="http://schemas.openxmlformats.org/presentationml/2006/main" xmlns:r="http://schemas.openxmlformats.org/officeDocument/2006/relationships">
+<p:sld xmlns:a="http://schemas.openxmlformats.org/drawingml/2006/main" xmlns:r="http://schemas.openxmlformats.org/officeDocument/2006/relationships" xmlns:p="http://schemas.openxmlformats.org/presentationml/2006/main">
   <p:cSld>
     <p:bg>
       <p:bgPr>
@@ -3828,7 +3951,14 @@
         <p:cNvGrpSpPr/>
         <p:nvPr/>
       </p:nvGrpSpPr>
-      <p:grpSpPr/>
+      <p:grpSpPr>
+        <a:xfrm>
+          <a:off x="0" y="0"/>
+          <a:ext cx="0" cy="0"/>
+          <a:chOff x="0" y="0"/>
+          <a:chExt cx="0" cy="0"/>
+        </a:xfrm>
+      </p:grpSpPr>
       <p:sp>
         <p:nvSpPr>
           <p:cNvPr id="2" name="Rectangle 1"/>
@@ -3869,6 +3999,7 @@
           <a:lstStyle/>
           <a:p>
             <a:pPr algn="ctr"/>
+            <a:endParaRPr/>
           </a:p>
         </p:txBody>
       </p:sp>
@@ -3901,7 +4032,7 @@
                   <a:srgbClr val="00B4D8"/>
                 </a:solidFill>
               </a:rPr>
-              <a:t>Methodology — Staggered Drone Launch</a:t>
+              <a:t>Conclusion</a:t>
             </a:r>
           </a:p>
         </p:txBody>
@@ -3946,6 +4077,7 @@
           <a:lstStyle/>
           <a:p>
             <a:pPr algn="ctr"/>
+            <a:endParaRPr/>
           </a:p>
         </p:txBody>
       </p:sp>
@@ -3957,41 +4089,7 @@
         </p:nvSpPr>
         <p:spPr>
           <a:xfrm>
-            <a:off x="274320" y="1005840"/>
-            <a:ext cx="11430000" cy="457200"/>
-          </a:xfrm>
-          <a:prstGeom prst="rect">
-            <a:avLst/>
-          </a:prstGeom>
-          <a:noFill/>
-        </p:spPr>
-        <p:txBody>
-          <a:bodyPr wrap="square">
-            <a:spAutoFit/>
-          </a:bodyPr>
-          <a:lstStyle/>
-          <a:p>
-            <a:pPr algn="l"/>
-            <a:r>
-              <a:rPr sz="1600" b="0" i="1">
-                <a:solidFill>
-                  <a:srgbClr val="CCCCCC"/>
-                </a:solidFill>
-              </a:rPr>
-              <a:t>All drones spawn at the same home position, launched at fixed intervals</a:t>
-            </a:r>
-          </a:p>
-        </p:txBody>
-      </p:sp>
-      <p:sp>
-        <p:nvSpPr>
-          <p:cNvPr id="6" name="TextBox 5"/>
-          <p:cNvSpPr txBox="1"/>
-          <p:nvPr/>
-        </p:nvSpPr>
-        <p:spPr>
-          <a:xfrm>
-            <a:off x="274320" y="1645920"/>
+            <a:off x="274320" y="1508760"/>
             <a:ext cx="11430000" cy="5029200"/>
           </a:xfrm>
           <a:prstGeom prst="rect">
@@ -4016,7 +4114,109 @@
                   <a:srgbClr val="FFFFFF"/>
                 </a:solidFill>
               </a:rPr>
-              <a:t>Problem: launching N drones simultaneously from the same point</a:t>
+              <a:t>✓  Designed and implemented a fully functional MAPPO-adaptive DMPC swarm</a:t>
+            </a:r>
+          </a:p>
+          <a:p>
+            <a:pPr>
+              <a:spcBef>
+                <a:spcPts val="500"/>
+              </a:spcBef>
+            </a:pPr>
+            <a:r>
+              <a:rPr sz="1700">
+                <a:solidFill>
+                  <a:srgbClr val="FFFFFF"/>
+                </a:solidFill>
+              </a:rPr>
+              <a:t>✓  Demonstrated on three realistic ISR scenarios (coverage, threat, search)</a:t>
+            </a:r>
+          </a:p>
+          <a:p>
+            <a:pPr>
+              <a:spcBef>
+                <a:spcPts val="500"/>
+              </a:spcBef>
+            </a:pPr>
+            <a:r>
+              <a:rPr sz="1700">
+                <a:solidFill>
+                  <a:srgbClr val="FFFFFF"/>
+                </a:solidFill>
+              </a:rPr>
+              <a:t>✓  CBF-guaranteed collision avoidance with zero violations</a:t>
+            </a:r>
+          </a:p>
+          <a:p>
+            <a:pPr>
+              <a:spcBef>
+                <a:spcPts val="500"/>
+              </a:spcBef>
+            </a:pPr>
+            <a:r>
+              <a:rPr sz="1700">
+                <a:solidFill>
+                  <a:srgbClr val="FFFFFF"/>
+                </a:solidFill>
+              </a:rPr>
+              <a:t>✓  RL policy consistently improves mission reward over pure DMPC</a:t>
+            </a:r>
+          </a:p>
+          <a:p>
+            <a:pPr>
+              <a:spcBef>
+                <a:spcPts val="500"/>
+              </a:spcBef>
+            </a:pPr>
+            <a:r>
+              <a:rPr sz="1700">
+                <a:solidFill>
+                  <a:srgbClr val="FFFFFF"/>
+                </a:solidFill>
+              </a:rPr>
+              <a:t>✓  Staggered launch protocol ensures safe simultaneous deployment from one pad</a:t>
+            </a:r>
+          </a:p>
+          <a:p>
+            <a:pPr>
+              <a:spcBef>
+                <a:spcPts val="500"/>
+              </a:spcBef>
+            </a:pPr>
+            <a:r>
+              <a:rPr sz="1700">
+                <a:solidFill>
+                  <a:srgbClr val="FFFFFF"/>
+                </a:solidFill>
+              </a:rPr>
+              <a:t>✓  Open-source PyBullet simulation with video recording for reproducibility</a:t>
+            </a:r>
+          </a:p>
+          <a:p>
+            <a:pPr>
+              <a:spcBef>
+                <a:spcPts val="500"/>
+              </a:spcBef>
+            </a:pPr>
+            <a:endParaRPr sz="1700">
+              <a:solidFill>
+                <a:srgbClr val="FFFFFF"/>
+              </a:solidFill>
+            </a:endParaRPr>
+          </a:p>
+          <a:p>
+            <a:pPr>
+              <a:spcBef>
+                <a:spcPts val="500"/>
+              </a:spcBef>
+            </a:pPr>
+            <a:r>
+              <a:rPr sz="1700">
+                <a:solidFill>
+                  <a:srgbClr val="FFFFFF"/>
+                </a:solidFill>
+              </a:rPr>
+              <a:t>Future work:</a:t>
             </a:r>
           </a:p>
           <a:p>
@@ -4031,37 +4231,7 @@
                   <a:srgbClr val="CCCCCC"/>
                 </a:solidFill>
               </a:rPr>
-              <a:t>→ all pairs at distance 0 → CBF constraints immediately violated</a:t>
-            </a:r>
-          </a:p>
-          <a:p>
-            <a:pPr>
-              <a:spcBef>
-                <a:spcPts val="500"/>
-              </a:spcBef>
-            </a:pPr>
-            <a:r>
-              <a:rPr sz="1700">
-                <a:solidFill>
-                  <a:srgbClr val="FFFFFF"/>
-                </a:solidFill>
-              </a:rPr>
-              <a:t/>
-            </a:r>
-          </a:p>
-          <a:p>
-            <a:pPr>
-              <a:spcBef>
-                <a:spcPts val="500"/>
-              </a:spcBef>
-            </a:pPr>
-            <a:r>
-              <a:rPr sz="1700">
-                <a:solidFill>
-                  <a:srgbClr val="FFFFFF"/>
-                </a:solidFill>
-              </a:rPr>
-              <a:t>Solution — Staggered sequential launch:</a:t>
+              <a:t>▶  Hardware-in-the-loop testing on real hector_quadrotor platforms</a:t>
             </a:r>
           </a:p>
           <a:p>
@@ -4076,7 +4246,7 @@
                   <a:srgbClr val="CCCCCC"/>
                 </a:solidFill>
               </a:rPr>
-              <a:t>• All drones initialise at home position [0, 0, HOME_ALT]</a:t>
+              <a:t>▶  Extend to 8–12 drone swarms with scalable ADMM partitioning</a:t>
             </a:r>
           </a:p>
           <a:p>
@@ -4091,7 +4261,7 @@
                   <a:srgbClr val="CCCCCC"/>
                 </a:solidFill>
               </a:rPr>
-              <a:t>• Drone i activates at step  launch_step[i] = i × spawn_interval</a:t>
+              <a:t>▶  Incorporate communication-delay and packet-loss models</a:t>
             </a:r>
           </a:p>
           <a:p>
@@ -4106,7 +4276,7 @@
                   <a:srgbClr val="CCCCCC"/>
                 </a:solidFill>
               </a:rPr>
-              <a:t>• Default: spawn_interval = 50 steps = 1 s at 50 Hz</a:t>
+              <a:t>▶  Transfer to outdoor GPS-denied environments using EKF localisation</a:t>
             </a:r>
           </a:p>
           <a:p>
@@ -4121,67 +4291,7 @@
                   <a:srgbClr val="CCCCCC"/>
                 </a:solidFill>
               </a:rPr>
-              <a:t>• Before launch: drone stays frozen at home, excluded from DMPC neighbour lists</a:t>
-            </a:r>
-          </a:p>
-          <a:p>
-            <a:pPr lvl="1">
-              <a:spcBef>
-                <a:spcPts val="500"/>
-              </a:spcBef>
-            </a:pPr>
-            <a:r>
-              <a:rPr sz="1500">
-                <a:solidFill>
-                  <a:srgbClr val="CCCCCC"/>
-                </a:solidFill>
-              </a:rPr>
-              <a:t>• After launch:  DMPC controls the drone toward its mission waypoint</a:t>
-            </a:r>
-          </a:p>
-          <a:p>
-            <a:pPr>
-              <a:spcBef>
-                <a:spcPts val="500"/>
-              </a:spcBef>
-            </a:pPr>
-            <a:r>
-              <a:rPr sz="1700">
-                <a:solidFill>
-                  <a:srgbClr val="FFFFFF"/>
-                </a:solidFill>
-              </a:rPr>
-              <a:t/>
-            </a:r>
-          </a:p>
-          <a:p>
-            <a:pPr>
-              <a:spcBef>
-                <a:spcPts val="500"/>
-              </a:spcBef>
-            </a:pPr>
-            <a:r>
-              <a:rPr sz="1700">
-                <a:solidFill>
-                  <a:srgbClr val="FFFFFF"/>
-                </a:solidFill>
-              </a:rPr>
-              <a:t>Guarantee:  drone i-1 has at least  v_cruise × T_interval ≈ 8 m/s × 1 s = 8 m</a:t>
-            </a:r>
-          </a:p>
-          <a:p>
-            <a:pPr lvl="1">
-              <a:spcBef>
-                <a:spcPts val="500"/>
-              </a:spcBef>
-            </a:pPr>
-            <a:r>
-              <a:rPr sz="1500">
-                <a:solidFill>
-                  <a:srgbClr val="CCCCCC"/>
-                </a:solidFill>
-              </a:rPr>
-              <a:t>of separation before drone i activates  (&gt; d_safe = 3 m ✓)</a:t>
+              <a:t>▶  Investigate sim-to-real transfer with domain randomisation</a:t>
             </a:r>
           </a:p>
         </p:txBody>
@@ -4195,12 +4305,12 @@
 </file>
 
 <file path=ppt/slides/slide12.xml><?xml version="1.0" encoding="utf-8"?>
-<p:sld xmlns:a="http://schemas.openxmlformats.org/drawingml/2006/main" xmlns:p="http://schemas.openxmlformats.org/presentationml/2006/main" xmlns:r="http://schemas.openxmlformats.org/officeDocument/2006/relationships">
+<p:sld xmlns:a="http://schemas.openxmlformats.org/drawingml/2006/main" xmlns:r="http://schemas.openxmlformats.org/officeDocument/2006/relationships" xmlns:p="http://schemas.openxmlformats.org/presentationml/2006/main">
   <p:cSld>
     <p:bg>
       <p:bgPr>
         <a:solidFill>
-          <a:srgbClr val="0F3C78"/>
+          <a:srgbClr val="16213E"/>
         </a:solidFill>
         <a:effectLst/>
       </p:bgPr>
@@ -4211,7 +4321,14 @@
         <p:cNvGrpSpPr/>
         <p:nvPr/>
       </p:nvGrpSpPr>
-      <p:grpSpPr/>
+      <p:grpSpPr>
+        <a:xfrm>
+          <a:off x="0" y="0"/>
+          <a:ext cx="0" cy="0"/>
+          <a:chOff x="0" y="0"/>
+          <a:chExt cx="0" cy="0"/>
+        </a:xfrm>
+      </p:grpSpPr>
       <p:sp>
         <p:nvSpPr>
           <p:cNvPr id="2" name="Rectangle 1"/>
@@ -4221,7 +4338,7 @@
         <p:spPr>
           <a:xfrm>
             <a:off x="0" y="0"/>
-            <a:ext cx="228600" cy="6858000"/>
+            <a:ext cx="182880" cy="6858000"/>
           </a:xfrm>
           <a:prstGeom prst="rect">
             <a:avLst/>
@@ -4252,19 +4369,64 @@
           <a:lstStyle/>
           <a:p>
             <a:pPr algn="ctr"/>
-          </a:p>
-        </p:txBody>
-      </p:sp>
-      <p:sp>
-        <p:nvSpPr>
-          <p:cNvPr id="3" name="TextBox 2"/>
+            <a:endParaRPr/>
+          </a:p>
+        </p:txBody>
+      </p:sp>
+      <p:sp>
+        <p:nvSpPr>
+          <p:cNvPr id="3" name="Rectangle 2"/>
+          <p:cNvSpPr/>
+          <p:nvPr/>
+        </p:nvSpPr>
+        <p:spPr>
+          <a:xfrm>
+            <a:off x="0" y="0"/>
+            <a:ext cx="12188952" cy="91440"/>
+          </a:xfrm>
+          <a:prstGeom prst="rect">
+            <a:avLst/>
+          </a:prstGeom>
+          <a:solidFill>
+            <a:srgbClr val="00B4D8"/>
+          </a:solidFill>
+          <a:ln>
+            <a:noFill/>
+          </a:ln>
+        </p:spPr>
+        <p:style>
+          <a:lnRef idx="1">
+            <a:schemeClr val="accent1"/>
+          </a:lnRef>
+          <a:fillRef idx="3">
+            <a:schemeClr val="accent1"/>
+          </a:fillRef>
+          <a:effectRef idx="2">
+            <a:schemeClr val="accent1"/>
+          </a:effectRef>
+          <a:fontRef idx="minor">
+            <a:schemeClr val="lt1"/>
+          </a:fontRef>
+        </p:style>
+        <p:txBody>
+          <a:bodyPr rtlCol="0" anchor="ctr"/>
+          <a:lstStyle/>
+          <a:p>
+            <a:pPr algn="ctr"/>
+            <a:endParaRPr/>
+          </a:p>
+        </p:txBody>
+      </p:sp>
+      <p:sp>
+        <p:nvSpPr>
+          <p:cNvPr id="4" name="TextBox 3"/>
           <p:cNvSpPr txBox="1"/>
           <p:nvPr/>
         </p:nvSpPr>
         <p:spPr>
           <a:xfrm>
-            <a:off x="457200" y="1097280"/>
-            <a:ext cx="3657600" cy="1828800"/>
+            <a:off x="457200" y="1371600"/>
+            <a:ext cx="10972800" cy="1828800"/>
           </a:xfrm>
           <a:prstGeom prst="rect">
             <a:avLst/>
@@ -4277,21 +4439,21 @@
           </a:bodyPr>
           <a:lstStyle/>
           <a:p>
-            <a:pPr algn="l"/>
-            <a:r>
-              <a:rPr sz="9600" b="1" i="0">
-                <a:solidFill>
-                  <a:srgbClr val="0A1E50"/>
-                </a:solidFill>
-              </a:rPr>
-              <a:t>06</a:t>
-            </a:r>
-          </a:p>
-        </p:txBody>
-      </p:sp>
-      <p:sp>
-        <p:nvSpPr>
-          <p:cNvPr id="4" name="TextBox 3"/>
+            <a:pPr algn="ctr"/>
+            <a:r>
+              <a:rPr sz="7200" b="1" i="0">
+                <a:solidFill>
+                  <a:srgbClr val="FFFFFF"/>
+                </a:solidFill>
+              </a:rPr>
+              <a:t>Thank You</a:t>
+            </a:r>
+          </a:p>
+        </p:txBody>
+      </p:sp>
+      <p:sp>
+        <p:nvSpPr>
+          <p:cNvPr id="5" name="TextBox 4"/>
           <p:cNvSpPr txBox="1"/>
           <p:nvPr/>
         </p:nvSpPr>
@@ -4311,28 +4473,28 @@
           </a:bodyPr>
           <a:lstStyle/>
           <a:p>
-            <a:pPr algn="l"/>
-            <a:r>
-              <a:rPr sz="3800" b="1" i="0">
-                <a:solidFill>
-                  <a:srgbClr val="FFFFFF"/>
-                </a:solidFill>
-              </a:rPr>
-              <a:t>Challenges</a:t>
-            </a:r>
-          </a:p>
-        </p:txBody>
-      </p:sp>
-      <p:sp>
-        <p:nvSpPr>
-          <p:cNvPr id="5" name="TextBox 4"/>
+            <a:pPr algn="ctr"/>
+            <a:r>
+              <a:rPr sz="3200" b="0" i="0">
+                <a:solidFill>
+                  <a:srgbClr val="00B4D8"/>
+                </a:solidFill>
+              </a:rPr>
+              <a:t>Questions?</a:t>
+            </a:r>
+          </a:p>
+        </p:txBody>
+      </p:sp>
+      <p:sp>
+        <p:nvSpPr>
+          <p:cNvPr id="6" name="TextBox 5"/>
           <p:cNvSpPr txBox="1"/>
           <p:nvPr/>
         </p:nvSpPr>
         <p:spPr>
           <a:xfrm>
-            <a:off x="457200" y="4206240"/>
-            <a:ext cx="10972800" cy="731520"/>
+            <a:off x="457200" y="4754880"/>
+            <a:ext cx="10972800" cy="548640"/>
           </a:xfrm>
           <a:prstGeom prst="rect">
             <a:avLst/>
@@ -4345,14 +4507,48 @@
           </a:bodyPr>
           <a:lstStyle/>
           <a:p>
-            <a:pPr algn="l"/>
-            <a:r>
-              <a:rPr sz="1800" b="0" i="1">
-                <a:solidFill>
-                  <a:srgbClr val="00B4D8"/>
-                </a:solidFill>
-              </a:rPr>
-              <a:t>Technical hurdles encountered</a:t>
+            <a:pPr algn="ctr"/>
+            <a:r>
+              <a:rPr sz="1600" b="0" i="0">
+                <a:solidFill>
+                  <a:srgbClr val="CCCCCC"/>
+                </a:solidFill>
+              </a:rPr>
+              <a:t>Repository:  github.com/Cornerstone-swarm-drones/isr-rl-dmpc</a:t>
+            </a:r>
+          </a:p>
+        </p:txBody>
+      </p:sp>
+      <p:sp>
+        <p:nvSpPr>
+          <p:cNvPr id="7" name="TextBox 6"/>
+          <p:cNvSpPr txBox="1"/>
+          <p:nvPr/>
+        </p:nvSpPr>
+        <p:spPr>
+          <a:xfrm>
+            <a:off x="457200" y="5943600"/>
+            <a:ext cx="10972800" cy="457200"/>
+          </a:xfrm>
+          <a:prstGeom prst="rect">
+            <a:avLst/>
+          </a:prstGeom>
+          <a:noFill/>
+        </p:spPr>
+        <p:txBody>
+          <a:bodyPr wrap="square">
+            <a:spAutoFit/>
+          </a:bodyPr>
+          <a:lstStyle/>
+          <a:p>
+            <a:pPr algn="ctr"/>
+            <a:r>
+              <a:rPr sz="1300" b="0" i="0">
+                <a:solidFill>
+                  <a:srgbClr val="667788"/>
+                </a:solidFill>
+              </a:rPr>
+              <a:t>ISR-RL-DMPC  ·  Swarm Intelligence Research  ·  2024-2025</a:t>
             </a:r>
           </a:p>
         </p:txBody>
@@ -4365,8 +4561,8 @@
 </p:sld>
 </file>
 
-<file path=ppt/slides/slide13.xml><?xml version="1.0" encoding="utf-8"?>
-<p:sld xmlns:a="http://schemas.openxmlformats.org/drawingml/2006/main" xmlns:p="http://schemas.openxmlformats.org/presentationml/2006/main" xmlns:r="http://schemas.openxmlformats.org/officeDocument/2006/relationships">
+<file path=ppt/slides/slide2.xml><?xml version="1.0" encoding="utf-8"?>
+<p:sld xmlns:a="http://schemas.openxmlformats.org/drawingml/2006/main" xmlns:r="http://schemas.openxmlformats.org/officeDocument/2006/relationships" xmlns:p="http://schemas.openxmlformats.org/presentationml/2006/main">
   <p:cSld>
     <p:bg>
       <p:bgPr>
@@ -4382,7 +4578,14 @@
         <p:cNvGrpSpPr/>
         <p:nvPr/>
       </p:nvGrpSpPr>
-      <p:grpSpPr/>
+      <p:grpSpPr>
+        <a:xfrm>
+          <a:off x="0" y="0"/>
+          <a:ext cx="0" cy="0"/>
+          <a:chOff x="0" y="0"/>
+          <a:chExt cx="0" cy="0"/>
+        </a:xfrm>
+      </p:grpSpPr>
       <p:sp>
         <p:nvSpPr>
           <p:cNvPr id="2" name="Rectangle 1"/>
@@ -4423,6 +4626,7 @@
           <a:lstStyle/>
           <a:p>
             <a:pPr algn="ctr"/>
+            <a:endParaRPr/>
           </a:p>
         </p:txBody>
       </p:sp>
@@ -4455,7 +4659,7 @@
                   <a:srgbClr val="00B4D8"/>
                 </a:solidFill>
               </a:rPr>
-              <a:t>Challenges</a:t>
+              <a:t>Student Contributions</a:t>
             </a:r>
           </a:p>
         </p:txBody>
@@ -4500,6 +4704,7 @@
           <a:lstStyle/>
           <a:p>
             <a:pPr algn="ctr"/>
+            <a:endParaRPr/>
           </a:p>
         </p:txBody>
       </p:sp>
@@ -4511,8 +4716,8 @@
         </p:nvSpPr>
         <p:spPr>
           <a:xfrm>
-            <a:off x="274320" y="1508760"/>
-            <a:ext cx="11430000" cy="5029200"/>
+            <a:off x="304691" y="1214990"/>
+            <a:ext cx="5486400" cy="5386090"/>
           </a:xfrm>
           <a:prstGeom prst="rect">
             <a:avLst/>
@@ -4520,293 +4725,633 @@
           <a:noFill/>
         </p:spPr>
         <p:txBody>
-          <a:bodyPr wrap="square">
+          <a:bodyPr wrap="square" lIns="91440" tIns="45720" rIns="91440" bIns="45720" anchor="t">
             <a:spAutoFit/>
           </a:bodyPr>
           <a:lstStyle/>
           <a:p>
             <a:pPr>
               <a:spcBef>
-                <a:spcPts val="500"/>
-              </a:spcBef>
-            </a:pPr>
-            <a:r>
-              <a:rPr sz="1700">
+                <a:spcPts val="400"/>
+              </a:spcBef>
+            </a:pPr>
+            <a:r>
+              <a:rPr lang="en-US" sz="1600" dirty="0">
                 <a:solidFill>
                   <a:srgbClr val="FFFFFF"/>
                 </a:solidFill>
               </a:rPr>
-              <a:t>1.  CVXPY DPP compliance</a:t>
-            </a:r>
-          </a:p>
-          <a:p>
-            <a:pPr lvl="1">
-              <a:spcBef>
-                <a:spcPts val="500"/>
-              </a:spcBef>
-            </a:pPr>
-            <a:r>
-              <a:rPr sz="1500">
-                <a:solidFill>
-                  <a:srgbClr val="CCCCCC"/>
-                </a:solidFill>
-              </a:rPr>
-              <a:t>— Required reformulating CBF constraints as linear parameter-affine expressions</a:t>
-            </a:r>
-          </a:p>
-          <a:p>
-            <a:pPr lvl="1">
-              <a:spcBef>
-                <a:spcPts val="500"/>
-              </a:spcBef>
-            </a:pPr>
-            <a:r>
-              <a:rPr sz="1500">
-                <a:solidFill>
-                  <a:srgbClr val="CCCCCC"/>
-                </a:solidFill>
-              </a:rPr>
-              <a:t>— Enables OSQP problem caching → 10× faster solve time on repeat calls</a:t>
-            </a:r>
+              <a:t>Rohit</a:t>
+            </a:r>
+            <a:r>
+              <a:rPr sz="1600" dirty="0">
+                <a:solidFill>
+                  <a:srgbClr val="FFFFFF"/>
+                </a:solidFill>
+              </a:rPr>
+              <a:t> — DMPC Core &amp; </a:t>
+            </a:r>
+            <a:r>
+              <a:rPr sz="1600" dirty="0" err="1">
+                <a:solidFill>
+                  <a:srgbClr val="FFFFFF"/>
+                </a:solidFill>
+              </a:rPr>
+              <a:t>Optimisation</a:t>
+            </a:r>
+            <a:endParaRPr lang="en-US" sz="1600" dirty="0" err="1">
+              <a:solidFill>
+                <a:srgbClr val="FFFFFF"/>
+              </a:solidFill>
+              <a:ea typeface="Calibri"/>
+              <a:cs typeface="Calibri"/>
+            </a:endParaRPr>
           </a:p>
           <a:p>
             <a:pPr>
               <a:spcBef>
-                <a:spcPts val="500"/>
-              </a:spcBef>
-            </a:pPr>
-            <a:r>
-              <a:rPr sz="1700">
+                <a:spcPts val="400"/>
+              </a:spcBef>
+            </a:pPr>
+            <a:r>
+              <a:rPr sz="1600">
                 <a:solidFill>
                   <a:srgbClr val="FFFFFF"/>
                 </a:solidFill>
               </a:rPr>
-              <a:t/>
+              <a:t>  • Distributed Model Predictive Control (DMPC) framework</a:t>
             </a:r>
           </a:p>
           <a:p>
             <a:pPr>
               <a:spcBef>
-                <a:spcPts val="500"/>
-              </a:spcBef>
-            </a:pPr>
-            <a:r>
-              <a:rPr sz="1700">
+                <a:spcPts val="400"/>
+              </a:spcBef>
+            </a:pPr>
+            <a:r>
+              <a:rPr sz="1600">
                 <a:solidFill>
                   <a:srgbClr val="FFFFFF"/>
                 </a:solidFill>
               </a:rPr>
-              <a:t>2.  ADMM convergence under asynchronous execution</a:t>
-            </a:r>
-          </a:p>
-          <a:p>
-            <a:pPr lvl="1">
-              <a:spcBef>
-                <a:spcPts val="500"/>
-              </a:spcBef>
-            </a:pPr>
-            <a:r>
-              <a:rPr sz="1500">
-                <a:solidFill>
-                  <a:srgbClr val="CCCCCC"/>
-                </a:solidFill>
-              </a:rPr>
-              <a:t>— Consensus rounds must complete within the 20 ms control budget</a:t>
-            </a:r>
-          </a:p>
-          <a:p>
-            <a:pPr lvl="1">
-              <a:spcBef>
-                <a:spcPts val="500"/>
-              </a:spcBef>
-            </a:pPr>
-            <a:r>
-              <a:rPr sz="1500">
-                <a:solidFill>
-                  <a:srgbClr val="CCCCCC"/>
-                </a:solidFill>
-              </a:rPr>
-              <a:t>— Solution: fixed 5-iteration ADMM with soft blending (α = 0.8/0.2)</a:t>
+              <a:t>  • MPC cost matrices Q, R — DPP-compliant CVXPY formulation</a:t>
             </a:r>
           </a:p>
           <a:p>
             <a:pPr>
               <a:spcBef>
-                <a:spcPts val="500"/>
-              </a:spcBef>
-            </a:pPr>
-            <a:r>
-              <a:rPr sz="1700">
+                <a:spcPts val="400"/>
+              </a:spcBef>
+            </a:pPr>
+            <a:r>
+              <a:rPr sz="1600">
                 <a:solidFill>
                   <a:srgbClr val="FFFFFF"/>
                 </a:solidFill>
               </a:rPr>
-              <a:t/>
+              <a:t>  • CBF-based inter-drone collision constraints</a:t>
             </a:r>
           </a:p>
           <a:p>
             <a:pPr>
               <a:spcBef>
-                <a:spcPts val="500"/>
-              </a:spcBef>
-            </a:pPr>
-            <a:r>
-              <a:rPr sz="1700">
+                <a:spcPts val="400"/>
+              </a:spcBef>
+            </a:pPr>
+            <a:r>
+              <a:rPr sz="1600">
                 <a:solidFill>
                   <a:srgbClr val="FFFFFF"/>
                 </a:solidFill>
               </a:rPr>
-              <a:t>3.  Reward design for multi-objective MARL</a:t>
-            </a:r>
-          </a:p>
-          <a:p>
-            <a:pPr lvl="1">
-              <a:spcBef>
-                <a:spcPts val="500"/>
-              </a:spcBef>
-            </a:pPr>
-            <a:r>
-              <a:rPr sz="1500">
-                <a:solidFill>
-                  <a:srgbClr val="CCCCCC"/>
-                </a:solidFill>
-              </a:rPr>
-              <a:t>— Naive tracking reward (exp(err) − 1) was always ≤ 0; removed learning signal</a:t>
-            </a:r>
-          </a:p>
-          <a:p>
-            <a:pPr lvl="1">
-              <a:spcBef>
-                <a:spcPts val="500"/>
-              </a:spcBef>
-            </a:pPr>
-            <a:r>
-              <a:rPr sz="1500">
-                <a:solidFill>
-                  <a:srgbClr val="CCCCCC"/>
-                </a:solidFill>
-              </a:rPr>
-              <a:t>— Replaced with positive exp-decay + separate formation/safety/coverage terms</a:t>
+              <a:t>  • ADMM consensus protocol for cooperative trajectory planning</a:t>
             </a:r>
           </a:p>
           <a:p>
             <a:pPr>
               <a:spcBef>
-                <a:spcPts val="500"/>
-              </a:spcBef>
-            </a:pPr>
-            <a:r>
-              <a:rPr sz="1700">
+                <a:spcPts val="400"/>
+              </a:spcBef>
+            </a:pPr>
+            <a:r>
+              <a:rPr sz="1600" dirty="0">
                 <a:solidFill>
                   <a:srgbClr val="FFFFFF"/>
                 </a:solidFill>
               </a:rPr>
-              <a:t/>
-            </a:r>
+              <a:t>  • </a:t>
+            </a:r>
+            <a:r>
+              <a:rPr sz="1600" dirty="0" err="1">
+                <a:solidFill>
+                  <a:srgbClr val="FFFFFF"/>
+                </a:solidFill>
+              </a:rPr>
+              <a:t>EnvironmentSimulator</a:t>
+            </a:r>
+            <a:r>
+              <a:rPr sz="1600" dirty="0">
+                <a:solidFill>
+                  <a:srgbClr val="FFFFFF"/>
+                </a:solidFill>
+              </a:rPr>
+              <a:t> 6-DOF physics engine (rigid-body, wind, battery)</a:t>
+            </a:r>
+            <a:endParaRPr sz="1600" dirty="0">
+              <a:solidFill>
+                <a:srgbClr val="FFFFFF"/>
+              </a:solidFill>
+              <a:ea typeface="Calibri"/>
+              <a:cs typeface="Calibri"/>
+            </a:endParaRPr>
           </a:p>
           <a:p>
             <a:pPr>
               <a:spcBef>
-                <a:spcPts val="500"/>
-              </a:spcBef>
-            </a:pPr>
-            <a:r>
-              <a:rPr sz="1700">
+                <a:spcPts val="400"/>
+              </a:spcBef>
+            </a:pPr>
+            <a:endParaRPr sz="1600">
+              <a:solidFill>
+                <a:srgbClr val="FFFFFF"/>
+              </a:solidFill>
+            </a:endParaRPr>
+          </a:p>
+          <a:p>
+            <a:pPr>
+              <a:spcBef>
+                <a:spcPts val="400"/>
+              </a:spcBef>
+            </a:pPr>
+            <a:r>
+              <a:rPr lang="en-US" sz="1600">
                 <a:solidFill>
                   <a:srgbClr val="FFFFFF"/>
                 </a:solidFill>
               </a:rPr>
-              <a:t>4.  Sim-to-real gap in physics</a:t>
-            </a:r>
-          </a:p>
-          <a:p>
-            <a:pPr lvl="1">
-              <a:spcBef>
-                <a:spcPts val="500"/>
-              </a:spcBef>
-            </a:pPr>
-            <a:r>
-              <a:rPr sz="1500">
-                <a:solidFill>
-                  <a:srgbClr val="CCCCCC"/>
-                </a:solidFill>
-              </a:rPr>
-              <a:t>— Dryden wind turbulence + motor saturation modelled but not fully validated</a:t>
-            </a:r>
-          </a:p>
-          <a:p>
-            <a:pPr lvl="1">
-              <a:spcBef>
-                <a:spcPts val="500"/>
-              </a:spcBef>
-            </a:pPr>
-            <a:r>
-              <a:rPr sz="1500">
-                <a:solidFill>
-                  <a:srgbClr val="CCCCCC"/>
-                </a:solidFill>
-              </a:rPr>
-              <a:t>— Battery depletion model based on hector_quadrotor datasheet</a:t>
+              <a:t>Jivesh</a:t>
+            </a:r>
+            <a:r>
+              <a:rPr sz="1600">
+                <a:solidFill>
+                  <a:srgbClr val="FFFFFF"/>
+                </a:solidFill>
+              </a:rPr>
+              <a:t> — RL Policy &amp; Training Infrastructure</a:t>
             </a:r>
           </a:p>
           <a:p>
             <a:pPr>
               <a:spcBef>
-                <a:spcPts val="500"/>
-              </a:spcBef>
-            </a:pPr>
-            <a:r>
-              <a:rPr sz="1700">
+                <a:spcPts val="400"/>
+              </a:spcBef>
+            </a:pPr>
+            <a:r>
+              <a:rPr sz="1600">
                 <a:solidFill>
                   <a:srgbClr val="FFFFFF"/>
                 </a:solidFill>
               </a:rPr>
-              <a:t/>
+              <a:t>  • MAPPO multi-agent policy architecture (shared actor-critic)</a:t>
             </a:r>
           </a:p>
           <a:p>
             <a:pPr>
               <a:spcBef>
-                <a:spcPts val="500"/>
-              </a:spcBef>
-            </a:pPr>
-            <a:r>
-              <a:rPr sz="1700">
+                <a:spcPts val="400"/>
+              </a:spcBef>
+            </a:pPr>
+            <a:r>
+              <a:rPr sz="1600" dirty="0">
                 <a:solidFill>
                   <a:srgbClr val="FFFFFF"/>
                 </a:solidFill>
               </a:rPr>
-              <a:t>5.  Scalability beyond 4 drones</a:t>
-            </a:r>
-          </a:p>
-          <a:p>
-            <a:pPr lvl="1">
-              <a:spcBef>
-                <a:spcPts val="500"/>
-              </a:spcBef>
-            </a:pPr>
-            <a:r>
-              <a:rPr sz="1500">
-                <a:solidFill>
-                  <a:srgbClr val="CCCCCC"/>
-                </a:solidFill>
-              </a:rPr>
-              <a:t>— DMPC complexity grows O(N²) in CBF constraints</a:t>
-            </a:r>
-          </a:p>
-          <a:p>
-            <a:pPr lvl="1">
-              <a:spcBef>
-                <a:spcPts val="500"/>
-              </a:spcBef>
-            </a:pPr>
-            <a:r>
-              <a:rPr sz="1500">
-                <a:solidFill>
-                  <a:srgbClr val="CCCCCC"/>
-                </a:solidFill>
-              </a:rPr>
-              <a:t>— Mitigated by limiting neighbour list to k nearest drones</a:t>
+              <a:t>  • </a:t>
+            </a:r>
+            <a:r>
+              <a:rPr sz="1600" dirty="0" err="1">
+                <a:solidFill>
+                  <a:srgbClr val="FFFFFF"/>
+                </a:solidFill>
+              </a:rPr>
+              <a:t>MARLDMPCEnv</a:t>
+            </a:r>
+            <a:r>
+              <a:rPr sz="1600" dirty="0">
+                <a:solidFill>
+                  <a:srgbClr val="FFFFFF"/>
+                </a:solidFill>
+              </a:rPr>
+              <a:t> Gymnasium environment (OBS=40-D, ACT=14-D per drone)</a:t>
+            </a:r>
+            <a:endParaRPr sz="1600" dirty="0">
+              <a:solidFill>
+                <a:srgbClr val="FFFFFF"/>
+              </a:solidFill>
+              <a:ea typeface="Calibri"/>
+              <a:cs typeface="Calibri"/>
+            </a:endParaRPr>
+          </a:p>
+          <a:p>
+            <a:pPr>
+              <a:spcBef>
+                <a:spcPts val="400"/>
+              </a:spcBef>
+            </a:pPr>
+            <a:r>
+              <a:rPr sz="1600">
+                <a:solidFill>
+                  <a:srgbClr val="FFFFFF"/>
+                </a:solidFill>
+              </a:rPr>
+              <a:t>  • Scenario-specific reward functions (tracking, formation, coverage)</a:t>
+            </a:r>
+          </a:p>
+          <a:p>
+            <a:pPr>
+              <a:spcBef>
+                <a:spcPts val="400"/>
+              </a:spcBef>
+            </a:pPr>
+            <a:r>
+              <a:rPr sz="1600">
+                <a:solidFill>
+                  <a:srgbClr val="FFFFFF"/>
+                </a:solidFill>
+              </a:rPr>
+              <a:t>  • Stable-Baselines3 PPO training pipeline and evaluation scripts</a:t>
+            </a:r>
+          </a:p>
+          <a:p>
+            <a:pPr>
+              <a:spcBef>
+                <a:spcPts val="400"/>
+              </a:spcBef>
+            </a:pPr>
+            <a:r>
+              <a:rPr sz="1600" dirty="0">
+                <a:solidFill>
+                  <a:srgbClr val="FFFFFF"/>
+                </a:solidFill>
+              </a:rPr>
+              <a:t>  • Observation space design — nearest-</a:t>
+            </a:r>
+            <a:r>
+              <a:rPr sz="1600" dirty="0" err="1">
+                <a:solidFill>
+                  <a:srgbClr val="FFFFFF"/>
+                </a:solidFill>
+              </a:rPr>
+              <a:t>neighbour</a:t>
+            </a:r>
+            <a:r>
+              <a:rPr sz="1600" dirty="0">
+                <a:solidFill>
+                  <a:srgbClr val="FFFFFF"/>
+                </a:solidFill>
+              </a:rPr>
+              <a:t>, battery, ADMM residuals</a:t>
+            </a:r>
+            <a:endParaRPr sz="1600" dirty="0">
+              <a:solidFill>
+                <a:srgbClr val="FFFFFF"/>
+              </a:solidFill>
+              <a:ea typeface="Calibri"/>
+              <a:cs typeface="Calibri"/>
+            </a:endParaRPr>
+          </a:p>
+        </p:txBody>
+      </p:sp>
+      <p:sp>
+        <p:nvSpPr>
+          <p:cNvPr id="6" name="TextBox 5"/>
+          <p:cNvSpPr txBox="1"/>
+          <p:nvPr/>
+        </p:nvSpPr>
+        <p:spPr>
+          <a:xfrm>
+            <a:off x="6096109" y="1296030"/>
+            <a:ext cx="5486400" cy="4544834"/>
+          </a:xfrm>
+          <a:prstGeom prst="rect">
+            <a:avLst/>
+          </a:prstGeom>
+          <a:noFill/>
+        </p:spPr>
+        <p:txBody>
+          <a:bodyPr wrap="square" lIns="91440" tIns="45720" rIns="91440" bIns="45720" anchor="t">
+            <a:spAutoFit/>
+          </a:bodyPr>
+          <a:lstStyle/>
+          <a:p>
+            <a:pPr>
+              <a:spcBef>
+                <a:spcPts val="400"/>
+              </a:spcBef>
+            </a:pPr>
+            <a:r>
+              <a:rPr lang="en-US" sz="1600" dirty="0">
+                <a:solidFill>
+                  <a:srgbClr val="CCCCCC"/>
+                </a:solidFill>
+              </a:rPr>
+              <a:t>Harsh</a:t>
+            </a:r>
+            <a:r>
+              <a:rPr sz="1600" dirty="0">
+                <a:solidFill>
+                  <a:srgbClr val="CCCCCC"/>
+                </a:solidFill>
+              </a:rPr>
+              <a:t>— Simulation, </a:t>
+            </a:r>
+            <a:r>
+              <a:rPr sz="1600" dirty="0" err="1">
+                <a:solidFill>
+                  <a:srgbClr val="CCCCCC"/>
+                </a:solidFill>
+              </a:rPr>
+              <a:t>Visualisation</a:t>
+            </a:r>
+            <a:r>
+              <a:rPr sz="1600" dirty="0">
+                <a:solidFill>
+                  <a:srgbClr val="CCCCCC"/>
+                </a:solidFill>
+              </a:rPr>
+              <a:t> &amp; Integration</a:t>
+            </a:r>
+          </a:p>
+          <a:p>
+            <a:pPr>
+              <a:spcBef>
+                <a:spcPts val="400"/>
+              </a:spcBef>
+            </a:pPr>
+            <a:r>
+              <a:rPr sz="1600" dirty="0">
+                <a:solidFill>
+                  <a:srgbClr val="CCCCCC"/>
+                </a:solidFill>
+              </a:rPr>
+              <a:t>  • </a:t>
+            </a:r>
+            <a:r>
+              <a:rPr sz="1600" dirty="0" err="1">
+                <a:solidFill>
+                  <a:srgbClr val="CCCCCC"/>
+                </a:solidFill>
+              </a:rPr>
+              <a:t>PyBullet</a:t>
+            </a:r>
+            <a:r>
+              <a:rPr sz="1600" dirty="0">
+                <a:solidFill>
+                  <a:srgbClr val="CCCCCC"/>
+                </a:solidFill>
+              </a:rPr>
+              <a:t> 3-D </a:t>
+            </a:r>
+            <a:r>
+              <a:rPr sz="1600" dirty="0" err="1">
+                <a:solidFill>
+                  <a:srgbClr val="CCCCCC"/>
+                </a:solidFill>
+              </a:rPr>
+              <a:t>visualisation</a:t>
+            </a:r>
+            <a:r>
+              <a:rPr sz="1600" dirty="0">
+                <a:solidFill>
+                  <a:srgbClr val="CCCCCC"/>
+                </a:solidFill>
+              </a:rPr>
+              <a:t> (drone URDFs, target markers, trail lines)</a:t>
+            </a:r>
+            <a:endParaRPr sz="1600" dirty="0">
+              <a:solidFill>
+                <a:srgbClr val="CCCCCC"/>
+              </a:solidFill>
+              <a:ea typeface="Calibri"/>
+              <a:cs typeface="Calibri"/>
+            </a:endParaRPr>
+          </a:p>
+          <a:p>
+            <a:pPr>
+              <a:spcBef>
+                <a:spcPts val="400"/>
+              </a:spcBef>
+            </a:pPr>
+            <a:r>
+              <a:rPr sz="1600">
+                <a:solidFill>
+                  <a:srgbClr val="CCCCCC"/>
+                </a:solidFill>
+              </a:rPr>
+              <a:t>  • Staggered home-position spawning for safe sequential drone launch</a:t>
+            </a:r>
+          </a:p>
+          <a:p>
+            <a:pPr>
+              <a:spcBef>
+                <a:spcPts val="400"/>
+              </a:spcBef>
+            </a:pPr>
+            <a:r>
+              <a:rPr sz="1600">
+                <a:solidFill>
+                  <a:srgbClr val="CCCCCC"/>
+                </a:solidFill>
+              </a:rPr>
+              <a:t>  • Auto-follow camera with exponential smoothing</a:t>
+            </a:r>
+          </a:p>
+          <a:p>
+            <a:pPr>
+              <a:spcBef>
+                <a:spcPts val="400"/>
+              </a:spcBef>
+            </a:pPr>
+            <a:r>
+              <a:rPr sz="1600" dirty="0">
+                <a:solidFill>
+                  <a:srgbClr val="CCCCCC"/>
+                </a:solidFill>
+              </a:rPr>
+              <a:t>  • </a:t>
+            </a:r>
+            <a:r>
+              <a:rPr sz="1600" dirty="0" err="1">
+                <a:solidFill>
+                  <a:srgbClr val="CCCCCC"/>
+                </a:solidFill>
+              </a:rPr>
+              <a:t>PyBullet</a:t>
+            </a:r>
+            <a:r>
+              <a:rPr sz="1600" dirty="0">
+                <a:solidFill>
+                  <a:srgbClr val="CCCCCC"/>
+                </a:solidFill>
+              </a:rPr>
+              <a:t> video recording (MP4) per scenario / episode</a:t>
+            </a:r>
+            <a:endParaRPr sz="1600" dirty="0">
+              <a:solidFill>
+                <a:srgbClr val="CCCCCC"/>
+              </a:solidFill>
+              <a:ea typeface="Calibri"/>
+              <a:cs typeface="Calibri"/>
+            </a:endParaRPr>
+          </a:p>
+          <a:p>
+            <a:pPr>
+              <a:spcBef>
+                <a:spcPts val="400"/>
+              </a:spcBef>
+            </a:pPr>
+            <a:r>
+              <a:rPr sz="1600" dirty="0">
+                <a:solidFill>
+                  <a:srgbClr val="CCCCCC"/>
+                </a:solidFill>
+              </a:rPr>
+              <a:t>  • Mission scenario YAML configs (</a:t>
+            </a:r>
+            <a:r>
+              <a:rPr sz="1600" dirty="0" err="1">
+                <a:solidFill>
+                  <a:srgbClr val="CCCCCC"/>
+                </a:solidFill>
+              </a:rPr>
+              <a:t>area_surveillance</a:t>
+            </a:r>
+            <a:r>
+              <a:rPr sz="1600" dirty="0">
+                <a:solidFill>
+                  <a:srgbClr val="CCCCCC"/>
+                </a:solidFill>
+              </a:rPr>
+              <a:t>, </a:t>
+            </a:r>
+            <a:r>
+              <a:rPr sz="1600" dirty="0" err="1">
+                <a:solidFill>
+                  <a:srgbClr val="CCCCCC"/>
+                </a:solidFill>
+              </a:rPr>
+              <a:t>threat_response</a:t>
+            </a:r>
+            <a:r>
+              <a:rPr sz="1600" dirty="0">
+                <a:solidFill>
+                  <a:srgbClr val="CCCCCC"/>
+                </a:solidFill>
+              </a:rPr>
+              <a:t>,</a:t>
+            </a:r>
+            <a:endParaRPr sz="1600" dirty="0">
+              <a:solidFill>
+                <a:srgbClr val="CCCCCC"/>
+              </a:solidFill>
+              <a:ea typeface="Calibri"/>
+              <a:cs typeface="Calibri"/>
+            </a:endParaRPr>
+          </a:p>
+          <a:p>
+            <a:pPr>
+              <a:spcBef>
+                <a:spcPts val="400"/>
+              </a:spcBef>
+            </a:pPr>
+            <a:r>
+              <a:rPr sz="1600" dirty="0">
+                <a:solidFill>
+                  <a:srgbClr val="CCCCCC"/>
+                </a:solidFill>
+              </a:rPr>
+              <a:t>    </a:t>
+            </a:r>
+            <a:r>
+              <a:rPr sz="1600" dirty="0" err="1">
+                <a:solidFill>
+                  <a:srgbClr val="CCCCCC"/>
+                </a:solidFill>
+              </a:rPr>
+              <a:t>search_and_track</a:t>
+            </a:r>
+            <a:r>
+              <a:rPr sz="1600" dirty="0">
+                <a:solidFill>
+                  <a:srgbClr val="CCCCCC"/>
+                </a:solidFill>
+              </a:rPr>
+              <a:t>)</a:t>
+            </a:r>
+            <a:endParaRPr sz="1600" dirty="0">
+              <a:solidFill>
+                <a:srgbClr val="CCCCCC"/>
+              </a:solidFill>
+              <a:ea typeface="Calibri"/>
+              <a:cs typeface="Calibri"/>
+            </a:endParaRPr>
+          </a:p>
+          <a:p>
+            <a:pPr>
+              <a:spcBef>
+                <a:spcPts val="400"/>
+              </a:spcBef>
+            </a:pPr>
+            <a:r>
+              <a:rPr sz="1600">
+                <a:solidFill>
+                  <a:srgbClr val="CCCCCC"/>
+                </a:solidFill>
+              </a:rPr>
+              <a:t>  • CLI runners: run_dmpc.py, run_dmpc_rl.py, swarm_pybullet_sim.py</a:t>
+            </a:r>
+          </a:p>
+          <a:p>
+            <a:pPr>
+              <a:spcBef>
+                <a:spcPts val="400"/>
+              </a:spcBef>
+            </a:pPr>
+            <a:r>
+              <a:rPr sz="1600">
+                <a:solidFill>
+                  <a:srgbClr val="CCCCCC"/>
+                </a:solidFill>
+              </a:rPr>
+              <a:t>  • Trajectory planners (lawnmower, circular patrol, expanding-square)</a:t>
+            </a:r>
+          </a:p>
+          <a:p>
+            <a:pPr>
+              <a:spcBef>
+                <a:spcPts val="400"/>
+              </a:spcBef>
+            </a:pPr>
+            <a:endParaRPr sz="1600">
+              <a:solidFill>
+                <a:srgbClr val="CCCCCC"/>
+              </a:solidFill>
+            </a:endParaRPr>
+          </a:p>
+          <a:p>
+            <a:pPr>
+              <a:spcBef>
+                <a:spcPts val="400"/>
+              </a:spcBef>
+            </a:pPr>
+            <a:r>
+              <a:rPr sz="1600">
+                <a:solidFill>
+                  <a:srgbClr val="CCCCCC"/>
+                </a:solidFill>
+              </a:rPr>
+              <a:t>Shared work  —  system integration, testing, documentation</a:t>
             </a:r>
           </a:p>
         </p:txBody>
@@ -4819,179 +5364,8 @@
 </p:sld>
 </file>
 
-<file path=ppt/slides/slide14.xml><?xml version="1.0" encoding="utf-8"?>
-<p:sld xmlns:a="http://schemas.openxmlformats.org/drawingml/2006/main" xmlns:p="http://schemas.openxmlformats.org/presentationml/2006/main" xmlns:r="http://schemas.openxmlformats.org/officeDocument/2006/relationships">
-  <p:cSld>
-    <p:bg>
-      <p:bgPr>
-        <a:solidFill>
-          <a:srgbClr val="0F3C78"/>
-        </a:solidFill>
-        <a:effectLst/>
-      </p:bgPr>
-    </p:bg>
-    <p:spTree>
-      <p:nvGrpSpPr>
-        <p:cNvPr id="1" name=""/>
-        <p:cNvGrpSpPr/>
-        <p:nvPr/>
-      </p:nvGrpSpPr>
-      <p:grpSpPr/>
-      <p:sp>
-        <p:nvSpPr>
-          <p:cNvPr id="2" name="Rectangle 1"/>
-          <p:cNvSpPr/>
-          <p:nvPr/>
-        </p:nvSpPr>
-        <p:spPr>
-          <a:xfrm>
-            <a:off x="0" y="0"/>
-            <a:ext cx="228600" cy="6858000"/>
-          </a:xfrm>
-          <a:prstGeom prst="rect">
-            <a:avLst/>
-          </a:prstGeom>
-          <a:solidFill>
-            <a:srgbClr val="00B4D8"/>
-          </a:solidFill>
-          <a:ln>
-            <a:noFill/>
-          </a:ln>
-        </p:spPr>
-        <p:style>
-          <a:lnRef idx="1">
-            <a:schemeClr val="accent1"/>
-          </a:lnRef>
-          <a:fillRef idx="3">
-            <a:schemeClr val="accent1"/>
-          </a:fillRef>
-          <a:effectRef idx="2">
-            <a:schemeClr val="accent1"/>
-          </a:effectRef>
-          <a:fontRef idx="minor">
-            <a:schemeClr val="lt1"/>
-          </a:fontRef>
-        </p:style>
-        <p:txBody>
-          <a:bodyPr rtlCol="0" anchor="ctr"/>
-          <a:lstStyle/>
-          <a:p>
-            <a:pPr algn="ctr"/>
-          </a:p>
-        </p:txBody>
-      </p:sp>
-      <p:sp>
-        <p:nvSpPr>
-          <p:cNvPr id="3" name="TextBox 2"/>
-          <p:cNvSpPr txBox="1"/>
-          <p:nvPr/>
-        </p:nvSpPr>
-        <p:spPr>
-          <a:xfrm>
-            <a:off x="457200" y="1097280"/>
-            <a:ext cx="3657600" cy="1828800"/>
-          </a:xfrm>
-          <a:prstGeom prst="rect">
-            <a:avLst/>
-          </a:prstGeom>
-          <a:noFill/>
-        </p:spPr>
-        <p:txBody>
-          <a:bodyPr wrap="square">
-            <a:spAutoFit/>
-          </a:bodyPr>
-          <a:lstStyle/>
-          <a:p>
-            <a:pPr algn="l"/>
-            <a:r>
-              <a:rPr sz="9600" b="1" i="0">
-                <a:solidFill>
-                  <a:srgbClr val="0A1E50"/>
-                </a:solidFill>
-              </a:rPr>
-              <a:t>07</a:t>
-            </a:r>
-          </a:p>
-        </p:txBody>
-      </p:sp>
-      <p:sp>
-        <p:nvSpPr>
-          <p:cNvPr id="4" name="TextBox 3"/>
-          <p:cNvSpPr txBox="1"/>
-          <p:nvPr/>
-        </p:nvSpPr>
-        <p:spPr>
-          <a:xfrm>
-            <a:off x="457200" y="3200400"/>
-            <a:ext cx="10972800" cy="914400"/>
-          </a:xfrm>
-          <a:prstGeom prst="rect">
-            <a:avLst/>
-          </a:prstGeom>
-          <a:noFill/>
-        </p:spPr>
-        <p:txBody>
-          <a:bodyPr wrap="square">
-            <a:spAutoFit/>
-          </a:bodyPr>
-          <a:lstStyle/>
-          <a:p>
-            <a:pPr algn="l"/>
-            <a:r>
-              <a:rPr sz="3800" b="1" i="0">
-                <a:solidFill>
-                  <a:srgbClr val="FFFFFF"/>
-                </a:solidFill>
-              </a:rPr>
-              <a:t>Results &amp; Analysis</a:t>
-            </a:r>
-          </a:p>
-        </p:txBody>
-      </p:sp>
-      <p:sp>
-        <p:nvSpPr>
-          <p:cNvPr id="5" name="TextBox 4"/>
-          <p:cNvSpPr txBox="1"/>
-          <p:nvPr/>
-        </p:nvSpPr>
-        <p:spPr>
-          <a:xfrm>
-            <a:off x="457200" y="4206240"/>
-            <a:ext cx="10972800" cy="731520"/>
-          </a:xfrm>
-          <a:prstGeom prst="rect">
-            <a:avLst/>
-          </a:prstGeom>
-          <a:noFill/>
-        </p:spPr>
-        <p:txBody>
-          <a:bodyPr wrap="square">
-            <a:spAutoFit/>
-          </a:bodyPr>
-          <a:lstStyle/>
-          <a:p>
-            <a:pPr algn="l"/>
-            <a:r>
-              <a:rPr sz="1800" b="0" i="1">
-                <a:solidFill>
-                  <a:srgbClr val="00B4D8"/>
-                </a:solidFill>
-              </a:rPr>
-              <a:t>Benchmarking DMPC vs DMPC-RL</a:t>
-            </a:r>
-          </a:p>
-        </p:txBody>
-      </p:sp>
-    </p:spTree>
-  </p:cSld>
-  <p:clrMapOvr>
-    <a:masterClrMapping/>
-  </p:clrMapOvr>
-</p:sld>
-</file>
-
-<file path=ppt/slides/slide15.xml><?xml version="1.0" encoding="utf-8"?>
-<p:sld xmlns:a="http://schemas.openxmlformats.org/drawingml/2006/main" xmlns:p="http://schemas.openxmlformats.org/presentationml/2006/main" xmlns:r="http://schemas.openxmlformats.org/officeDocument/2006/relationships">
+<file path=ppt/slides/slide3.xml><?xml version="1.0" encoding="utf-8"?>
+<p:sld xmlns:a="http://schemas.openxmlformats.org/drawingml/2006/main" xmlns:r="http://schemas.openxmlformats.org/officeDocument/2006/relationships" xmlns:p="http://schemas.openxmlformats.org/presentationml/2006/main">
   <p:cSld>
     <p:bg>
       <p:bgPr>
@@ -5007,7 +5381,14 @@
         <p:cNvGrpSpPr/>
         <p:nvPr/>
       </p:nvGrpSpPr>
-      <p:grpSpPr/>
+      <p:grpSpPr>
+        <a:xfrm>
+          <a:off x="0" y="0"/>
+          <a:ext cx="0" cy="0"/>
+          <a:chOff x="0" y="0"/>
+          <a:chExt cx="0" cy="0"/>
+        </a:xfrm>
+      </p:grpSpPr>
       <p:sp>
         <p:nvSpPr>
           <p:cNvPr id="2" name="Rectangle 1"/>
@@ -5048,6 +5429,7 @@
           <a:lstStyle/>
           <a:p>
             <a:pPr algn="ctr"/>
+            <a:endParaRPr/>
           </a:p>
         </p:txBody>
       </p:sp>
@@ -5080,7 +5462,7 @@
                   <a:srgbClr val="00B4D8"/>
                 </a:solidFill>
               </a:rPr>
-              <a:t>Results &amp; Analysis</a:t>
+              <a:t>Motivation</a:t>
             </a:r>
           </a:p>
         </p:txBody>
@@ -5125,6 +5507,7 @@
           <a:lstStyle/>
           <a:p>
             <a:pPr algn="ctr"/>
+            <a:endParaRPr/>
           </a:p>
         </p:txBody>
       </p:sp>
@@ -5157,7 +5540,7 @@
                   <a:srgbClr val="CCCCCC"/>
                 </a:solidFill>
               </a:rPr>
-              <a:t>Comparison across three ISR scenarios  (N=4 drones, 1 episode each)</a:t>
+              <a:t>Intelligence, Surveillance &amp; Reconnaissance (ISR) demands scalable autonomy</a:t>
             </a:r>
           </a:p>
         </p:txBody>
@@ -5170,8 +5553,8 @@
         </p:nvSpPr>
         <p:spPr>
           <a:xfrm>
-            <a:off x="274320" y="1645920"/>
-            <a:ext cx="11430000" cy="5029200"/>
+            <a:off x="274320" y="1544620"/>
+            <a:ext cx="11430000" cy="4939814"/>
           </a:xfrm>
           <a:prstGeom prst="rect">
             <a:avLst/>
@@ -5179,7 +5562,7 @@
           <a:noFill/>
         </p:spPr>
         <p:txBody>
-          <a:bodyPr wrap="square">
+          <a:bodyPr wrap="square" lIns="91440" tIns="45720" rIns="91440" bIns="45720" anchor="t">
             <a:spAutoFit/>
           </a:bodyPr>
           <a:lstStyle/>
@@ -5195,8 +5578,68 @@
                   <a:srgbClr val="FFFFFF"/>
                 </a:solidFill>
               </a:rPr>
-              <a:t>Metric                    Pure DMPC       DMPC-RL (MAPPO)</a:t>
-            </a:r>
+              <a:t>▶  Growing demand for persistent, wide-area aerial surveillance</a:t>
+            </a:r>
+          </a:p>
+          <a:p>
+            <a:pPr lvl="1"/>
+            <a:r>
+              <a:rPr lang="en-US" sz="1500">
+                <a:solidFill>
+                  <a:srgbClr val="CCCCCC"/>
+                </a:solidFill>
+                <a:ea typeface="+mn-lt"/>
+                <a:cs typeface="+mn-lt"/>
+              </a:rPr>
+              <a:t>— Border monitoring and perimeter security</a:t>
+            </a:r>
+            <a:endParaRPr lang="en-US"/>
+          </a:p>
+          <a:p>
+            <a:pPr lvl="1"/>
+            <a:r>
+              <a:rPr lang="en-US" sz="1500">
+                <a:solidFill>
+                  <a:srgbClr val="CCCCCC"/>
+                </a:solidFill>
+                <a:ea typeface="+mn-lt"/>
+                <a:cs typeface="+mn-lt"/>
+              </a:rPr>
+              <a:t>— Critical infrastructure inspection</a:t>
+            </a:r>
+            <a:endParaRPr lang="en-US"/>
+          </a:p>
+          <a:p>
+            <a:pPr lvl="1"/>
+            <a:r>
+              <a:rPr lang="en-US" sz="1500">
+                <a:solidFill>
+                  <a:srgbClr val="CCCCCC"/>
+                </a:solidFill>
+                <a:ea typeface="+mn-lt"/>
+                <a:cs typeface="+mn-lt"/>
+              </a:rPr>
+              <a:t>— Disaster-response and search-and-rescue operations</a:t>
+            </a:r>
+            <a:endParaRPr/>
+          </a:p>
+          <a:p>
+            <a:pPr lvl="1">
+              <a:spcBef>
+                <a:spcPts val="500"/>
+              </a:spcBef>
+            </a:pPr>
+            <a:r>
+              <a:rPr lang="en-US" sz="1500">
+                <a:solidFill>
+                  <a:srgbClr val="CCCCCC"/>
+                </a:solidFill>
+                <a:ea typeface="+mn-lt"/>
+                <a:cs typeface="+mn-lt"/>
+              </a:rPr>
+              <a:t>— Dynamic target tracking in uncertain environments</a:t>
+            </a:r>
+            <a:endParaRPr/>
           </a:p>
           <a:p>
             <a:pPr>
@@ -5204,13 +5647,70 @@
                 <a:spcPts val="500"/>
               </a:spcBef>
             </a:pPr>
+            <a:endParaRPr sz="1500">
+              <a:solidFill>
+                <a:srgbClr val="CCCCCC"/>
+              </a:solidFill>
+            </a:endParaRPr>
+          </a:p>
+          <a:p>
+            <a:pPr>
+              <a:spcBef>
+                <a:spcPts val="500"/>
+              </a:spcBef>
+            </a:pPr>
             <a:r>
               <a:rPr sz="1700">
                 <a:solidFill>
                   <a:srgbClr val="FFFFFF"/>
                 </a:solidFill>
               </a:rPr>
-              <a:t>─────────────────────────────────────────────────────────</a:t>
+              <a:t>▶  Limitations of current approaches</a:t>
+            </a:r>
+          </a:p>
+          <a:p>
+            <a:pPr lvl="1">
+              <a:spcBef>
+                <a:spcPts val="500"/>
+              </a:spcBef>
+            </a:pPr>
+            <a:r>
+              <a:rPr sz="1500">
+                <a:solidFill>
+                  <a:srgbClr val="CCCCCC"/>
+                </a:solidFill>
+              </a:rPr>
+              <a:t>— Classical DMPC: fixed cost weights, no online adaptation to changing conditions</a:t>
+            </a:r>
+          </a:p>
+          <a:p>
+            <a:pPr lvl="1">
+              <a:spcBef>
+                <a:spcPts val="500"/>
+              </a:spcBef>
+            </a:pPr>
+            <a:r>
+              <a:rPr sz="1500">
+                <a:solidFill>
+                  <a:srgbClr val="CCCCCC"/>
+                </a:solidFill>
+              </a:rPr>
+              <a:t>— Pure RL: black-box policies, hard to guarantee safety constraints</a:t>
+            </a:r>
+          </a:p>
+          <a:p>
+            <a:pPr lvl="1">
+              <a:spcBef>
+                <a:spcPts val="500"/>
+              </a:spcBef>
+            </a:pPr>
+            <a:r>
+              <a:rPr sz="1500">
+                <a:solidFill>
+                  <a:srgbClr val="CCCCCC"/>
+                </a:solidFill>
+              </a:rPr>
+              <a:t>— Human-in-the-loop: bandwidth bottleneck, cognitive overload</a:t>
             </a:r>
           </a:p>
           <a:p>
@@ -5219,14 +5719,33 @@
                 <a:spcPts val="500"/>
               </a:spcBef>
             </a:pPr>
-            <a:r>
-              <a:rPr sz="1700">
+            <a:endParaRPr sz="1500">
+              <a:solidFill>
+                <a:srgbClr val="CCCCCC"/>
+              </a:solidFill>
+            </a:endParaRPr>
+          </a:p>
+          <a:p>
+            <a:pPr>
+              <a:spcBef>
+                <a:spcPts val="500"/>
+              </a:spcBef>
+            </a:pPr>
+            <a:r>
+              <a:rPr sz="1700" dirty="0">
                 <a:solidFill>
                   <a:srgbClr val="FFFFFF"/>
                 </a:solidFill>
               </a:rPr>
-              <a:t>Mean reward               baseline        +12–18% vs DMPC</a:t>
-            </a:r>
+              <a:t>▶  Opportunity: </a:t>
+            </a:r>
+            <a:endParaRPr lang="en-US" sz="1700" dirty="0">
+              <a:solidFill>
+                <a:srgbClr val="FFFFFF"/>
+              </a:solidFill>
+              <a:ea typeface="+mn-lt"/>
+              <a:cs typeface="+mn-lt"/>
+            </a:endParaRPr>
           </a:p>
           <a:p>
             <a:pPr>
@@ -5235,103 +5754,76 @@
               </a:spcBef>
             </a:pPr>
             <a:r>
-              <a:rPr sz="1700">
+              <a:rPr lang="en-US" sz="1700" dirty="0">
                 <a:solidFill>
                   <a:srgbClr val="FFFFFF"/>
                 </a:solidFill>
-              </a:rPr>
-              <a:t>Mean coverage %           area_surv: 62%  area_surv: 74%</a:t>
-            </a:r>
-          </a:p>
-          <a:p>
-            <a:pPr>
-              <a:spcBef>
-                <a:spcPts val="500"/>
-              </a:spcBef>
-            </a:pPr>
-            <a:r>
-              <a:rPr sz="1700">
+                <a:ea typeface="+mn-lt"/>
+                <a:cs typeface="+mn-lt"/>
+              </a:rPr>
+              <a:t> Combine the formal safety and </a:t>
+            </a:r>
+            <a:r>
+              <a:rPr lang="en-US" sz="1700">
                 <a:solidFill>
                   <a:srgbClr val="FFFFFF"/>
                 </a:solidFill>
-              </a:rPr>
-              <a:t>Threat response time      —               −8% time-to-intercept</a:t>
-            </a:r>
-          </a:p>
-          <a:p>
-            <a:pPr>
-              <a:spcBef>
-                <a:spcPts val="500"/>
-              </a:spcBef>
-            </a:pPr>
-            <a:r>
-              <a:rPr sz="1700">
+                <a:ea typeface="+mn-lt"/>
+                <a:cs typeface="+mn-lt"/>
+              </a:rPr>
+              <a:t>optimization</a:t>
+            </a:r>
+            <a:r>
+              <a:rPr lang="en-US" sz="1700" dirty="0">
                 <a:solidFill>
                   <a:srgbClr val="FFFFFF"/>
                 </a:solidFill>
-              </a:rPr>
-              <a:t>DMPC solve time (ms)      0.8–1.5 ms      0.9–1.6 ms  (+RL overhead)</a:t>
-            </a:r>
-          </a:p>
-          <a:p>
-            <a:pPr>
-              <a:spcBef>
-                <a:spcPts val="500"/>
-              </a:spcBef>
-            </a:pPr>
-            <a:r>
-              <a:rPr sz="1700">
+                <a:ea typeface="+mn-lt"/>
+                <a:cs typeface="+mn-lt"/>
+              </a:rPr>
+              <a:t> guarantees of DMPC with the adaptive decision-making capability of </a:t>
+            </a:r>
+            <a:r>
+              <a:rPr lang="en-US" sz="1700">
                 <a:solidFill>
                   <a:srgbClr val="FFFFFF"/>
                 </a:solidFill>
-              </a:rPr>
-              <a:t>Collision events          0               0  (CBF guaranteed)</a:t>
-            </a:r>
-          </a:p>
-          <a:p>
-            <a:pPr>
-              <a:spcBef>
-                <a:spcPts val="500"/>
-              </a:spcBef>
-            </a:pPr>
-            <a:r>
-              <a:rPr sz="1700">
+                <a:ea typeface="+mn-lt"/>
+                <a:cs typeface="+mn-lt"/>
+              </a:rPr>
+              <a:t>Multi -    Agent</a:t>
+            </a:r>
+            <a:r>
+              <a:rPr lang="en-US" sz="1700" dirty="0">
                 <a:solidFill>
                   <a:srgbClr val="FFFFFF"/>
                 </a:solidFill>
-              </a:rPr>
-              <a:t>Battery efficiency        —               +5% (fewer wasted accelerations)</a:t>
-            </a:r>
-          </a:p>
-          <a:p>
-            <a:pPr>
-              <a:spcBef>
-                <a:spcPts val="500"/>
-              </a:spcBef>
-            </a:pPr>
-            <a:r>
-              <a:rPr sz="1700">
+                <a:ea typeface="+mn-lt"/>
+                <a:cs typeface="+mn-lt"/>
+              </a:rPr>
+              <a:t> </a:t>
+            </a:r>
+            <a:r>
+              <a:rPr lang="en-US" sz="1700">
                 <a:solidFill>
                   <a:srgbClr val="FFFFFF"/>
                 </a:solidFill>
-              </a:rPr>
-              <a:t/>
-            </a:r>
-          </a:p>
-          <a:p>
-            <a:pPr>
-              <a:spcBef>
-                <a:spcPts val="500"/>
-              </a:spcBef>
-            </a:pPr>
-            <a:r>
-              <a:rPr sz="1700">
+                <a:ea typeface="+mn-lt"/>
+                <a:cs typeface="+mn-lt"/>
+              </a:rPr>
+              <a:t> </a:t>
+            </a:r>
+            <a:r>
+              <a:rPr lang="en-US" sz="1700" dirty="0">
                 <a:solidFill>
                   <a:srgbClr val="FFFFFF"/>
                 </a:solidFill>
-              </a:rPr>
-              <a:t>Key observations:</a:t>
-            </a:r>
+                <a:ea typeface="+mn-lt"/>
+                <a:cs typeface="+mn-lt"/>
+              </a:rPr>
+              <a:t>Reinforcement Learning.</a:t>
+            </a:r>
+            <a:endParaRPr lang="en-US"/>
           </a:p>
           <a:p>
             <a:pPr lvl="1">
@@ -5345,7 +5837,7 @@
                   <a:srgbClr val="CCCCCC"/>
                 </a:solidFill>
               </a:rPr>
-              <a:t>▶  RL adaptation most beneficial in search_and_track (dynamic targets)</a:t>
+              <a:t>— DMPC handles collision avoidance and trajectory feasibility</a:t>
             </a:r>
           </a:p>
           <a:p>
@@ -5360,7 +5852,7 @@
                   <a:srgbClr val="CCCCCC"/>
                 </a:solidFill>
               </a:rPr>
-              <a:t>▶  Formation reward keeps drones well-separated without artificial grids</a:t>
+              <a:t>— MAPPO policy dynamically re-weights cost matrices based on observations</a:t>
             </a:r>
           </a:p>
           <a:p>
@@ -5375,22 +5867,17 @@
                   <a:srgbClr val="CCCCCC"/>
                 </a:solidFill>
               </a:rPr>
-              <a:t>▶  Battery penalty reduces aggressive corrections without hurting tracking</a:t>
-            </a:r>
-          </a:p>
-          <a:p>
-            <a:pPr lvl="1">
-              <a:spcBef>
-                <a:spcPts val="500"/>
-              </a:spcBef>
-            </a:pPr>
-            <a:r>
-              <a:rPr sz="1500">
-                <a:solidFill>
-                  <a:srgbClr val="CCCCCC"/>
-                </a:solidFill>
-              </a:rPr>
-              <a:t>▶  Zero collisions in all runs — CBF layer never violated</a:t>
+              <a:t>— Result: </a:t>
+            </a:r>
+            <a:r>
+              <a:rPr lang="en-US" sz="1500">
+                <a:solidFill>
+                  <a:srgbClr val="CCCCCC"/>
+                </a:solidFill>
+                <a:ea typeface="+mn-lt"/>
+                <a:cs typeface="+mn-lt"/>
+              </a:rPr>
+              <a:t>Safe and distributed swarm coordination, Real-time optimization under disturbances</a:t>
             </a:r>
           </a:p>
         </p:txBody>
@@ -5403,179 +5890,8 @@
 </p:sld>
 </file>
 
-<file path=ppt/slides/slide16.xml><?xml version="1.0" encoding="utf-8"?>
-<p:sld xmlns:a="http://schemas.openxmlformats.org/drawingml/2006/main" xmlns:p="http://schemas.openxmlformats.org/presentationml/2006/main" xmlns:r="http://schemas.openxmlformats.org/officeDocument/2006/relationships">
-  <p:cSld>
-    <p:bg>
-      <p:bgPr>
-        <a:solidFill>
-          <a:srgbClr val="0F3C78"/>
-        </a:solidFill>
-        <a:effectLst/>
-      </p:bgPr>
-    </p:bg>
-    <p:spTree>
-      <p:nvGrpSpPr>
-        <p:cNvPr id="1" name=""/>
-        <p:cNvGrpSpPr/>
-        <p:nvPr/>
-      </p:nvGrpSpPr>
-      <p:grpSpPr/>
-      <p:sp>
-        <p:nvSpPr>
-          <p:cNvPr id="2" name="Rectangle 1"/>
-          <p:cNvSpPr/>
-          <p:nvPr/>
-        </p:nvSpPr>
-        <p:spPr>
-          <a:xfrm>
-            <a:off x="0" y="0"/>
-            <a:ext cx="228600" cy="6858000"/>
-          </a:xfrm>
-          <a:prstGeom prst="rect">
-            <a:avLst/>
-          </a:prstGeom>
-          <a:solidFill>
-            <a:srgbClr val="00B4D8"/>
-          </a:solidFill>
-          <a:ln>
-            <a:noFill/>
-          </a:ln>
-        </p:spPr>
-        <p:style>
-          <a:lnRef idx="1">
-            <a:schemeClr val="accent1"/>
-          </a:lnRef>
-          <a:fillRef idx="3">
-            <a:schemeClr val="accent1"/>
-          </a:fillRef>
-          <a:effectRef idx="2">
-            <a:schemeClr val="accent1"/>
-          </a:effectRef>
-          <a:fontRef idx="minor">
-            <a:schemeClr val="lt1"/>
-          </a:fontRef>
-        </p:style>
-        <p:txBody>
-          <a:bodyPr rtlCol="0" anchor="ctr"/>
-          <a:lstStyle/>
-          <a:p>
-            <a:pPr algn="ctr"/>
-          </a:p>
-        </p:txBody>
-      </p:sp>
-      <p:sp>
-        <p:nvSpPr>
-          <p:cNvPr id="3" name="TextBox 2"/>
-          <p:cNvSpPr txBox="1"/>
-          <p:nvPr/>
-        </p:nvSpPr>
-        <p:spPr>
-          <a:xfrm>
-            <a:off x="457200" y="1097280"/>
-            <a:ext cx="3657600" cy="1828800"/>
-          </a:xfrm>
-          <a:prstGeom prst="rect">
-            <a:avLst/>
-          </a:prstGeom>
-          <a:noFill/>
-        </p:spPr>
-        <p:txBody>
-          <a:bodyPr wrap="square">
-            <a:spAutoFit/>
-          </a:bodyPr>
-          <a:lstStyle/>
-          <a:p>
-            <a:pPr algn="l"/>
-            <a:r>
-              <a:rPr sz="9600" b="1" i="0">
-                <a:solidFill>
-                  <a:srgbClr val="0A1E50"/>
-                </a:solidFill>
-              </a:rPr>
-              <a:t>08</a:t>
-            </a:r>
-          </a:p>
-        </p:txBody>
-      </p:sp>
-      <p:sp>
-        <p:nvSpPr>
-          <p:cNvPr id="4" name="TextBox 3"/>
-          <p:cNvSpPr txBox="1"/>
-          <p:nvPr/>
-        </p:nvSpPr>
-        <p:spPr>
-          <a:xfrm>
-            <a:off x="457200" y="3200400"/>
-            <a:ext cx="10972800" cy="914400"/>
-          </a:xfrm>
-          <a:prstGeom prst="rect">
-            <a:avLst/>
-          </a:prstGeom>
-          <a:noFill/>
-        </p:spPr>
-        <p:txBody>
-          <a:bodyPr wrap="square">
-            <a:spAutoFit/>
-          </a:bodyPr>
-          <a:lstStyle/>
-          <a:p>
-            <a:pPr algn="l"/>
-            <a:r>
-              <a:rPr sz="3800" b="1" i="0">
-                <a:solidFill>
-                  <a:srgbClr val="FFFFFF"/>
-                </a:solidFill>
-              </a:rPr>
-              <a:t>Novelty</a:t>
-            </a:r>
-          </a:p>
-        </p:txBody>
-      </p:sp>
-      <p:sp>
-        <p:nvSpPr>
-          <p:cNvPr id="5" name="TextBox 4"/>
-          <p:cNvSpPr txBox="1"/>
-          <p:nvPr/>
-        </p:nvSpPr>
-        <p:spPr>
-          <a:xfrm>
-            <a:off x="457200" y="4206240"/>
-            <a:ext cx="10972800" cy="731520"/>
-          </a:xfrm>
-          <a:prstGeom prst="rect">
-            <a:avLst/>
-          </a:prstGeom>
-          <a:noFill/>
-        </p:spPr>
-        <p:txBody>
-          <a:bodyPr wrap="square">
-            <a:spAutoFit/>
-          </a:bodyPr>
-          <a:lstStyle/>
-          <a:p>
-            <a:pPr algn="l"/>
-            <a:r>
-              <a:rPr sz="1800" b="0" i="1">
-                <a:solidFill>
-                  <a:srgbClr val="00B4D8"/>
-                </a:solidFill>
-              </a:rPr>
-              <a:t>What makes this work unique</a:t>
-            </a:r>
-          </a:p>
-        </p:txBody>
-      </p:sp>
-    </p:spTree>
-  </p:cSld>
-  <p:clrMapOvr>
-    <a:masterClrMapping/>
-  </p:clrMapOvr>
-</p:sld>
-</file>
-
-<file path=ppt/slides/slide17.xml><?xml version="1.0" encoding="utf-8"?>
-<p:sld xmlns:a="http://schemas.openxmlformats.org/drawingml/2006/main" xmlns:p="http://schemas.openxmlformats.org/presentationml/2006/main" xmlns:r="http://schemas.openxmlformats.org/officeDocument/2006/relationships">
+<file path=ppt/slides/slide4.xml><?xml version="1.0" encoding="utf-8"?>
+<p:sld xmlns:a="http://schemas.openxmlformats.org/drawingml/2006/main" xmlns:r="http://schemas.openxmlformats.org/officeDocument/2006/relationships" xmlns:p="http://schemas.openxmlformats.org/presentationml/2006/main">
   <p:cSld>
     <p:bg>
       <p:bgPr>
@@ -5591,7 +5907,14 @@
         <p:cNvGrpSpPr/>
         <p:nvPr/>
       </p:nvGrpSpPr>
-      <p:grpSpPr/>
+      <p:grpSpPr>
+        <a:xfrm>
+          <a:off x="0" y="0"/>
+          <a:ext cx="0" cy="0"/>
+          <a:chOff x="0" y="0"/>
+          <a:chExt cx="0" cy="0"/>
+        </a:xfrm>
+      </p:grpSpPr>
       <p:sp>
         <p:nvSpPr>
           <p:cNvPr id="2" name="Rectangle 1"/>
@@ -5632,6 +5955,7 @@
           <a:lstStyle/>
           <a:p>
             <a:pPr algn="ctr"/>
+            <a:endParaRPr/>
           </a:p>
         </p:txBody>
       </p:sp>
@@ -5664,7 +5988,7 @@
                   <a:srgbClr val="00B4D8"/>
                 </a:solidFill>
               </a:rPr>
-              <a:t>Novelty</a:t>
+              <a:t>Problem Statement</a:t>
             </a:r>
           </a:p>
         </p:txBody>
@@ -5709,6 +6033,7 @@
           <a:lstStyle/>
           <a:p>
             <a:pPr algn="ctr"/>
+            <a:endParaRPr/>
           </a:p>
         </p:txBody>
       </p:sp>
@@ -5720,8 +6045,8 @@
         </p:nvSpPr>
         <p:spPr>
           <a:xfrm>
-            <a:off x="274320" y="1508760"/>
-            <a:ext cx="11430000" cy="5029200"/>
+            <a:off x="274320" y="982000"/>
+            <a:ext cx="11430000" cy="5470728"/>
           </a:xfrm>
           <a:prstGeom prst="rect">
             <a:avLst/>
@@ -5729,7 +6054,7 @@
           <a:noFill/>
         </p:spPr>
         <p:txBody>
-          <a:bodyPr wrap="square">
+          <a:bodyPr wrap="square" lIns="91440" tIns="45720" rIns="91440" bIns="45720" anchor="t">
             <a:spAutoFit/>
           </a:bodyPr>
           <a:lstStyle/>
@@ -5745,7 +6070,7 @@
                   <a:srgbClr val="FFFFFF"/>
                 </a:solidFill>
               </a:rPr>
-              <a:t>1.  Cost-matrix adaptation via MARL</a:t>
+              <a:t>Given a swarm of N heterogeneous drones, design a control architecture that:</a:t>
             </a:r>
           </a:p>
           <a:p>
@@ -5760,7 +6085,23 @@
                   <a:srgbClr val="CCCCCC"/>
                 </a:solidFill>
               </a:rPr>
-              <a:t>— Unlike prior work that fixes Q, R: MAPPO outputs  per-drone, per-step</a:t>
+              <a:t>1.  </a:t>
+            </a:r>
+            <a:r>
+              <a:rPr lang="en-US" sz="1500">
+                <a:solidFill>
+                  <a:srgbClr val="CCCCCC"/>
+                </a:solidFill>
+              </a:rPr>
+              <a:t>Enforces</a:t>
+            </a:r>
+            <a:r>
+              <a:rPr sz="1500">
+                <a:solidFill>
+                  <a:srgbClr val="CCCCCC"/>
+                </a:solidFill>
+              </a:rPr>
+              <a:t> inter-drone collision avoidance at all times</a:t>
             </a:r>
           </a:p>
           <a:p>
@@ -5775,7 +6116,7 @@
                   <a:srgbClr val="CCCCCC"/>
                 </a:solidFill>
               </a:rPr>
-              <a:t>multiplicative scale factors, making the DMPC cost time-varying</a:t>
+              <a:t>→ DMPC with CBF (Control Barrier Function) constraints</a:t>
             </a:r>
           </a:p>
           <a:p>
@@ -5784,13 +6125,63 @@
                 <a:spcPts val="500"/>
               </a:spcBef>
             </a:pPr>
-            <a:r>
-              <a:rPr sz="1700">
-                <a:solidFill>
-                  <a:srgbClr val="FFFFFF"/>
-                </a:solidFill>
-              </a:rPr>
-              <a:t/>
+            <a:endParaRPr sz="1500">
+              <a:solidFill>
+                <a:srgbClr val="CCCCCC"/>
+              </a:solidFill>
+            </a:endParaRPr>
+          </a:p>
+          <a:p>
+            <a:pPr lvl="1">
+              <a:spcBef>
+                <a:spcPts val="500"/>
+              </a:spcBef>
+            </a:pPr>
+            <a:r>
+              <a:rPr sz="1500" dirty="0">
+                <a:solidFill>
+                  <a:srgbClr val="CCCCCC"/>
+                </a:solidFill>
+              </a:rPr>
+              <a:t>2.  </a:t>
+            </a:r>
+            <a:r>
+              <a:rPr sz="1500" dirty="0" err="1">
+                <a:solidFill>
+                  <a:srgbClr val="CCCCCC"/>
+                </a:solidFill>
+              </a:rPr>
+              <a:t>Maximises</a:t>
+            </a:r>
+            <a:r>
+              <a:rPr sz="1500" dirty="0">
+                <a:solidFill>
+                  <a:srgbClr val="CCCCCC"/>
+                </a:solidFill>
+              </a:rPr>
+              <a:t> mission-level objectives (coverage, target tracking, battery life)</a:t>
+            </a:r>
+            <a:endParaRPr sz="1500" dirty="0">
+              <a:solidFill>
+                <a:srgbClr val="CCCCCC"/>
+              </a:solidFill>
+              <a:ea typeface="Calibri"/>
+              <a:cs typeface="Calibri"/>
+            </a:endParaRPr>
+          </a:p>
+          <a:p>
+            <a:pPr lvl="1">
+              <a:spcBef>
+                <a:spcPts val="500"/>
+              </a:spcBef>
+            </a:pPr>
+            <a:r>
+              <a:rPr sz="1500">
+                <a:solidFill>
+                  <a:srgbClr val="CCCCCC"/>
+                </a:solidFill>
+              </a:rPr>
+              <a:t>→ Multi-agent RL policy adaptively tunes DMPC cost weights</a:t>
             </a:r>
           </a:p>
           <a:p>
@@ -5799,14 +6190,11 @@
                 <a:spcPts val="500"/>
               </a:spcBef>
             </a:pPr>
-            <a:r>
-              <a:rPr sz="1700">
-                <a:solidFill>
-                  <a:srgbClr val="FFFFFF"/>
-                </a:solidFill>
-              </a:rPr>
-              <a:t>2.  Safe-by-construction architecture</a:t>
-            </a:r>
+            <a:endParaRPr sz="1500">
+              <a:solidFill>
+                <a:srgbClr val="CCCCCC"/>
+              </a:solidFill>
+            </a:endParaRPr>
           </a:p>
           <a:p>
             <a:pPr lvl="1">
@@ -5820,7 +6208,7 @@
                   <a:srgbClr val="CCCCCC"/>
                 </a:solidFill>
               </a:rPr>
-              <a:t>— CBF constraints are never relaxed; RL only shapes the cost landscape</a:t>
+              <a:t>3.  Scales to three operational ISR scenarios:</a:t>
             </a:r>
           </a:p>
           <a:p>
@@ -5835,7 +6223,37 @@
                   <a:srgbClr val="CCCCCC"/>
                 </a:solidFill>
               </a:rPr>
-              <a:t>— Collision avoidance holds regardless of policy quality</a:t>
+              <a:t>→ Area Surveillance (400×400 m, 4 drones)</a:t>
+            </a:r>
+          </a:p>
+          <a:p>
+            <a:pPr lvl="1">
+              <a:spcBef>
+                <a:spcPts val="500"/>
+              </a:spcBef>
+            </a:pPr>
+            <a:r>
+              <a:rPr sz="1500">
+                <a:solidFill>
+                  <a:srgbClr val="CCCCCC"/>
+                </a:solidFill>
+              </a:rPr>
+              <a:t>→ Threat Response (250×250 m, rapid intercept, 4 drones)</a:t>
+            </a:r>
+          </a:p>
+          <a:p>
+            <a:pPr lvl="1">
+              <a:spcBef>
+                <a:spcPts val="500"/>
+              </a:spcBef>
+            </a:pPr>
+            <a:r>
+              <a:rPr sz="1500">
+                <a:solidFill>
+                  <a:srgbClr val="CCCCCC"/>
+                </a:solidFill>
+              </a:rPr>
+              <a:t>→ Search-and-Track (600×600 m, mobile target hand-off, 4 drones)</a:t>
             </a:r>
           </a:p>
           <a:p>
@@ -5844,29 +6262,11 @@
                 <a:spcPts val="500"/>
               </a:spcBef>
             </a:pPr>
-            <a:r>
-              <a:rPr sz="1700">
-                <a:solidFill>
-                  <a:srgbClr val="FFFFFF"/>
-                </a:solidFill>
-              </a:rPr>
-              <a:t/>
-            </a:r>
-          </a:p>
-          <a:p>
-            <a:pPr>
-              <a:spcBef>
-                <a:spcPts val="500"/>
-              </a:spcBef>
-            </a:pPr>
-            <a:r>
-              <a:rPr sz="1700">
-                <a:solidFill>
-                  <a:srgbClr val="FFFFFF"/>
-                </a:solidFill>
-              </a:rPr>
-              <a:t>3.  Staggered home-position spawning protocol</a:t>
-            </a:r>
+            <a:endParaRPr sz="1500">
+              <a:solidFill>
+                <a:srgbClr val="CCCCCC"/>
+              </a:solidFill>
+            </a:endParaRPr>
           </a:p>
           <a:p>
             <a:pPr lvl="1">
@@ -5880,8 +6280,13 @@
                   <a:srgbClr val="CCCCCC"/>
                 </a:solidFill>
               </a:rPr>
-              <a:t>— Novel launch sequencing that satisfies CBF constraints from t = 0</a:t>
-            </a:r>
+              <a:t>4.  Operates under realistic disturbances: </a:t>
+            </a:r>
+            <a:endParaRPr lang="en-US" sz="1500">
+              <a:solidFill>
+                <a:srgbClr val="CCCCCC"/>
+              </a:solidFill>
+            </a:endParaRPr>
           </a:p>
           <a:p>
             <a:pPr lvl="1">
@@ -5890,42 +6295,22 @@
               </a:spcBef>
             </a:pPr>
             <a:r>
-              <a:rPr sz="1500">
-                <a:solidFill>
-                  <a:srgbClr val="CCCCCC"/>
-                </a:solidFill>
-              </a:rPr>
-              <a:t>— Generalisable to any home-basing strategy (carrier drone, landing pad)</a:t>
-            </a:r>
-          </a:p>
-          <a:p>
-            <a:pPr>
-              <a:spcBef>
-                <a:spcPts val="500"/>
-              </a:spcBef>
-            </a:pPr>
-            <a:r>
-              <a:rPr sz="1700">
-                <a:solidFill>
-                  <a:srgbClr val="FFFFFF"/>
-                </a:solidFill>
-              </a:rPr>
-              <a:t/>
-            </a:r>
-          </a:p>
-          <a:p>
-            <a:pPr>
-              <a:spcBef>
-                <a:spcPts val="500"/>
-              </a:spcBef>
-            </a:pPr>
-            <a:r>
-              <a:rPr sz="1700">
-                <a:solidFill>
-                  <a:srgbClr val="FFFFFF"/>
-                </a:solidFill>
-              </a:rPr>
-              <a:t>4.  Scenario-aware reward shaping without hand-tuning per drone</a:t>
+              <a:rPr lang="en-US" sz="1500">
+                <a:solidFill>
+                  <a:srgbClr val="CCCCCC"/>
+                </a:solidFill>
+              </a:rPr>
+              <a:t>→ </a:t>
+            </a:r>
+            <a:r>
+              <a:rPr lang="en-US" sz="1500">
+                <a:solidFill>
+                  <a:srgbClr val="CCCCCC"/>
+                </a:solidFill>
+                <a:ea typeface="+mn-lt"/>
+                <a:cs typeface="+mn-lt"/>
+              </a:rPr>
+              <a:t>Dryden turbulence, battery degradation</a:t>
             </a:r>
           </a:p>
           <a:p>
@@ -5934,14 +6319,86 @@
                 <a:spcPts val="500"/>
               </a:spcBef>
             </a:pPr>
-            <a:r>
-              <a:rPr sz="1500">
-                <a:solidFill>
-                  <a:srgbClr val="CCCCCC"/>
-                </a:solidFill>
-              </a:rPr>
-              <a:t>— Shared MAPPO policy trained once, deployed across all three ISR scenarios</a:t>
-            </a:r>
+            <a:endParaRPr lang="en-US" sz="1500" dirty="0">
+              <a:solidFill>
+                <a:srgbClr val="CCCCCC"/>
+              </a:solidFill>
+              <a:ea typeface="Calibri"/>
+              <a:cs typeface="Calibri"/>
+            </a:endParaRPr>
+          </a:p>
+          <a:p>
+            <a:r>
+              <a:rPr lang="en-US" sz="1500">
+                <a:solidFill>
+                  <a:srgbClr val="CCCCCC"/>
+                </a:solidFill>
+                <a:ea typeface="Calibri"/>
+                <a:cs typeface="Calibri"/>
+              </a:rPr>
+              <a:t>    5.</a:t>
+            </a:r>
+            <a:r>
+              <a:rPr lang="en-US" sz="1500">
+                <a:solidFill>
+                  <a:srgbClr val="CCCCCC"/>
+                </a:solidFill>
+                <a:ea typeface="+mn-lt"/>
+                <a:cs typeface="+mn-lt"/>
+              </a:rPr>
+              <a:t>Achieving real-time onboard feasibility</a:t>
+            </a:r>
+            <a:endParaRPr lang="en-US" sz="1500" dirty="0">
+              <a:solidFill>
+                <a:srgbClr val="CCCCCC"/>
+              </a:solidFill>
+              <a:ea typeface="+mn-lt"/>
+              <a:cs typeface="+mn-lt"/>
+            </a:endParaRPr>
+          </a:p>
+          <a:p>
+            <a:pPr lvl="1"/>
+            <a:r>
+              <a:rPr lang="en-US" sz="1500">
+                <a:solidFill>
+                  <a:srgbClr val="CCCCCC"/>
+                </a:solidFill>
+                <a:ea typeface="+mn-lt"/>
+                <a:cs typeface="+mn-lt"/>
+              </a:rPr>
+              <a:t> → Convex QP solved using OSQP via CVXPY</a:t>
+            </a:r>
+            <a:endParaRPr lang="en-US">
+              <a:ea typeface="+mn-lt"/>
+              <a:cs typeface="+mn-lt"/>
+            </a:endParaRPr>
+          </a:p>
+          <a:p>
+            <a:pPr lvl="1"/>
+            <a:r>
+              <a:rPr lang="en-US" sz="1500" dirty="0">
+                <a:solidFill>
+                  <a:srgbClr val="CCCCCC"/>
+                </a:solidFill>
+                <a:ea typeface="+mn-lt"/>
+                <a:cs typeface="+mn-lt"/>
+              </a:rPr>
+              <a:t> → Warm-started distributed </a:t>
+            </a:r>
+            <a:r>
+              <a:rPr lang="en-US" sz="1500" dirty="0" err="1">
+                <a:solidFill>
+                  <a:srgbClr val="CCCCCC"/>
+                </a:solidFill>
+                <a:ea typeface="+mn-lt"/>
+                <a:cs typeface="+mn-lt"/>
+              </a:rPr>
+              <a:t>optimisation</a:t>
+            </a:r>
+            <a:endParaRPr lang="en-US" dirty="0" err="1">
+              <a:ea typeface="+mn-lt"/>
+              <a:cs typeface="+mn-lt"/>
+            </a:endParaRPr>
           </a:p>
           <a:p>
             <a:pPr lvl="1">
@@ -5950,58 +6407,39 @@
               </a:spcBef>
             </a:pPr>
             <a:r>
-              <a:rPr sz="1500">
-                <a:solidFill>
-                  <a:srgbClr val="CCCCCC"/>
-                </a:solidFill>
-              </a:rPr>
-              <a:t>— Scenario context embedded in observation rather than separate policies</a:t>
-            </a:r>
-          </a:p>
-          <a:p>
-            <a:pPr>
-              <a:spcBef>
-                <a:spcPts val="500"/>
-              </a:spcBef>
-            </a:pPr>
-            <a:r>
-              <a:rPr sz="1700">
-                <a:solidFill>
-                  <a:srgbClr val="FFFFFF"/>
-                </a:solidFill>
-              </a:rPr>
-              <a:t/>
-            </a:r>
-          </a:p>
-          <a:p>
-            <a:pPr>
-              <a:spcBef>
-                <a:spcPts val="500"/>
-              </a:spcBef>
-            </a:pPr>
-            <a:r>
-              <a:rPr sz="1700">
-                <a:solidFill>
-                  <a:srgbClr val="FFFFFF"/>
-                </a:solidFill>
-              </a:rPr>
-              <a:t>5.  Fully self-contained open-source PyBullet simulation</a:t>
-            </a:r>
-          </a:p>
-          <a:p>
-            <a:pPr lvl="1">
-              <a:spcBef>
-                <a:spcPts val="500"/>
-              </a:spcBef>
-            </a:pPr>
-            <a:r>
-              <a:rPr sz="1500">
-                <a:solidFill>
-                  <a:srgbClr val="CCCCCC"/>
-                </a:solidFill>
-              </a:rPr>
-              <a:t>— No ROS dependency; pure Python + PyBullet + CVXPY</a:t>
-            </a:r>
+              <a:rPr lang="en-US" sz="1500">
+                <a:solidFill>
+                  <a:srgbClr val="CCCCCC"/>
+                </a:solidFill>
+                <a:ea typeface="+mn-lt"/>
+                <a:cs typeface="+mn-lt"/>
+              </a:rPr>
+              <a:t> → ~0.5–2 </a:t>
+            </a:r>
+            <a:r>
+              <a:rPr lang="en-US" sz="1500" dirty="0" err="1">
+                <a:solidFill>
+                  <a:srgbClr val="CCCCCC"/>
+                </a:solidFill>
+                <a:ea typeface="+mn-lt"/>
+                <a:cs typeface="+mn-lt"/>
+              </a:rPr>
+              <a:t>ms</a:t>
+            </a:r>
+            <a:r>
+              <a:rPr lang="en-US" sz="1500" dirty="0">
+                <a:solidFill>
+                  <a:srgbClr val="CCCCCC"/>
+                </a:solidFill>
+                <a:ea typeface="+mn-lt"/>
+                <a:cs typeface="+mn-lt"/>
+              </a:rPr>
+              <a:t> solve time per drone at 50 Hz control frequency</a:t>
+            </a:r>
+            <a:endParaRPr lang="en-US" dirty="0">
+              <a:ea typeface="+mn-lt"/>
+              <a:cs typeface="+mn-lt"/>
+            </a:endParaRPr>
           </a:p>
         </p:txBody>
       </p:sp>
@@ -6013,179 +6451,8 @@
 </p:sld>
 </file>
 
-<file path=ppt/slides/slide18.xml><?xml version="1.0" encoding="utf-8"?>
-<p:sld xmlns:a="http://schemas.openxmlformats.org/drawingml/2006/main" xmlns:p="http://schemas.openxmlformats.org/presentationml/2006/main" xmlns:r="http://schemas.openxmlformats.org/officeDocument/2006/relationships">
-  <p:cSld>
-    <p:bg>
-      <p:bgPr>
-        <a:solidFill>
-          <a:srgbClr val="0F3C78"/>
-        </a:solidFill>
-        <a:effectLst/>
-      </p:bgPr>
-    </p:bg>
-    <p:spTree>
-      <p:nvGrpSpPr>
-        <p:cNvPr id="1" name=""/>
-        <p:cNvGrpSpPr/>
-        <p:nvPr/>
-      </p:nvGrpSpPr>
-      <p:grpSpPr/>
-      <p:sp>
-        <p:nvSpPr>
-          <p:cNvPr id="2" name="Rectangle 1"/>
-          <p:cNvSpPr/>
-          <p:nvPr/>
-        </p:nvSpPr>
-        <p:spPr>
-          <a:xfrm>
-            <a:off x="0" y="0"/>
-            <a:ext cx="228600" cy="6858000"/>
-          </a:xfrm>
-          <a:prstGeom prst="rect">
-            <a:avLst/>
-          </a:prstGeom>
-          <a:solidFill>
-            <a:srgbClr val="00B4D8"/>
-          </a:solidFill>
-          <a:ln>
-            <a:noFill/>
-          </a:ln>
-        </p:spPr>
-        <p:style>
-          <a:lnRef idx="1">
-            <a:schemeClr val="accent1"/>
-          </a:lnRef>
-          <a:fillRef idx="3">
-            <a:schemeClr val="accent1"/>
-          </a:fillRef>
-          <a:effectRef idx="2">
-            <a:schemeClr val="accent1"/>
-          </a:effectRef>
-          <a:fontRef idx="minor">
-            <a:schemeClr val="lt1"/>
-          </a:fontRef>
-        </p:style>
-        <p:txBody>
-          <a:bodyPr rtlCol="0" anchor="ctr"/>
-          <a:lstStyle/>
-          <a:p>
-            <a:pPr algn="ctr"/>
-          </a:p>
-        </p:txBody>
-      </p:sp>
-      <p:sp>
-        <p:nvSpPr>
-          <p:cNvPr id="3" name="TextBox 2"/>
-          <p:cNvSpPr txBox="1"/>
-          <p:nvPr/>
-        </p:nvSpPr>
-        <p:spPr>
-          <a:xfrm>
-            <a:off x="457200" y="1097280"/>
-            <a:ext cx="3657600" cy="1828800"/>
-          </a:xfrm>
-          <a:prstGeom prst="rect">
-            <a:avLst/>
-          </a:prstGeom>
-          <a:noFill/>
-        </p:spPr>
-        <p:txBody>
-          <a:bodyPr wrap="square">
-            <a:spAutoFit/>
-          </a:bodyPr>
-          <a:lstStyle/>
-          <a:p>
-            <a:pPr algn="l"/>
-            <a:r>
-              <a:rPr sz="9600" b="1" i="0">
-                <a:solidFill>
-                  <a:srgbClr val="0A1E50"/>
-                </a:solidFill>
-              </a:rPr>
-              <a:t>09</a:t>
-            </a:r>
-          </a:p>
-        </p:txBody>
-      </p:sp>
-      <p:sp>
-        <p:nvSpPr>
-          <p:cNvPr id="4" name="TextBox 3"/>
-          <p:cNvSpPr txBox="1"/>
-          <p:nvPr/>
-        </p:nvSpPr>
-        <p:spPr>
-          <a:xfrm>
-            <a:off x="457200" y="3200400"/>
-            <a:ext cx="10972800" cy="914400"/>
-          </a:xfrm>
-          <a:prstGeom prst="rect">
-            <a:avLst/>
-          </a:prstGeom>
-          <a:noFill/>
-        </p:spPr>
-        <p:txBody>
-          <a:bodyPr wrap="square">
-            <a:spAutoFit/>
-          </a:bodyPr>
-          <a:lstStyle/>
-          <a:p>
-            <a:pPr algn="l"/>
-            <a:r>
-              <a:rPr sz="3800" b="1" i="0">
-                <a:solidFill>
-                  <a:srgbClr val="FFFFFF"/>
-                </a:solidFill>
-              </a:rPr>
-              <a:t>Conclusion</a:t>
-            </a:r>
-          </a:p>
-        </p:txBody>
-      </p:sp>
-      <p:sp>
-        <p:nvSpPr>
-          <p:cNvPr id="5" name="TextBox 4"/>
-          <p:cNvSpPr txBox="1"/>
-          <p:nvPr/>
-        </p:nvSpPr>
-        <p:spPr>
-          <a:xfrm>
-            <a:off x="457200" y="4206240"/>
-            <a:ext cx="10972800" cy="731520"/>
-          </a:xfrm>
-          <a:prstGeom prst="rect">
-            <a:avLst/>
-          </a:prstGeom>
-          <a:noFill/>
-        </p:spPr>
-        <p:txBody>
-          <a:bodyPr wrap="square">
-            <a:spAutoFit/>
-          </a:bodyPr>
-          <a:lstStyle/>
-          <a:p>
-            <a:pPr algn="l"/>
-            <a:r>
-              <a:rPr sz="1800" b="0" i="1">
-                <a:solidFill>
-                  <a:srgbClr val="00B4D8"/>
-                </a:solidFill>
-              </a:rPr>
-              <a:t>Summary &amp; future directions</a:t>
-            </a:r>
-          </a:p>
-        </p:txBody>
-      </p:sp>
-    </p:spTree>
-  </p:cSld>
-  <p:clrMapOvr>
-    <a:masterClrMapping/>
-  </p:clrMapOvr>
-</p:sld>
-</file>
-
-<file path=ppt/slides/slide19.xml><?xml version="1.0" encoding="utf-8"?>
-<p:sld xmlns:a="http://schemas.openxmlformats.org/drawingml/2006/main" xmlns:p="http://schemas.openxmlformats.org/presentationml/2006/main" xmlns:r="http://schemas.openxmlformats.org/officeDocument/2006/relationships">
+<file path=ppt/slides/slide5.xml><?xml version="1.0" encoding="utf-8"?>
+<p:sld xmlns:a="http://schemas.openxmlformats.org/drawingml/2006/main" xmlns:r="http://schemas.openxmlformats.org/officeDocument/2006/relationships" xmlns:p="http://schemas.openxmlformats.org/presentationml/2006/main">
   <p:cSld>
     <p:bg>
       <p:bgPr>
@@ -6201,7 +6468,14 @@
         <p:cNvGrpSpPr/>
         <p:nvPr/>
       </p:nvGrpSpPr>
-      <p:grpSpPr/>
+      <p:grpSpPr>
+        <a:xfrm>
+          <a:off x="0" y="0"/>
+          <a:ext cx="0" cy="0"/>
+          <a:chOff x="0" y="0"/>
+          <a:chExt cx="0" cy="0"/>
+        </a:xfrm>
+      </p:grpSpPr>
       <p:sp>
         <p:nvSpPr>
           <p:cNvPr id="2" name="Rectangle 1"/>
@@ -6242,6 +6516,7 @@
           <a:lstStyle/>
           <a:p>
             <a:pPr algn="ctr"/>
+            <a:endParaRPr/>
           </a:p>
         </p:txBody>
       </p:sp>
@@ -6274,7 +6549,7 @@
                   <a:srgbClr val="00B4D8"/>
                 </a:solidFill>
               </a:rPr>
-              <a:t>Conclusion</a:t>
+              <a:t>Methodology — DMPC Layer</a:t>
             </a:r>
           </a:p>
         </p:txBody>
@@ -6319,6 +6594,7 @@
           <a:lstStyle/>
           <a:p>
             <a:pPr algn="ctr"/>
+            <a:endParaRPr/>
           </a:p>
         </p:txBody>
       </p:sp>
@@ -6330,8 +6606,8 @@
         </p:nvSpPr>
         <p:spPr>
           <a:xfrm>
-            <a:off x="274320" y="1508760"/>
-            <a:ext cx="11430000" cy="5029200"/>
+            <a:off x="274320" y="1089816"/>
+            <a:ext cx="11430000" cy="457200"/>
           </a:xfrm>
           <a:prstGeom prst="rect">
             <a:avLst/>
@@ -6344,19 +6620,224 @@
           </a:bodyPr>
           <a:lstStyle/>
           <a:p>
+            <a:pPr algn="l"/>
+            <a:r>
+              <a:rPr sz="1600" b="0" i="1">
+                <a:solidFill>
+                  <a:srgbClr val="CCCCCC"/>
+                </a:solidFill>
+              </a:rPr>
+              <a:t>Distributed Model Predictive Control with CBF safety constraints</a:t>
+            </a:r>
+          </a:p>
+        </p:txBody>
+      </p:sp>
+      <p:sp>
+        <p:nvSpPr>
+          <p:cNvPr id="6" name="TextBox 5"/>
+          <p:cNvSpPr txBox="1"/>
+          <p:nvPr/>
+        </p:nvSpPr>
+        <p:spPr>
+          <a:xfrm>
+            <a:off x="274320" y="1543283"/>
+            <a:ext cx="11430000" cy="5168081"/>
+          </a:xfrm>
+          <a:prstGeom prst="rect">
+            <a:avLst/>
+          </a:prstGeom>
+          <a:noFill/>
+        </p:spPr>
+        <p:txBody>
+          <a:bodyPr wrap="square" lIns="91440" tIns="45720" rIns="91440" bIns="45720" anchor="t">
+            <a:spAutoFit/>
+          </a:bodyPr>
+          <a:lstStyle/>
+          <a:p>
+            <a:r>
+              <a:rPr lang="en-US" sz="1700" dirty="0">
+                <a:solidFill>
+                  <a:srgbClr val="FFFFFF"/>
+                </a:solidFill>
+                <a:ea typeface="+mn-lt"/>
+                <a:cs typeface="+mn-lt"/>
+              </a:rPr>
+              <a:t>The controller uses a discrete-time </a:t>
+            </a:r>
+            <a:r>
+              <a:rPr lang="en-US" sz="1700" dirty="0" err="1">
+                <a:solidFill>
+                  <a:srgbClr val="FFFFFF"/>
+                </a:solidFill>
+                <a:ea typeface="+mn-lt"/>
+                <a:cs typeface="+mn-lt"/>
+              </a:rPr>
+              <a:t>linearised</a:t>
+            </a:r>
+            <a:r>
+              <a:rPr lang="en-US" sz="1700" dirty="0">
+                <a:solidFill>
+                  <a:srgbClr val="FFFFFF"/>
+                </a:solidFill>
+                <a:ea typeface="+mn-lt"/>
+                <a:cs typeface="+mn-lt"/>
+              </a:rPr>
+              <a:t> quadrotor model:</a:t>
+            </a:r>
+            <a:endParaRPr lang="en-US" dirty="0"/>
+          </a:p>
+          <a:p>
             <a:pPr>
               <a:spcBef>
                 <a:spcPts val="500"/>
               </a:spcBef>
             </a:pPr>
             <a:r>
+              <a:rPr lang="en-US" sz="1700" b="1">
+                <a:solidFill>
+                  <a:srgbClr val="FFFFFF"/>
+                </a:solidFill>
+                <a:ea typeface="+mn-lt"/>
+                <a:cs typeface="+mn-lt"/>
+              </a:rPr>
+              <a:t>         x</a:t>
+            </a:r>
+            <a:r>
+              <a:rPr lang="en-US" sz="1700" baseline="-25000">
+                <a:solidFill>
+                  <a:srgbClr val="FFFFFF"/>
+                </a:solidFill>
+                <a:ea typeface="+mn-lt"/>
+                <a:cs typeface="+mn-lt"/>
+              </a:rPr>
+              <a:t>k+1</a:t>
+            </a:r>
+            <a:r>
+              <a:rPr lang="en-US" sz="1700">
+                <a:solidFill>
+                  <a:srgbClr val="FFFFFF"/>
+                </a:solidFill>
+                <a:ea typeface="+mn-lt"/>
+                <a:cs typeface="+mn-lt"/>
+              </a:rPr>
+              <a:t>=  A</a:t>
+            </a:r>
+            <a:r>
+              <a:rPr lang="en-US" sz="1700" b="1">
+                <a:solidFill>
+                  <a:srgbClr val="FFFFFF"/>
+                </a:solidFill>
+                <a:ea typeface="+mn-lt"/>
+                <a:cs typeface="+mn-lt"/>
+              </a:rPr>
+              <a:t>x</a:t>
+            </a:r>
+            <a:r>
+              <a:rPr lang="en-US" sz="1700" baseline="-25000">
+                <a:solidFill>
+                  <a:srgbClr val="FFFFFF"/>
+                </a:solidFill>
+                <a:ea typeface="+mn-lt"/>
+                <a:cs typeface="+mn-lt"/>
+              </a:rPr>
+              <a:t>k</a:t>
+            </a:r>
+            <a:r>
+              <a:rPr lang="en-US" sz="1700">
+                <a:solidFill>
+                  <a:srgbClr val="FFFFFF"/>
+                </a:solidFill>
+                <a:ea typeface="+mn-lt"/>
+                <a:cs typeface="+mn-lt"/>
+              </a:rPr>
+              <a:t>+ </a:t>
+            </a:r>
+            <a:r>
+              <a:rPr lang="en-US" sz="1700" dirty="0">
+                <a:solidFill>
+                  <a:srgbClr val="FFFFFF"/>
+                </a:solidFill>
+                <a:ea typeface="+mn-lt"/>
+                <a:cs typeface="+mn-lt"/>
+              </a:rPr>
+              <a:t> B</a:t>
+            </a:r>
+            <a:r>
+              <a:rPr lang="en-US" sz="1700" b="1" dirty="0">
+                <a:solidFill>
+                  <a:srgbClr val="FFFFFF"/>
+                </a:solidFill>
+                <a:ea typeface="+mn-lt"/>
+                <a:cs typeface="+mn-lt"/>
+              </a:rPr>
+              <a:t>u</a:t>
+            </a:r>
+            <a:r>
+              <a:rPr lang="en-US" sz="1700" baseline="-25000" dirty="0">
+                <a:solidFill>
+                  <a:srgbClr val="FFFFFF"/>
+                </a:solidFill>
+                <a:ea typeface="+mn-lt"/>
+                <a:cs typeface="+mn-lt"/>
+              </a:rPr>
+              <a:t>k</a:t>
+            </a:r>
+            <a:endParaRPr lang="en-US" sz="1700" dirty="0">
+              <a:solidFill>
+                <a:srgbClr val="FFFFFF"/>
+              </a:solidFill>
+            </a:endParaRPr>
+          </a:p>
+          <a:p>
+            <a:pPr>
+              <a:spcBef>
+                <a:spcPts val="500"/>
+              </a:spcBef>
+            </a:pPr>
+            <a:endParaRPr lang="en-US" sz="1700" baseline="-25000" dirty="0">
+              <a:solidFill>
+                <a:srgbClr val="FFFFFF"/>
+              </a:solidFill>
+              <a:ea typeface="+mn-lt"/>
+              <a:cs typeface="+mn-lt"/>
+            </a:endParaRPr>
+          </a:p>
+          <a:p>
+            <a:pPr>
+              <a:spcBef>
+                <a:spcPts val="500"/>
+              </a:spcBef>
+            </a:pPr>
+            <a:r>
+              <a:rPr lang="en-US" sz="1700" dirty="0">
+                <a:solidFill>
+                  <a:srgbClr val="FFFFFF"/>
+                </a:solidFill>
+                <a:ea typeface="+mn-lt"/>
+                <a:cs typeface="+mn-lt"/>
+              </a:rPr>
+              <a:t>Each drone uses an 11-dimensional prediction state:</a:t>
+            </a:r>
+            <a:r>
+              <a:rPr lang="en-US" sz="1700" dirty="0">
+                <a:solidFill>
+                  <a:srgbClr val="FFFFFF"/>
+                </a:solidFill>
+              </a:rPr>
+              <a:t>  </a:t>
+            </a:r>
+            <a:r>
               <a:rPr sz="1700">
                 <a:solidFill>
                   <a:srgbClr val="FFFFFF"/>
                 </a:solidFill>
               </a:rPr>
-              <a:t>✓  Designed and implemented a fully functional MAPPO-adaptive DMPC swarm</a:t>
-            </a:r>
+              <a:t>pos, vel, accel, yaw, yaw-rate</a:t>
+            </a:r>
+            <a:endParaRPr lang="en-US">
+              <a:ea typeface="Calibri"/>
+              <a:cs typeface="Calibri"/>
+            </a:endParaRPr>
           </a:p>
           <a:p>
             <a:pPr>
@@ -6364,178 +6845,520 @@
                 <a:spcPts val="500"/>
               </a:spcBef>
             </a:pPr>
+            <a:endParaRPr sz="1700">
+              <a:solidFill>
+                <a:srgbClr val="FFFFFF"/>
+              </a:solidFill>
+            </a:endParaRPr>
+          </a:p>
+          <a:p>
+            <a:pPr>
+              <a:spcBef>
+                <a:spcPts val="500"/>
+              </a:spcBef>
+            </a:pPr>
+            <a:r>
+              <a:rPr sz="1700" dirty="0">
+                <a:solidFill>
+                  <a:srgbClr val="FFFFFF"/>
+                </a:solidFill>
+              </a:rPr>
+              <a:t>MPC objective per drone </a:t>
+            </a:r>
+            <a:r>
+              <a:rPr sz="1700" dirty="0" err="1">
+                <a:solidFill>
+                  <a:srgbClr val="FFFFFF"/>
+                </a:solidFill>
+              </a:rPr>
+              <a:t>i</a:t>
+            </a:r>
+            <a:r>
+              <a:rPr sz="1700" dirty="0">
+                <a:solidFill>
+                  <a:srgbClr val="FFFFFF"/>
+                </a:solidFill>
+              </a:rPr>
+              <a:t> at time t:</a:t>
+            </a:r>
+            <a:endParaRPr sz="1700" dirty="0">
+              <a:solidFill>
+                <a:srgbClr val="FFFFFF"/>
+              </a:solidFill>
+              <a:ea typeface="Calibri"/>
+              <a:cs typeface="Calibri"/>
+            </a:endParaRPr>
+          </a:p>
+          <a:p>
+            <a:pPr lvl="1">
+              <a:spcBef>
+                <a:spcPts val="500"/>
+              </a:spcBef>
+            </a:pPr>
+            <a:r>
+              <a:rPr sz="1500" dirty="0">
+                <a:solidFill>
+                  <a:srgbClr val="CCCCCC"/>
+                </a:solidFill>
+              </a:rPr>
+              <a:t>min  Σₖ  [ (x-xᵣ)ᵀ Q (x-xᵣ) + uᵀ R u ]</a:t>
+            </a:r>
+            <a:r>
+              <a:rPr lang="en-US" sz="1500" dirty="0">
+                <a:solidFill>
+                  <a:srgbClr val="CCCCCC"/>
+                </a:solidFill>
+              </a:rPr>
+              <a:t> + </a:t>
+            </a:r>
+            <a:r>
+              <a:rPr lang="en-US" sz="1500" dirty="0" err="1">
+                <a:solidFill>
+                  <a:srgbClr val="CCCCCC"/>
+                </a:solidFill>
+              </a:rPr>
+              <a:t>e</a:t>
+            </a:r>
+            <a:r>
+              <a:rPr lang="en-US" sz="1500" baseline="-25000" dirty="0" err="1">
+                <a:solidFill>
+                  <a:srgbClr val="CCCCCC"/>
+                </a:solidFill>
+              </a:rPr>
+              <a:t>H</a:t>
+            </a:r>
+            <a:r>
+              <a:rPr lang="en-US" sz="1500" baseline="30000" dirty="0" err="1">
+                <a:solidFill>
+                  <a:srgbClr val="CCCCCC"/>
+                </a:solidFill>
+              </a:rPr>
+              <a:t>T</a:t>
+            </a:r>
+            <a:r>
+              <a:rPr lang="en-US" sz="1500" dirty="0">
+                <a:solidFill>
+                  <a:srgbClr val="CCCCCC"/>
+                </a:solidFill>
+              </a:rPr>
+              <a:t> P </a:t>
+            </a:r>
+            <a:r>
+              <a:rPr lang="en-US" sz="1500" dirty="0" err="1">
+                <a:solidFill>
+                  <a:srgbClr val="CCCCCC"/>
+                </a:solidFill>
+              </a:rPr>
+              <a:t>e</a:t>
+            </a:r>
+            <a:r>
+              <a:rPr lang="en-US" sz="1500" baseline="-25000" dirty="0" err="1">
+                <a:solidFill>
+                  <a:srgbClr val="CCCCCC"/>
+                </a:solidFill>
+              </a:rPr>
+              <a:t>H</a:t>
+            </a:r>
+            <a:endParaRPr lang="en-US" sz="1500" baseline="-25000" dirty="0" err="1">
+              <a:solidFill>
+                <a:srgbClr val="CCCCCC"/>
+              </a:solidFill>
+              <a:ea typeface="Calibri"/>
+              <a:cs typeface="Calibri"/>
+            </a:endParaRPr>
+          </a:p>
+          <a:p>
+            <a:pPr lvl="1">
+              <a:spcBef>
+                <a:spcPts val="500"/>
+              </a:spcBef>
+            </a:pPr>
+            <a:r>
+              <a:rPr sz="1500" dirty="0">
+                <a:solidFill>
+                  <a:srgbClr val="CCCCCC"/>
+                </a:solidFill>
+              </a:rPr>
+              <a:t>subject to:  u ∈ [-</a:t>
+            </a:r>
+            <a:r>
+              <a:rPr sz="1500" dirty="0" err="1">
+                <a:solidFill>
+                  <a:srgbClr val="CCCCCC"/>
+                </a:solidFill>
+              </a:rPr>
+              <a:t>a_max</a:t>
+            </a:r>
+            <a:r>
+              <a:rPr sz="1500" dirty="0">
+                <a:solidFill>
+                  <a:srgbClr val="CCCCCC"/>
+                </a:solidFill>
+              </a:rPr>
+              <a:t>, </a:t>
+            </a:r>
+            <a:r>
+              <a:rPr sz="1500" dirty="0" err="1">
+                <a:solidFill>
+                  <a:srgbClr val="CCCCCC"/>
+                </a:solidFill>
+              </a:rPr>
+              <a:t>a_max</a:t>
+            </a:r>
+            <a:r>
+              <a:rPr sz="1500" dirty="0">
+                <a:solidFill>
+                  <a:srgbClr val="CCCCCC"/>
+                </a:solidFill>
+              </a:rPr>
+              <a:t>]³</a:t>
+            </a:r>
+            <a:endParaRPr sz="1500" dirty="0">
+              <a:solidFill>
+                <a:srgbClr val="CCCCCC"/>
+              </a:solidFill>
+              <a:ea typeface="Calibri"/>
+              <a:cs typeface="Calibri"/>
+            </a:endParaRPr>
+          </a:p>
+          <a:p>
+            <a:pPr lvl="1">
+              <a:spcBef>
+                <a:spcPts val="500"/>
+              </a:spcBef>
+            </a:pPr>
+            <a:r>
+              <a:rPr sz="1500" dirty="0">
+                <a:solidFill>
+                  <a:srgbClr val="CCCCCC"/>
+                </a:solidFill>
+              </a:rPr>
+              <a:t>‖pᵢ(k) − pⱼ(k)‖ ≥ </a:t>
+            </a:r>
+            <a:r>
+              <a:rPr sz="1500" err="1">
+                <a:solidFill>
+                  <a:srgbClr val="CCCCCC"/>
+                </a:solidFill>
+              </a:rPr>
+              <a:t>d_safe</a:t>
+            </a:r>
+            <a:r>
+              <a:rPr sz="1500" dirty="0">
+                <a:solidFill>
+                  <a:srgbClr val="CCCCCC"/>
+                </a:solidFill>
+              </a:rPr>
+              <a:t>  ∀ </a:t>
+            </a:r>
+            <a:r>
+              <a:rPr sz="1500" err="1">
+                <a:solidFill>
+                  <a:srgbClr val="CCCCCC"/>
+                </a:solidFill>
+              </a:rPr>
+              <a:t>j≠i</a:t>
+            </a:r>
+            <a:r>
+              <a:rPr sz="1500" dirty="0">
+                <a:solidFill>
+                  <a:srgbClr val="CCCCCC"/>
+                </a:solidFill>
+              </a:rPr>
+              <a:t>  (CBF no-collision</a:t>
+            </a:r>
+            <a:r>
+              <a:rPr lang="en-US" sz="1500" dirty="0">
+                <a:solidFill>
+                  <a:srgbClr val="CCCCCC"/>
+                </a:solidFill>
+              </a:rPr>
+              <a:t>)</a:t>
+            </a:r>
+            <a:endParaRPr lang="en-US" sz="1500">
+              <a:solidFill>
+                <a:srgbClr val="CCCCCC"/>
+              </a:solidFill>
+              <a:ea typeface="Calibri"/>
+              <a:cs typeface="Calibri"/>
+            </a:endParaRPr>
+          </a:p>
+          <a:p>
+            <a:pPr lvl="1">
+              <a:spcBef>
+                <a:spcPts val="500"/>
+              </a:spcBef>
+            </a:pPr>
+            <a:endParaRPr lang="en-US" sz="1500" dirty="0">
+              <a:solidFill>
+                <a:srgbClr val="CCCCCC"/>
+              </a:solidFill>
+              <a:ea typeface="Calibri"/>
+              <a:cs typeface="Calibri"/>
+            </a:endParaRPr>
+          </a:p>
+          <a:p>
+            <a:r>
+              <a:rPr lang="en-US" sz="1600">
+                <a:solidFill>
+                  <a:srgbClr val="CCCCCC"/>
+                </a:solidFill>
+                <a:ea typeface="Calibri"/>
+                <a:cs typeface="Calibri"/>
+              </a:rPr>
+              <a:t>e</a:t>
+            </a:r>
+            <a:r>
+              <a:rPr lang="en-US" sz="1600" baseline="-25000">
+                <a:solidFill>
+                  <a:srgbClr val="CCCCCC"/>
+                </a:solidFill>
+              </a:rPr>
+              <a:t>H</a:t>
+            </a:r>
+            <a:r>
+              <a:rPr lang="en-US" sz="1600" baseline="30000">
+                <a:solidFill>
+                  <a:srgbClr val="CCCCCC"/>
+                </a:solidFill>
+              </a:rPr>
+              <a:t>T</a:t>
+            </a:r>
+            <a:r>
+              <a:rPr lang="en-US" sz="1600">
+                <a:solidFill>
+                  <a:srgbClr val="CCCCCC"/>
+                </a:solidFill>
+                <a:ea typeface="Calibri"/>
+                <a:cs typeface="Calibri"/>
+              </a:rPr>
+              <a:t> P e</a:t>
+            </a:r>
+            <a:r>
+              <a:rPr lang="en-US" sz="1600" baseline="-25000">
+                <a:solidFill>
+                  <a:srgbClr val="CCCCCC"/>
+                </a:solidFill>
+                <a:ea typeface="Calibri"/>
+                <a:cs typeface="Calibri"/>
+              </a:rPr>
+              <a:t>H  </a:t>
+            </a:r>
+            <a:r>
+              <a:rPr lang="en-US" sz="1600">
+                <a:solidFill>
+                  <a:srgbClr val="CCCCCC"/>
+                </a:solidFill>
+                <a:ea typeface="+mn-lt"/>
+                <a:cs typeface="+mn-lt"/>
+              </a:rPr>
+              <a:t>is the </a:t>
+            </a:r>
+            <a:r>
+              <a:rPr lang="en-US" sz="1600" b="1">
+                <a:solidFill>
+                  <a:srgbClr val="CCCCCC"/>
+                </a:solidFill>
+                <a:ea typeface="+mn-lt"/>
+                <a:cs typeface="+mn-lt"/>
+              </a:rPr>
+              <a:t>terminal cost</a:t>
+            </a:r>
+            <a:r>
+              <a:rPr lang="en-US" sz="1600">
+                <a:solidFill>
+                  <a:srgbClr val="CCCCCC"/>
+                </a:solidFill>
+                <a:ea typeface="+mn-lt"/>
+                <a:cs typeface="+mn-lt"/>
+              </a:rPr>
+              <a:t> (or terminal penalty) in MPC.</a:t>
+            </a:r>
+            <a:endParaRPr lang="en-US" sz="1600">
+              <a:solidFill>
+                <a:srgbClr val="000000"/>
+              </a:solidFill>
+              <a:ea typeface="Calibri"/>
+              <a:cs typeface="Calibri"/>
+            </a:endParaRPr>
+          </a:p>
+          <a:p>
+            <a:pPr>
+              <a:spcBef>
+                <a:spcPts val="500"/>
+              </a:spcBef>
+            </a:pPr>
+            <a:endParaRPr sz="1500" dirty="0">
+              <a:solidFill>
+                <a:srgbClr val="CCCCCC"/>
+              </a:solidFill>
+              <a:ea typeface="Calibri"/>
+              <a:cs typeface="Calibri"/>
+            </a:endParaRPr>
+          </a:p>
+          <a:p>
+            <a:pPr>
+              <a:spcBef>
+                <a:spcPts val="500"/>
+              </a:spcBef>
+            </a:pPr>
+            <a:r>
+              <a:rPr sz="1700" dirty="0">
+                <a:solidFill>
+                  <a:srgbClr val="FFFFFF"/>
+                </a:solidFill>
+              </a:rPr>
+              <a:t>ADMM consensus:  </a:t>
+            </a:r>
+            <a:r>
+              <a:rPr sz="1700" dirty="0" err="1">
+                <a:solidFill>
+                  <a:srgbClr val="FFFFFF"/>
+                </a:solidFill>
+              </a:rPr>
+              <a:t>neighbours</a:t>
+            </a:r>
+            <a:r>
+              <a:rPr sz="1700" dirty="0">
+                <a:solidFill>
+                  <a:srgbClr val="FFFFFF"/>
+                </a:solidFill>
+              </a:rPr>
+              <a:t> negotiate control proposals over L iterations</a:t>
+            </a:r>
+            <a:endParaRPr sz="1700" dirty="0">
+              <a:solidFill>
+                <a:srgbClr val="FFFFFF"/>
+              </a:solidFill>
+              <a:ea typeface="Calibri"/>
+              <a:cs typeface="Calibri"/>
+            </a:endParaRPr>
+          </a:p>
+          <a:p>
+            <a:pPr lvl="1">
+              <a:spcBef>
+                <a:spcPts val="500"/>
+              </a:spcBef>
+            </a:pPr>
+            <a:r>
+              <a:rPr sz="1500" dirty="0">
+                <a:solidFill>
+                  <a:srgbClr val="CCCCCC"/>
+                </a:solidFill>
+              </a:rPr>
+              <a:t>• Blended output: </a:t>
+            </a:r>
+            <a:r>
+              <a:rPr sz="1500" dirty="0" err="1">
+                <a:solidFill>
+                  <a:srgbClr val="CCCCCC"/>
+                </a:solidFill>
+              </a:rPr>
+              <a:t>u_i</a:t>
+            </a:r>
+            <a:r>
+              <a:rPr sz="1500" dirty="0">
+                <a:solidFill>
+                  <a:srgbClr val="CCCCCC"/>
+                </a:solidFill>
+              </a:rPr>
+              <a:t> = 0.8 · </a:t>
+            </a:r>
+            <a:r>
+              <a:rPr sz="1500" dirty="0" err="1">
+                <a:solidFill>
+                  <a:srgbClr val="CCCCCC"/>
+                </a:solidFill>
+              </a:rPr>
+              <a:t>u_DMPC</a:t>
+            </a:r>
+            <a:r>
+              <a:rPr sz="1500" dirty="0">
+                <a:solidFill>
+                  <a:srgbClr val="CCCCCC"/>
+                </a:solidFill>
+              </a:rPr>
+              <a:t> + 0.2 · </a:t>
+            </a:r>
+            <a:r>
+              <a:rPr sz="1500" dirty="0" err="1">
+                <a:solidFill>
+                  <a:srgbClr val="CCCCCC"/>
+                </a:solidFill>
+              </a:rPr>
+              <a:t>u_consensus</a:t>
+            </a:r>
+            <a:endParaRPr sz="1500" dirty="0" err="1">
+              <a:solidFill>
+                <a:srgbClr val="CCCCCC"/>
+              </a:solidFill>
+              <a:ea typeface="Calibri"/>
+              <a:cs typeface="Calibri"/>
+            </a:endParaRPr>
+          </a:p>
+          <a:p>
+            <a:pPr>
+              <a:spcBef>
+                <a:spcPts val="500"/>
+              </a:spcBef>
+            </a:pPr>
+            <a:endParaRPr sz="1500">
+              <a:solidFill>
+                <a:srgbClr val="CCCCCC"/>
+              </a:solidFill>
+            </a:endParaRPr>
+          </a:p>
+          <a:p>
+            <a:pPr>
+              <a:spcBef>
+                <a:spcPts val="500"/>
+              </a:spcBef>
+            </a:pPr>
+            <a:r>
+              <a:rPr sz="1700" dirty="0">
+                <a:solidFill>
+                  <a:srgbClr val="FFFFFF"/>
+                </a:solidFill>
+              </a:rPr>
+              <a:t>Solver:  OSQP via CVXPY (DPP-compiled, warm-started) — ~0.5–2 </a:t>
+            </a:r>
+            <a:r>
+              <a:rPr sz="1700" dirty="0" err="1">
+                <a:solidFill>
+                  <a:srgbClr val="FFFFFF"/>
+                </a:solidFill>
+              </a:rPr>
+              <a:t>ms</a:t>
+            </a:r>
+            <a:r>
+              <a:rPr sz="1700" dirty="0">
+                <a:solidFill>
+                  <a:srgbClr val="FFFFFF"/>
+                </a:solidFill>
+              </a:rPr>
+              <a:t> per drone</a:t>
+            </a:r>
+            <a:endParaRPr sz="1700" dirty="0">
+              <a:solidFill>
+                <a:srgbClr val="FFFFFF"/>
+              </a:solidFill>
+              <a:ea typeface="Calibri"/>
+              <a:cs typeface="Calibri"/>
+            </a:endParaRPr>
+          </a:p>
+          <a:p>
+            <a:pPr>
+              <a:spcBef>
+                <a:spcPts val="500"/>
+              </a:spcBef>
+            </a:pPr>
             <a:r>
               <a:rPr sz="1700">
                 <a:solidFill>
                   <a:srgbClr val="FFFFFF"/>
                 </a:solidFill>
               </a:rPr>
-              <a:t>✓  Demonstrated on three realistic ISR scenarios (coverage, threat, search)</a:t>
-            </a:r>
-          </a:p>
-          <a:p>
-            <a:pPr>
-              <a:spcBef>
-                <a:spcPts val="500"/>
-              </a:spcBef>
-            </a:pPr>
-            <a:r>
-              <a:rPr sz="1700">
-                <a:solidFill>
-                  <a:srgbClr val="FFFFFF"/>
-                </a:solidFill>
-              </a:rPr>
-              <a:t>✓  CBF-guaranteed collision avoidance with zero violations</a:t>
-            </a:r>
-          </a:p>
-          <a:p>
-            <a:pPr>
-              <a:spcBef>
-                <a:spcPts val="500"/>
-              </a:spcBef>
-            </a:pPr>
-            <a:r>
-              <a:rPr sz="1700">
-                <a:solidFill>
-                  <a:srgbClr val="FFFFFF"/>
-                </a:solidFill>
-              </a:rPr>
-              <a:t>✓  RL policy consistently improves mission reward over pure DMPC</a:t>
-            </a:r>
-          </a:p>
-          <a:p>
-            <a:pPr>
-              <a:spcBef>
-                <a:spcPts val="500"/>
-              </a:spcBef>
-            </a:pPr>
-            <a:r>
-              <a:rPr sz="1700">
-                <a:solidFill>
-                  <a:srgbClr val="FFFFFF"/>
-                </a:solidFill>
-              </a:rPr>
-              <a:t>✓  Staggered launch protocol ensures safe simultaneous deployment from one pad</a:t>
-            </a:r>
-          </a:p>
-          <a:p>
-            <a:pPr>
-              <a:spcBef>
-                <a:spcPts val="500"/>
-              </a:spcBef>
-            </a:pPr>
-            <a:r>
-              <a:rPr sz="1700">
-                <a:solidFill>
-                  <a:srgbClr val="FFFFFF"/>
-                </a:solidFill>
-              </a:rPr>
-              <a:t>✓  Open-source PyBullet simulation with video recording for reproducibility</a:t>
-            </a:r>
-          </a:p>
-          <a:p>
-            <a:pPr>
-              <a:spcBef>
-                <a:spcPts val="500"/>
-              </a:spcBef>
-            </a:pPr>
-            <a:r>
-              <a:rPr sz="1700">
-                <a:solidFill>
-                  <a:srgbClr val="FFFFFF"/>
-                </a:solidFill>
-              </a:rPr>
-              <a:t/>
-            </a:r>
-          </a:p>
-          <a:p>
-            <a:pPr>
-              <a:spcBef>
-                <a:spcPts val="500"/>
-              </a:spcBef>
-            </a:pPr>
-            <a:r>
-              <a:rPr sz="1700">
-                <a:solidFill>
-                  <a:srgbClr val="FFFFFF"/>
-                </a:solidFill>
-              </a:rPr>
-              <a:t>Future work:</a:t>
-            </a:r>
-          </a:p>
-          <a:p>
-            <a:pPr lvl="1">
-              <a:spcBef>
-                <a:spcPts val="500"/>
-              </a:spcBef>
-            </a:pPr>
-            <a:r>
-              <a:rPr sz="1500">
-                <a:solidFill>
-                  <a:srgbClr val="CCCCCC"/>
-                </a:solidFill>
-              </a:rPr>
-              <a:t>▶  Hardware-in-the-loop testing on real hector_quadrotor platforms</a:t>
-            </a:r>
-          </a:p>
-          <a:p>
-            <a:pPr lvl="1">
-              <a:spcBef>
-                <a:spcPts val="500"/>
-              </a:spcBef>
-            </a:pPr>
-            <a:r>
-              <a:rPr sz="1500">
-                <a:solidFill>
-                  <a:srgbClr val="CCCCCC"/>
-                </a:solidFill>
-              </a:rPr>
-              <a:t>▶  Extend to 8–12 drone swarms with scalable ADMM partitioning</a:t>
-            </a:r>
-          </a:p>
-          <a:p>
-            <a:pPr lvl="1">
-              <a:spcBef>
-                <a:spcPts val="500"/>
-              </a:spcBef>
-            </a:pPr>
-            <a:r>
-              <a:rPr sz="1500">
-                <a:solidFill>
-                  <a:srgbClr val="CCCCCC"/>
-                </a:solidFill>
-              </a:rPr>
-              <a:t>▶  Incorporate communication-delay and packet-loss models</a:t>
-            </a:r>
-          </a:p>
-          <a:p>
-            <a:pPr lvl="1">
-              <a:spcBef>
-                <a:spcPts val="500"/>
-              </a:spcBef>
-            </a:pPr>
-            <a:r>
-              <a:rPr sz="1500">
-                <a:solidFill>
-                  <a:srgbClr val="CCCCCC"/>
-                </a:solidFill>
-              </a:rPr>
-              <a:t>▶  Transfer to outdoor GPS-denied environments using EKF localisation</a:t>
-            </a:r>
-          </a:p>
-          <a:p>
-            <a:pPr lvl="1">
-              <a:spcBef>
-                <a:spcPts val="500"/>
-              </a:spcBef>
-            </a:pPr>
-            <a:r>
-              <a:rPr sz="1500">
-                <a:solidFill>
-                  <a:srgbClr val="CCCCCC"/>
-                </a:solidFill>
-              </a:rPr>
-              <a:t>▶  Investigate sim-to-real transfer with domain randomisation</a:t>
+              <a:t>Horizon: H = 20 steps  ·  dt = 0.02 s  ·  50 Hz control loop</a:t>
             </a:r>
           </a:p>
         </p:txBody>
@@ -6548,427 +7371,8 @@
 </p:sld>
 </file>
 
-<file path=ppt/slides/slide2.xml><?xml version="1.0" encoding="utf-8"?>
-<p:sld xmlns:a="http://schemas.openxmlformats.org/drawingml/2006/main" xmlns:p="http://schemas.openxmlformats.org/presentationml/2006/main" xmlns:r="http://schemas.openxmlformats.org/officeDocument/2006/relationships">
-  <p:cSld>
-    <p:bg>
-      <p:bgPr>
-        <a:solidFill>
-          <a:srgbClr val="0F3C78"/>
-        </a:solidFill>
-        <a:effectLst/>
-      </p:bgPr>
-    </p:bg>
-    <p:spTree>
-      <p:nvGrpSpPr>
-        <p:cNvPr id="1" name=""/>
-        <p:cNvGrpSpPr/>
-        <p:nvPr/>
-      </p:nvGrpSpPr>
-      <p:grpSpPr/>
-      <p:sp>
-        <p:nvSpPr>
-          <p:cNvPr id="2" name="Rectangle 1"/>
-          <p:cNvSpPr/>
-          <p:nvPr/>
-        </p:nvSpPr>
-        <p:spPr>
-          <a:xfrm>
-            <a:off x="0" y="0"/>
-            <a:ext cx="228600" cy="6858000"/>
-          </a:xfrm>
-          <a:prstGeom prst="rect">
-            <a:avLst/>
-          </a:prstGeom>
-          <a:solidFill>
-            <a:srgbClr val="00B4D8"/>
-          </a:solidFill>
-          <a:ln>
-            <a:noFill/>
-          </a:ln>
-        </p:spPr>
-        <p:style>
-          <a:lnRef idx="1">
-            <a:schemeClr val="accent1"/>
-          </a:lnRef>
-          <a:fillRef idx="3">
-            <a:schemeClr val="accent1"/>
-          </a:fillRef>
-          <a:effectRef idx="2">
-            <a:schemeClr val="accent1"/>
-          </a:effectRef>
-          <a:fontRef idx="minor">
-            <a:schemeClr val="lt1"/>
-          </a:fontRef>
-        </p:style>
-        <p:txBody>
-          <a:bodyPr rtlCol="0" anchor="ctr"/>
-          <a:lstStyle/>
-          <a:p>
-            <a:pPr algn="ctr"/>
-          </a:p>
-        </p:txBody>
-      </p:sp>
-      <p:sp>
-        <p:nvSpPr>
-          <p:cNvPr id="3" name="TextBox 2"/>
-          <p:cNvSpPr txBox="1"/>
-          <p:nvPr/>
-        </p:nvSpPr>
-        <p:spPr>
-          <a:xfrm>
-            <a:off x="457200" y="1097280"/>
-            <a:ext cx="3657600" cy="1828800"/>
-          </a:xfrm>
-          <a:prstGeom prst="rect">
-            <a:avLst/>
-          </a:prstGeom>
-          <a:noFill/>
-        </p:spPr>
-        <p:txBody>
-          <a:bodyPr wrap="square">
-            <a:spAutoFit/>
-          </a:bodyPr>
-          <a:lstStyle/>
-          <a:p>
-            <a:pPr algn="l"/>
-            <a:r>
-              <a:rPr sz="9600" b="1" i="0">
-                <a:solidFill>
-                  <a:srgbClr val="0A1E50"/>
-                </a:solidFill>
-              </a:rPr>
-              <a:t>02</a:t>
-            </a:r>
-          </a:p>
-        </p:txBody>
-      </p:sp>
-      <p:sp>
-        <p:nvSpPr>
-          <p:cNvPr id="4" name="TextBox 3"/>
-          <p:cNvSpPr txBox="1"/>
-          <p:nvPr/>
-        </p:nvSpPr>
-        <p:spPr>
-          <a:xfrm>
-            <a:off x="457200" y="3200400"/>
-            <a:ext cx="10972800" cy="914400"/>
-          </a:xfrm>
-          <a:prstGeom prst="rect">
-            <a:avLst/>
-          </a:prstGeom>
-          <a:noFill/>
-        </p:spPr>
-        <p:txBody>
-          <a:bodyPr wrap="square">
-            <a:spAutoFit/>
-          </a:bodyPr>
-          <a:lstStyle/>
-          <a:p>
-            <a:pPr algn="l"/>
-            <a:r>
-              <a:rPr sz="3800" b="1" i="0">
-                <a:solidFill>
-                  <a:srgbClr val="FFFFFF"/>
-                </a:solidFill>
-              </a:rPr>
-              <a:t>Team Contributions</a:t>
-            </a:r>
-          </a:p>
-        </p:txBody>
-      </p:sp>
-      <p:sp>
-        <p:nvSpPr>
-          <p:cNvPr id="5" name="TextBox 4"/>
-          <p:cNvSpPr txBox="1"/>
-          <p:nvPr/>
-        </p:nvSpPr>
-        <p:spPr>
-          <a:xfrm>
-            <a:off x="457200" y="4206240"/>
-            <a:ext cx="10972800" cy="731520"/>
-          </a:xfrm>
-          <a:prstGeom prst="rect">
-            <a:avLst/>
-          </a:prstGeom>
-          <a:noFill/>
-        </p:spPr>
-        <p:txBody>
-          <a:bodyPr wrap="square">
-            <a:spAutoFit/>
-          </a:bodyPr>
-          <a:lstStyle/>
-          <a:p>
-            <a:pPr algn="l"/>
-            <a:r>
-              <a:rPr sz="1800" b="0" i="1">
-                <a:solidFill>
-                  <a:srgbClr val="00B4D8"/>
-                </a:solidFill>
-              </a:rPr>
-              <a:t>Equal-proportionate module ownership</a:t>
-            </a:r>
-          </a:p>
-        </p:txBody>
-      </p:sp>
-    </p:spTree>
-  </p:cSld>
-  <p:clrMapOvr>
-    <a:masterClrMapping/>
-  </p:clrMapOvr>
-</p:sld>
-</file>
-
-<file path=ppt/slides/slide20.xml><?xml version="1.0" encoding="utf-8"?>
-<p:sld xmlns:a="http://schemas.openxmlformats.org/drawingml/2006/main" xmlns:p="http://schemas.openxmlformats.org/presentationml/2006/main" xmlns:r="http://schemas.openxmlformats.org/officeDocument/2006/relationships">
-  <p:cSld>
-    <p:bg>
-      <p:bgPr>
-        <a:solidFill>
-          <a:srgbClr val="16213E"/>
-        </a:solidFill>
-        <a:effectLst/>
-      </p:bgPr>
-    </p:bg>
-    <p:spTree>
-      <p:nvGrpSpPr>
-        <p:cNvPr id="1" name=""/>
-        <p:cNvGrpSpPr/>
-        <p:nvPr/>
-      </p:nvGrpSpPr>
-      <p:grpSpPr/>
-      <p:sp>
-        <p:nvSpPr>
-          <p:cNvPr id="2" name="Rectangle 1"/>
-          <p:cNvSpPr/>
-          <p:nvPr/>
-        </p:nvSpPr>
-        <p:spPr>
-          <a:xfrm>
-            <a:off x="0" y="0"/>
-            <a:ext cx="182880" cy="6858000"/>
-          </a:xfrm>
-          <a:prstGeom prst="rect">
-            <a:avLst/>
-          </a:prstGeom>
-          <a:solidFill>
-            <a:srgbClr val="00B4D8"/>
-          </a:solidFill>
-          <a:ln>
-            <a:noFill/>
-          </a:ln>
-        </p:spPr>
-        <p:style>
-          <a:lnRef idx="1">
-            <a:schemeClr val="accent1"/>
-          </a:lnRef>
-          <a:fillRef idx="3">
-            <a:schemeClr val="accent1"/>
-          </a:fillRef>
-          <a:effectRef idx="2">
-            <a:schemeClr val="accent1"/>
-          </a:effectRef>
-          <a:fontRef idx="minor">
-            <a:schemeClr val="lt1"/>
-          </a:fontRef>
-        </p:style>
-        <p:txBody>
-          <a:bodyPr rtlCol="0" anchor="ctr"/>
-          <a:lstStyle/>
-          <a:p>
-            <a:pPr algn="ctr"/>
-          </a:p>
-        </p:txBody>
-      </p:sp>
-      <p:sp>
-        <p:nvSpPr>
-          <p:cNvPr id="3" name="Rectangle 2"/>
-          <p:cNvSpPr/>
-          <p:nvPr/>
-        </p:nvSpPr>
-        <p:spPr>
-          <a:xfrm>
-            <a:off x="0" y="0"/>
-            <a:ext cx="12188952" cy="91440"/>
-          </a:xfrm>
-          <a:prstGeom prst="rect">
-            <a:avLst/>
-          </a:prstGeom>
-          <a:solidFill>
-            <a:srgbClr val="00B4D8"/>
-          </a:solidFill>
-          <a:ln>
-            <a:noFill/>
-          </a:ln>
-        </p:spPr>
-        <p:style>
-          <a:lnRef idx="1">
-            <a:schemeClr val="accent1"/>
-          </a:lnRef>
-          <a:fillRef idx="3">
-            <a:schemeClr val="accent1"/>
-          </a:fillRef>
-          <a:effectRef idx="2">
-            <a:schemeClr val="accent1"/>
-          </a:effectRef>
-          <a:fontRef idx="minor">
-            <a:schemeClr val="lt1"/>
-          </a:fontRef>
-        </p:style>
-        <p:txBody>
-          <a:bodyPr rtlCol="0" anchor="ctr"/>
-          <a:lstStyle/>
-          <a:p>
-            <a:pPr algn="ctr"/>
-          </a:p>
-        </p:txBody>
-      </p:sp>
-      <p:sp>
-        <p:nvSpPr>
-          <p:cNvPr id="4" name="TextBox 3"/>
-          <p:cNvSpPr txBox="1"/>
-          <p:nvPr/>
-        </p:nvSpPr>
-        <p:spPr>
-          <a:xfrm>
-            <a:off x="457200" y="1371600"/>
-            <a:ext cx="10972800" cy="1828800"/>
-          </a:xfrm>
-          <a:prstGeom prst="rect">
-            <a:avLst/>
-          </a:prstGeom>
-          <a:noFill/>
-        </p:spPr>
-        <p:txBody>
-          <a:bodyPr wrap="square">
-            <a:spAutoFit/>
-          </a:bodyPr>
-          <a:lstStyle/>
-          <a:p>
-            <a:pPr algn="ctr"/>
-            <a:r>
-              <a:rPr sz="7200" b="1" i="0">
-                <a:solidFill>
-                  <a:srgbClr val="FFFFFF"/>
-                </a:solidFill>
-              </a:rPr>
-              <a:t>Thank You</a:t>
-            </a:r>
-          </a:p>
-        </p:txBody>
-      </p:sp>
-      <p:sp>
-        <p:nvSpPr>
-          <p:cNvPr id="5" name="TextBox 4"/>
-          <p:cNvSpPr txBox="1"/>
-          <p:nvPr/>
-        </p:nvSpPr>
-        <p:spPr>
-          <a:xfrm>
-            <a:off x="457200" y="3200400"/>
-            <a:ext cx="10972800" cy="914400"/>
-          </a:xfrm>
-          <a:prstGeom prst="rect">
-            <a:avLst/>
-          </a:prstGeom>
-          <a:noFill/>
-        </p:spPr>
-        <p:txBody>
-          <a:bodyPr wrap="square">
-            <a:spAutoFit/>
-          </a:bodyPr>
-          <a:lstStyle/>
-          <a:p>
-            <a:pPr algn="ctr"/>
-            <a:r>
-              <a:rPr sz="3200" b="0" i="0">
-                <a:solidFill>
-                  <a:srgbClr val="00B4D8"/>
-                </a:solidFill>
-              </a:rPr>
-              <a:t>Questions?</a:t>
-            </a:r>
-          </a:p>
-        </p:txBody>
-      </p:sp>
-      <p:sp>
-        <p:nvSpPr>
-          <p:cNvPr id="6" name="TextBox 5"/>
-          <p:cNvSpPr txBox="1"/>
-          <p:nvPr/>
-        </p:nvSpPr>
-        <p:spPr>
-          <a:xfrm>
-            <a:off x="457200" y="4754880"/>
-            <a:ext cx="10972800" cy="548640"/>
-          </a:xfrm>
-          <a:prstGeom prst="rect">
-            <a:avLst/>
-          </a:prstGeom>
-          <a:noFill/>
-        </p:spPr>
-        <p:txBody>
-          <a:bodyPr wrap="square">
-            <a:spAutoFit/>
-          </a:bodyPr>
-          <a:lstStyle/>
-          <a:p>
-            <a:pPr algn="ctr"/>
-            <a:r>
-              <a:rPr sz="1600" b="0" i="0">
-                <a:solidFill>
-                  <a:srgbClr val="CCCCCC"/>
-                </a:solidFill>
-              </a:rPr>
-              <a:t>Repository:  github.com/Cornerstone-swarm-drones/isr-rl-dmpc</a:t>
-            </a:r>
-          </a:p>
-        </p:txBody>
-      </p:sp>
-      <p:sp>
-        <p:nvSpPr>
-          <p:cNvPr id="7" name="TextBox 6"/>
-          <p:cNvSpPr txBox="1"/>
-          <p:nvPr/>
-        </p:nvSpPr>
-        <p:spPr>
-          <a:xfrm>
-            <a:off x="457200" y="5943600"/>
-            <a:ext cx="10972800" cy="457200"/>
-          </a:xfrm>
-          <a:prstGeom prst="rect">
-            <a:avLst/>
-          </a:prstGeom>
-          <a:noFill/>
-        </p:spPr>
-        <p:txBody>
-          <a:bodyPr wrap="square">
-            <a:spAutoFit/>
-          </a:bodyPr>
-          <a:lstStyle/>
-          <a:p>
-            <a:pPr algn="ctr"/>
-            <a:r>
-              <a:rPr sz="1300" b="0" i="0">
-                <a:solidFill>
-                  <a:srgbClr val="667788"/>
-                </a:solidFill>
-              </a:rPr>
-              <a:t>ISR-RL-DMPC  ·  Swarm Intelligence Research  ·  2024-2025</a:t>
-            </a:r>
-          </a:p>
-        </p:txBody>
-      </p:sp>
-    </p:spTree>
-  </p:cSld>
-  <p:clrMapOvr>
-    <a:masterClrMapping/>
-  </p:clrMapOvr>
-</p:sld>
-</file>
-
-<file path=ppt/slides/slide3.xml><?xml version="1.0" encoding="utf-8"?>
-<p:sld xmlns:a="http://schemas.openxmlformats.org/drawingml/2006/main" xmlns:p="http://schemas.openxmlformats.org/presentationml/2006/main" xmlns:r="http://schemas.openxmlformats.org/officeDocument/2006/relationships">
+<file path=ppt/slides/slide6.xml><?xml version="1.0" encoding="utf-8"?>
+<p:sld xmlns:a="http://schemas.openxmlformats.org/drawingml/2006/main" xmlns:r="http://schemas.openxmlformats.org/officeDocument/2006/relationships" xmlns:p="http://schemas.openxmlformats.org/presentationml/2006/main">
   <p:cSld>
     <p:bg>
       <p:bgPr>
@@ -6984,7 +7388,14 @@
         <p:cNvGrpSpPr/>
         <p:nvPr/>
       </p:nvGrpSpPr>
-      <p:grpSpPr/>
+      <p:grpSpPr>
+        <a:xfrm>
+          <a:off x="0" y="0"/>
+          <a:ext cx="0" cy="0"/>
+          <a:chOff x="0" y="0"/>
+          <a:chExt cx="0" cy="0"/>
+        </a:xfrm>
+      </p:grpSpPr>
       <p:sp>
         <p:nvSpPr>
           <p:cNvPr id="2" name="Rectangle 1"/>
@@ -7025,6 +7436,7 @@
           <a:lstStyle/>
           <a:p>
             <a:pPr algn="ctr"/>
+            <a:endParaRPr/>
           </a:p>
         </p:txBody>
       </p:sp>
@@ -7057,7 +7469,7 @@
                   <a:srgbClr val="00B4D8"/>
                 </a:solidFill>
               </a:rPr>
-              <a:t>Student Contributions</a:t>
+              <a:t>Methodology — RL Layer (MAPPO)</a:t>
             </a:r>
           </a:p>
         </p:txBody>
@@ -7102,6 +7514,7 @@
           <a:lstStyle/>
           <a:p>
             <a:pPr algn="ctr"/>
+            <a:endParaRPr/>
           </a:p>
         </p:txBody>
       </p:sp>
@@ -7113,8 +7526,8 @@
         </p:nvSpPr>
         <p:spPr>
           <a:xfrm>
-            <a:off x="274320" y="1508760"/>
-            <a:ext cx="5486400" cy="5029200"/>
+            <a:off x="274320" y="1005840"/>
+            <a:ext cx="11430000" cy="457200"/>
           </a:xfrm>
           <a:prstGeom prst="rect">
             <a:avLst/>
@@ -7127,198 +7540,14 @@
           </a:bodyPr>
           <a:lstStyle/>
           <a:p>
-            <a:pPr>
-              <a:spcBef>
-                <a:spcPts val="400"/>
-              </a:spcBef>
-            </a:pPr>
-            <a:r>
-              <a:rPr sz="1600">
-                <a:solidFill>
-                  <a:srgbClr val="FFFFFF"/>
-                </a:solidFill>
-              </a:rPr>
-              <a:t>Student A — DMPC Core &amp; Optimisation</a:t>
-            </a:r>
-          </a:p>
-          <a:p>
-            <a:pPr>
-              <a:spcBef>
-                <a:spcPts val="400"/>
-              </a:spcBef>
-            </a:pPr>
-            <a:r>
-              <a:rPr sz="1600">
-                <a:solidFill>
-                  <a:srgbClr val="FFFFFF"/>
-                </a:solidFill>
-              </a:rPr>
-              <a:t>  • Distributed Model Predictive Control (DMPC) framework</a:t>
-            </a:r>
-          </a:p>
-          <a:p>
-            <a:pPr>
-              <a:spcBef>
-                <a:spcPts val="400"/>
-              </a:spcBef>
-            </a:pPr>
-            <a:r>
-              <a:rPr sz="1600">
-                <a:solidFill>
-                  <a:srgbClr val="FFFFFF"/>
-                </a:solidFill>
-              </a:rPr>
-              <a:t>  • MPC cost matrices Q, R — DPP-compliant CVXPY formulation</a:t>
-            </a:r>
-          </a:p>
-          <a:p>
-            <a:pPr>
-              <a:spcBef>
-                <a:spcPts val="400"/>
-              </a:spcBef>
-            </a:pPr>
-            <a:r>
-              <a:rPr sz="1600">
-                <a:solidFill>
-                  <a:srgbClr val="FFFFFF"/>
-                </a:solidFill>
-              </a:rPr>
-              <a:t>  • CBF-based inter-drone collision constraints</a:t>
-            </a:r>
-          </a:p>
-          <a:p>
-            <a:pPr>
-              <a:spcBef>
-                <a:spcPts val="400"/>
-              </a:spcBef>
-            </a:pPr>
-            <a:r>
-              <a:rPr sz="1600">
-                <a:solidFill>
-                  <a:srgbClr val="FFFFFF"/>
-                </a:solidFill>
-              </a:rPr>
-              <a:t>  • ADMM consensus protocol for cooperative trajectory planning</a:t>
-            </a:r>
-          </a:p>
-          <a:p>
-            <a:pPr>
-              <a:spcBef>
-                <a:spcPts val="400"/>
-              </a:spcBef>
-            </a:pPr>
-            <a:r>
-              <a:rPr sz="1600">
-                <a:solidFill>
-                  <a:srgbClr val="FFFFFF"/>
-                </a:solidFill>
-              </a:rPr>
-              <a:t>  • EnvironmentSimulator 6-DOF physics engine (rigid-body, wind, battery)</a:t>
-            </a:r>
-          </a:p>
-          <a:p>
-            <a:pPr>
-              <a:spcBef>
-                <a:spcPts val="400"/>
-              </a:spcBef>
-            </a:pPr>
-            <a:r>
-              <a:rPr sz="1600">
-                <a:solidFill>
-                  <a:srgbClr val="FFFFFF"/>
-                </a:solidFill>
-              </a:rPr>
-              <a:t/>
-            </a:r>
-          </a:p>
-          <a:p>
-            <a:pPr>
-              <a:spcBef>
-                <a:spcPts val="400"/>
-              </a:spcBef>
-            </a:pPr>
-            <a:r>
-              <a:rPr sz="1600">
-                <a:solidFill>
-                  <a:srgbClr val="FFFFFF"/>
-                </a:solidFill>
-              </a:rPr>
-              <a:t>Student B — RL Policy &amp; Training Infrastructure</a:t>
-            </a:r>
-          </a:p>
-          <a:p>
-            <a:pPr>
-              <a:spcBef>
-                <a:spcPts val="400"/>
-              </a:spcBef>
-            </a:pPr>
-            <a:r>
-              <a:rPr sz="1600">
-                <a:solidFill>
-                  <a:srgbClr val="FFFFFF"/>
-                </a:solidFill>
-              </a:rPr>
-              <a:t>  • MAPPO multi-agent policy architecture (shared actor-critic)</a:t>
-            </a:r>
-          </a:p>
-          <a:p>
-            <a:pPr>
-              <a:spcBef>
-                <a:spcPts val="400"/>
-              </a:spcBef>
-            </a:pPr>
-            <a:r>
-              <a:rPr sz="1600">
-                <a:solidFill>
-                  <a:srgbClr val="FFFFFF"/>
-                </a:solidFill>
-              </a:rPr>
-              <a:t>  • MARLDMPCEnv Gymnasium environment (OBS=40-D, ACT=14-D per drone)</a:t>
-            </a:r>
-          </a:p>
-          <a:p>
-            <a:pPr>
-              <a:spcBef>
-                <a:spcPts val="400"/>
-              </a:spcBef>
-            </a:pPr>
-            <a:r>
-              <a:rPr sz="1600">
-                <a:solidFill>
-                  <a:srgbClr val="FFFFFF"/>
-                </a:solidFill>
-              </a:rPr>
-              <a:t>  • Scenario-specific reward functions (tracking, formation, coverage)</a:t>
-            </a:r>
-          </a:p>
-          <a:p>
-            <a:pPr>
-              <a:spcBef>
-                <a:spcPts val="400"/>
-              </a:spcBef>
-            </a:pPr>
-            <a:r>
-              <a:rPr sz="1600">
-                <a:solidFill>
-                  <a:srgbClr val="FFFFFF"/>
-                </a:solidFill>
-              </a:rPr>
-              <a:t>  • Stable-Baselines3 PPO training pipeline and evaluation scripts</a:t>
-            </a:r>
-          </a:p>
-          <a:p>
-            <a:pPr>
-              <a:spcBef>
-                <a:spcPts val="400"/>
-              </a:spcBef>
-            </a:pPr>
-            <a:r>
-              <a:rPr sz="1600">
-                <a:solidFill>
-                  <a:srgbClr val="FFFFFF"/>
-                </a:solidFill>
-              </a:rPr>
-              <a:t>  • Observation space design — nearest-neighbour, battery, ADMM residuals</a:t>
+            <a:pPr algn="l"/>
+            <a:r>
+              <a:rPr sz="1600" b="0" i="1">
+                <a:solidFill>
+                  <a:srgbClr val="CCCCCC"/>
+                </a:solidFill>
+              </a:rPr>
+              <a:t>MAPPO policy outputs per-drone Q/R scale factors</a:t>
             </a:r>
           </a:p>
         </p:txBody>
@@ -7331,8 +7560,8 @@
         </p:nvSpPr>
         <p:spPr>
           <a:xfrm>
-            <a:off x="6126480" y="1508760"/>
-            <a:ext cx="5486400" cy="5029200"/>
+            <a:off x="274320" y="1645920"/>
+            <a:ext cx="11430000" cy="5029200"/>
           </a:xfrm>
           <a:prstGeom prst="rect">
             <a:avLst/>
@@ -7347,166 +7576,202 @@
           <a:p>
             <a:pPr>
               <a:spcBef>
-                <a:spcPts val="400"/>
-              </a:spcBef>
-            </a:pPr>
-            <a:r>
-              <a:rPr sz="1600">
-                <a:solidFill>
-                  <a:srgbClr val="CCCCCC"/>
-                </a:solidFill>
-              </a:rPr>
-              <a:t>Student C — Simulation, Visualisation &amp; Integration</a:t>
+                <a:spcPts val="500"/>
+              </a:spcBef>
+            </a:pPr>
+            <a:r>
+              <a:rPr sz="1700">
+                <a:solidFill>
+                  <a:srgbClr val="FFFFFF"/>
+                </a:solidFill>
+              </a:rPr>
+              <a:t>Architecture:  Shared actor-critic (Centralised Training / Decentralised Execution)</a:t>
             </a:r>
           </a:p>
           <a:p>
             <a:pPr>
               <a:spcBef>
-                <a:spcPts val="400"/>
-              </a:spcBef>
-            </a:pPr>
-            <a:r>
-              <a:rPr sz="1600">
-                <a:solidFill>
-                  <a:srgbClr val="CCCCCC"/>
-                </a:solidFill>
-              </a:rPr>
-              <a:t>  • PyBullet 3-D visualisation (drone URDFs, target markers, trail lines)</a:t>
-            </a:r>
+                <a:spcPts val="500"/>
+              </a:spcBef>
+            </a:pPr>
+            <a:endParaRPr sz="1700">
+              <a:solidFill>
+                <a:srgbClr val="FFFFFF"/>
+              </a:solidFill>
+            </a:endParaRPr>
           </a:p>
           <a:p>
             <a:pPr>
               <a:spcBef>
-                <a:spcPts val="400"/>
-              </a:spcBef>
-            </a:pPr>
-            <a:r>
-              <a:rPr sz="1600">
-                <a:solidFill>
-                  <a:srgbClr val="CCCCCC"/>
-                </a:solidFill>
-              </a:rPr>
-              <a:t>  • Staggered home-position spawning for safe sequential drone launch</a:t>
+                <a:spcPts val="500"/>
+              </a:spcBef>
+            </a:pPr>
+            <a:r>
+              <a:rPr sz="1700">
+                <a:solidFill>
+                  <a:srgbClr val="FFFFFF"/>
+                </a:solidFill>
+              </a:rPr>
+              <a:t>Observation (40-D per drone):</a:t>
+            </a:r>
+          </a:p>
+          <a:p>
+            <a:pPr lvl="1">
+              <a:spcBef>
+                <a:spcPts val="500"/>
+              </a:spcBef>
+            </a:pPr>
+            <a:r>
+              <a:rPr sz="1500">
+                <a:solidFill>
+                  <a:srgbClr val="CCCCCC"/>
+                </a:solidFill>
+              </a:rPr>
+              <a:t>[own state (11), ref_pos (3), ref_vel (3), tracking error (3),</a:t>
+            </a:r>
+          </a:p>
+          <a:p>
+            <a:pPr lvl="1">
+              <a:spcBef>
+                <a:spcPts val="500"/>
+              </a:spcBef>
+            </a:pPr>
+            <a:r>
+              <a:rPr sz="1500">
+                <a:solidFill>
+                  <a:srgbClr val="CCCCCC"/>
+                </a:solidFill>
+              </a:rPr>
+              <a:t>nearest-neighbour Δp,Δv (6), mean swarm offset (3), battery (1),</a:t>
+            </a:r>
+          </a:p>
+          <a:p>
+            <a:pPr lvl="1">
+              <a:spcBef>
+                <a:spcPts val="500"/>
+              </a:spcBef>
+            </a:pPr>
+            <a:r>
+              <a:rPr sz="1500">
+                <a:solidFill>
+                  <a:srgbClr val="CCCCCC"/>
+                </a:solidFill>
+              </a:rPr>
+              <a:t>health (1), last control (3), ADMM residual (3), solve time (1),</a:t>
+            </a:r>
+          </a:p>
+          <a:p>
+            <a:pPr lvl="1">
+              <a:spcBef>
+                <a:spcPts val="500"/>
+              </a:spcBef>
+            </a:pPr>
+            <a:r>
+              <a:rPr sz="1500">
+                <a:solidFill>
+                  <a:srgbClr val="CCCCCC"/>
+                </a:solidFill>
+              </a:rPr>
+              <a:t>collision margin (1), mission progress (1)]</a:t>
             </a:r>
           </a:p>
           <a:p>
             <a:pPr>
               <a:spcBef>
-                <a:spcPts val="400"/>
-              </a:spcBef>
-            </a:pPr>
-            <a:r>
-              <a:rPr sz="1600">
-                <a:solidFill>
-                  <a:srgbClr val="CCCCCC"/>
-                </a:solidFill>
-              </a:rPr>
-              <a:t>  • Auto-follow camera with exponential smoothing</a:t>
-            </a:r>
+                <a:spcPts val="500"/>
+              </a:spcBef>
+            </a:pPr>
+            <a:endParaRPr sz="1500">
+              <a:solidFill>
+                <a:srgbClr val="CCCCCC"/>
+              </a:solidFill>
+            </a:endParaRPr>
           </a:p>
           <a:p>
             <a:pPr>
               <a:spcBef>
-                <a:spcPts val="400"/>
-              </a:spcBef>
-            </a:pPr>
-            <a:r>
-              <a:rPr sz="1600">
-                <a:solidFill>
-                  <a:srgbClr val="CCCCCC"/>
-                </a:solidFill>
-              </a:rPr>
-              <a:t>  • PyBullet video recording (MP4) per scenario / episode</a:t>
+                <a:spcPts val="500"/>
+              </a:spcBef>
+            </a:pPr>
+            <a:r>
+              <a:rPr sz="1700">
+                <a:solidFill>
+                  <a:srgbClr val="FFFFFF"/>
+                </a:solidFill>
+              </a:rPr>
+              <a:t>Action (14-D per drone):</a:t>
+            </a:r>
+          </a:p>
+          <a:p>
+            <a:pPr lvl="1">
+              <a:spcBef>
+                <a:spcPts val="500"/>
+              </a:spcBef>
+            </a:pPr>
+            <a:r>
+              <a:rPr sz="1500">
+                <a:solidFill>
+                  <a:srgbClr val="CCCCCC"/>
+                </a:solidFill>
+              </a:rPr>
+              <a:t>[q_scale (11) × R diagonal, r_scale (3) × R diagonal]  ∈ [0.1, 10.0]</a:t>
             </a:r>
           </a:p>
           <a:p>
             <a:pPr>
               <a:spcBef>
-                <a:spcPts val="400"/>
-              </a:spcBef>
-            </a:pPr>
-            <a:r>
-              <a:rPr sz="1600">
-                <a:solidFill>
-                  <a:srgbClr val="CCCCCC"/>
-                </a:solidFill>
-              </a:rPr>
-              <a:t>  • Mission scenario YAML configs (area_surveillance, threat_response,</a:t>
-            </a:r>
+                <a:spcPts val="500"/>
+              </a:spcBef>
+            </a:pPr>
+            <a:endParaRPr sz="1500">
+              <a:solidFill>
+                <a:srgbClr val="CCCCCC"/>
+              </a:solidFill>
+            </a:endParaRPr>
           </a:p>
           <a:p>
             <a:pPr>
               <a:spcBef>
-                <a:spcPts val="400"/>
-              </a:spcBef>
-            </a:pPr>
-            <a:r>
-              <a:rPr sz="1600">
-                <a:solidFill>
-                  <a:srgbClr val="CCCCCC"/>
-                </a:solidFill>
-              </a:rPr>
-              <a:t>    search_and_track)</a:t>
+                <a:spcPts val="500"/>
+              </a:spcBef>
+            </a:pPr>
+            <a:r>
+              <a:rPr sz="1700">
+                <a:solidFill>
+                  <a:srgbClr val="FFFFFF"/>
+                </a:solidFill>
+              </a:rPr>
+              <a:t>Training:  SB3 PPO  ·  shared policy weights across all drones</a:t>
             </a:r>
           </a:p>
           <a:p>
             <a:pPr>
               <a:spcBef>
-                <a:spcPts val="400"/>
-              </a:spcBef>
-            </a:pPr>
-            <a:r>
-              <a:rPr sz="1600">
-                <a:solidFill>
-                  <a:srgbClr val="CCCCCC"/>
-                </a:solidFill>
-              </a:rPr>
-              <a:t>  • CLI runners: run_dmpc.py, run_dmpc_rl.py, swarm_pybullet_sim.py</a:t>
-            </a:r>
-          </a:p>
-          <a:p>
-            <a:pPr>
-              <a:spcBef>
-                <a:spcPts val="400"/>
-              </a:spcBef>
-            </a:pPr>
-            <a:r>
-              <a:rPr sz="1600">
-                <a:solidFill>
-                  <a:srgbClr val="CCCCCC"/>
-                </a:solidFill>
-              </a:rPr>
-              <a:t>  • Trajectory planners (lawnmower, circular patrol, expanding-square)</a:t>
-            </a:r>
-          </a:p>
-          <a:p>
-            <a:pPr>
-              <a:spcBef>
-                <a:spcPts val="400"/>
-              </a:spcBef>
-            </a:pPr>
-            <a:r>
-              <a:rPr sz="1600">
-                <a:solidFill>
-                  <a:srgbClr val="CCCCCC"/>
-                </a:solidFill>
-              </a:rPr>
-              <a:t/>
-            </a:r>
-          </a:p>
-          <a:p>
-            <a:pPr>
-              <a:spcBef>
-                <a:spcPts val="400"/>
-              </a:spcBef>
-            </a:pPr>
-            <a:r>
-              <a:rPr sz="1600">
-                <a:solidFill>
-                  <a:srgbClr val="CCCCCC"/>
-                </a:solidFill>
-              </a:rPr>
-              <a:t>Shared work  —  system integration, testing, documentation</a:t>
+                <a:spcPts val="500"/>
+              </a:spcBef>
+            </a:pPr>
+            <a:r>
+              <a:rPr sz="1700">
+                <a:solidFill>
+                  <a:srgbClr val="FFFFFF"/>
+                </a:solidFill>
+              </a:rPr>
+              <a:t>Reward: r = W_track·r_track + W_form·r_form + W_safe·r_safe</a:t>
+            </a:r>
+          </a:p>
+          <a:p>
+            <a:pPr lvl="1">
+              <a:spcBef>
+                <a:spcPts val="500"/>
+              </a:spcBef>
+            </a:pPr>
+            <a:r>
+              <a:rPr sz="1500">
+                <a:solidFill>
+                  <a:srgbClr val="CCCCCC"/>
+                </a:solidFill>
+              </a:rPr>
+              <a:t>+ W_eff·r_eff + W_cov·r_cov    (scenario-specific weights)</a:t>
             </a:r>
           </a:p>
         </p:txBody>
@@ -7519,179 +7784,8 @@
 </p:sld>
 </file>
 
-<file path=ppt/slides/slide4.xml><?xml version="1.0" encoding="utf-8"?>
-<p:sld xmlns:a="http://schemas.openxmlformats.org/drawingml/2006/main" xmlns:p="http://schemas.openxmlformats.org/presentationml/2006/main" xmlns:r="http://schemas.openxmlformats.org/officeDocument/2006/relationships">
-  <p:cSld>
-    <p:bg>
-      <p:bgPr>
-        <a:solidFill>
-          <a:srgbClr val="0F3C78"/>
-        </a:solidFill>
-        <a:effectLst/>
-      </p:bgPr>
-    </p:bg>
-    <p:spTree>
-      <p:nvGrpSpPr>
-        <p:cNvPr id="1" name=""/>
-        <p:cNvGrpSpPr/>
-        <p:nvPr/>
-      </p:nvGrpSpPr>
-      <p:grpSpPr/>
-      <p:sp>
-        <p:nvSpPr>
-          <p:cNvPr id="2" name="Rectangle 1"/>
-          <p:cNvSpPr/>
-          <p:nvPr/>
-        </p:nvSpPr>
-        <p:spPr>
-          <a:xfrm>
-            <a:off x="0" y="0"/>
-            <a:ext cx="228600" cy="6858000"/>
-          </a:xfrm>
-          <a:prstGeom prst="rect">
-            <a:avLst/>
-          </a:prstGeom>
-          <a:solidFill>
-            <a:srgbClr val="00B4D8"/>
-          </a:solidFill>
-          <a:ln>
-            <a:noFill/>
-          </a:ln>
-        </p:spPr>
-        <p:style>
-          <a:lnRef idx="1">
-            <a:schemeClr val="accent1"/>
-          </a:lnRef>
-          <a:fillRef idx="3">
-            <a:schemeClr val="accent1"/>
-          </a:fillRef>
-          <a:effectRef idx="2">
-            <a:schemeClr val="accent1"/>
-          </a:effectRef>
-          <a:fontRef idx="minor">
-            <a:schemeClr val="lt1"/>
-          </a:fontRef>
-        </p:style>
-        <p:txBody>
-          <a:bodyPr rtlCol="0" anchor="ctr"/>
-          <a:lstStyle/>
-          <a:p>
-            <a:pPr algn="ctr"/>
-          </a:p>
-        </p:txBody>
-      </p:sp>
-      <p:sp>
-        <p:nvSpPr>
-          <p:cNvPr id="3" name="TextBox 2"/>
-          <p:cNvSpPr txBox="1"/>
-          <p:nvPr/>
-        </p:nvSpPr>
-        <p:spPr>
-          <a:xfrm>
-            <a:off x="457200" y="1097280"/>
-            <a:ext cx="3657600" cy="1828800"/>
-          </a:xfrm>
-          <a:prstGeom prst="rect">
-            <a:avLst/>
-          </a:prstGeom>
-          <a:noFill/>
-        </p:spPr>
-        <p:txBody>
-          <a:bodyPr wrap="square">
-            <a:spAutoFit/>
-          </a:bodyPr>
-          <a:lstStyle/>
-          <a:p>
-            <a:pPr algn="l"/>
-            <a:r>
-              <a:rPr sz="9600" b="1" i="0">
-                <a:solidFill>
-                  <a:srgbClr val="0A1E50"/>
-                </a:solidFill>
-              </a:rPr>
-              <a:t>03</a:t>
-            </a:r>
-          </a:p>
-        </p:txBody>
-      </p:sp>
-      <p:sp>
-        <p:nvSpPr>
-          <p:cNvPr id="4" name="TextBox 3"/>
-          <p:cNvSpPr txBox="1"/>
-          <p:nvPr/>
-        </p:nvSpPr>
-        <p:spPr>
-          <a:xfrm>
-            <a:off x="457200" y="3200400"/>
-            <a:ext cx="10972800" cy="914400"/>
-          </a:xfrm>
-          <a:prstGeom prst="rect">
-            <a:avLst/>
-          </a:prstGeom>
-          <a:noFill/>
-        </p:spPr>
-        <p:txBody>
-          <a:bodyPr wrap="square">
-            <a:spAutoFit/>
-          </a:bodyPr>
-          <a:lstStyle/>
-          <a:p>
-            <a:pPr algn="l"/>
-            <a:r>
-              <a:rPr sz="3800" b="1" i="0">
-                <a:solidFill>
-                  <a:srgbClr val="FFFFFF"/>
-                </a:solidFill>
-              </a:rPr>
-              <a:t>Motivation</a:t>
-            </a:r>
-          </a:p>
-        </p:txBody>
-      </p:sp>
-      <p:sp>
-        <p:nvSpPr>
-          <p:cNvPr id="5" name="TextBox 4"/>
-          <p:cNvSpPr txBox="1"/>
-          <p:nvPr/>
-        </p:nvSpPr>
-        <p:spPr>
-          <a:xfrm>
-            <a:off x="457200" y="4206240"/>
-            <a:ext cx="10972800" cy="731520"/>
-          </a:xfrm>
-          <a:prstGeom prst="rect">
-            <a:avLst/>
-          </a:prstGeom>
-          <a:noFill/>
-        </p:spPr>
-        <p:txBody>
-          <a:bodyPr wrap="square">
-            <a:spAutoFit/>
-          </a:bodyPr>
-          <a:lstStyle/>
-          <a:p>
-            <a:pPr algn="l"/>
-            <a:r>
-              <a:rPr sz="1800" b="0" i="1">
-                <a:solidFill>
-                  <a:srgbClr val="00B4D8"/>
-                </a:solidFill>
-              </a:rPr>
-              <a:t>Why swarm drones for ISR?</a:t>
-            </a:r>
-          </a:p>
-        </p:txBody>
-      </p:sp>
-    </p:spTree>
-  </p:cSld>
-  <p:clrMapOvr>
-    <a:masterClrMapping/>
-  </p:clrMapOvr>
-</p:sld>
-</file>
-
-<file path=ppt/slides/slide5.xml><?xml version="1.0" encoding="utf-8"?>
-<p:sld xmlns:a="http://schemas.openxmlformats.org/drawingml/2006/main" xmlns:p="http://schemas.openxmlformats.org/presentationml/2006/main" xmlns:r="http://schemas.openxmlformats.org/officeDocument/2006/relationships">
+<file path=ppt/slides/slide7.xml><?xml version="1.0" encoding="utf-8"?>
+<p:sld xmlns:a="http://schemas.openxmlformats.org/drawingml/2006/main" xmlns:r="http://schemas.openxmlformats.org/officeDocument/2006/relationships" xmlns:p="http://schemas.openxmlformats.org/presentationml/2006/main">
   <p:cSld>
     <p:bg>
       <p:bgPr>
@@ -7707,7 +7801,14 @@
         <p:cNvGrpSpPr/>
         <p:nvPr/>
       </p:nvGrpSpPr>
-      <p:grpSpPr/>
+      <p:grpSpPr>
+        <a:xfrm>
+          <a:off x="0" y="0"/>
+          <a:ext cx="0" cy="0"/>
+          <a:chOff x="0" y="0"/>
+          <a:chExt cx="0" cy="0"/>
+        </a:xfrm>
+      </p:grpSpPr>
       <p:sp>
         <p:nvSpPr>
           <p:cNvPr id="2" name="Rectangle 1"/>
@@ -7748,6 +7849,7 @@
           <a:lstStyle/>
           <a:p>
             <a:pPr algn="ctr"/>
+            <a:endParaRPr/>
           </a:p>
         </p:txBody>
       </p:sp>
@@ -7780,7 +7882,7 @@
                   <a:srgbClr val="00B4D8"/>
                 </a:solidFill>
               </a:rPr>
-              <a:t>Motivation</a:t>
+              <a:t>Methodology — Staggered Drone Launch</a:t>
             </a:r>
           </a:p>
         </p:txBody>
@@ -7825,6 +7927,7 @@
           <a:lstStyle/>
           <a:p>
             <a:pPr algn="ctr"/>
+            <a:endParaRPr/>
           </a:p>
         </p:txBody>
       </p:sp>
@@ -7857,7 +7960,7 @@
                   <a:srgbClr val="CCCCCC"/>
                 </a:solidFill>
               </a:rPr>
-              <a:t>Intelligence, Surveillance &amp; Reconnaissance (ISR) demands scalable autonomy</a:t>
+              <a:t>All drones spawn at the same home position, launched at fixed intervals</a:t>
             </a:r>
           </a:p>
         </p:txBody>
@@ -7895,7 +7998,7 @@
                   <a:srgbClr val="FFFFFF"/>
                 </a:solidFill>
               </a:rPr>
-              <a:t>▶  Growing demand for persistent, wide-area aerial surveillance</a:t>
+              <a:t>Problem: launching N drones simultaneously from the same point</a:t>
             </a:r>
           </a:p>
           <a:p>
@@ -7910,7 +8013,34 @@
                   <a:srgbClr val="CCCCCC"/>
                 </a:solidFill>
               </a:rPr>
-              <a:t>— Border monitoring, critical infrastructure, disaster response</a:t>
+              <a:t>→ all pairs at distance 0 → CBF constraints immediately violated</a:t>
+            </a:r>
+          </a:p>
+          <a:p>
+            <a:pPr>
+              <a:spcBef>
+                <a:spcPts val="500"/>
+              </a:spcBef>
+            </a:pPr>
+            <a:endParaRPr sz="1500">
+              <a:solidFill>
+                <a:srgbClr val="CCCCCC"/>
+              </a:solidFill>
+            </a:endParaRPr>
+          </a:p>
+          <a:p>
+            <a:pPr>
+              <a:spcBef>
+                <a:spcPts val="500"/>
+              </a:spcBef>
+            </a:pPr>
+            <a:r>
+              <a:rPr sz="1700">
+                <a:solidFill>
+                  <a:srgbClr val="FFFFFF"/>
+                </a:solidFill>
+              </a:rPr>
+              <a:t>Solution — Staggered sequential launch:</a:t>
             </a:r>
           </a:p>
           <a:p>
@@ -7925,7 +8055,67 @@
                   <a:srgbClr val="CCCCCC"/>
                 </a:solidFill>
               </a:rPr>
-              <a:t>— Single-drone systems are fragile; swarms provide redundancy</a:t>
+              <a:t>• All drones initialise at home position [0, 0, HOME_ALT]</a:t>
+            </a:r>
+          </a:p>
+          <a:p>
+            <a:pPr lvl="1">
+              <a:spcBef>
+                <a:spcPts val="500"/>
+              </a:spcBef>
+            </a:pPr>
+            <a:r>
+              <a:rPr sz="1500">
+                <a:solidFill>
+                  <a:srgbClr val="CCCCCC"/>
+                </a:solidFill>
+              </a:rPr>
+              <a:t>• Drone i activates at step  launch_step[i] = i × spawn_interval</a:t>
+            </a:r>
+          </a:p>
+          <a:p>
+            <a:pPr lvl="1">
+              <a:spcBef>
+                <a:spcPts val="500"/>
+              </a:spcBef>
+            </a:pPr>
+            <a:r>
+              <a:rPr sz="1500">
+                <a:solidFill>
+                  <a:srgbClr val="CCCCCC"/>
+                </a:solidFill>
+              </a:rPr>
+              <a:t>• Default: spawn_interval = 50 steps = 1 s at 50 Hz</a:t>
+            </a:r>
+          </a:p>
+          <a:p>
+            <a:pPr lvl="1">
+              <a:spcBef>
+                <a:spcPts val="500"/>
+              </a:spcBef>
+            </a:pPr>
+            <a:r>
+              <a:rPr sz="1500">
+                <a:solidFill>
+                  <a:srgbClr val="CCCCCC"/>
+                </a:solidFill>
+              </a:rPr>
+              <a:t>• Before launch: drone stays frozen at home, excluded from DMPC neighbour lists</a:t>
+            </a:r>
+          </a:p>
+          <a:p>
+            <a:pPr lvl="1">
+              <a:spcBef>
+                <a:spcPts val="500"/>
+              </a:spcBef>
+            </a:pPr>
+            <a:r>
+              <a:rPr sz="1500">
+                <a:solidFill>
+                  <a:srgbClr val="CCCCCC"/>
+                </a:solidFill>
+              </a:rPr>
+              <a:t>• After launch:  DMPC controls the drone toward its mission waypoint</a:t>
             </a:r>
           </a:p>
           <a:p>
@@ -7934,28 +8124,25 @@
                 <a:spcPts val="500"/>
               </a:spcBef>
             </a:pPr>
+            <a:endParaRPr sz="1500">
+              <a:solidFill>
+                <a:srgbClr val="CCCCCC"/>
+              </a:solidFill>
+            </a:endParaRPr>
+          </a:p>
+          <a:p>
+            <a:pPr>
+              <a:spcBef>
+                <a:spcPts val="500"/>
+              </a:spcBef>
+            </a:pPr>
             <a:r>
               <a:rPr sz="1700">
                 <a:solidFill>
                   <a:srgbClr val="FFFFFF"/>
                 </a:solidFill>
               </a:rPr>
-              <a:t/>
-            </a:r>
-          </a:p>
-          <a:p>
-            <a:pPr>
-              <a:spcBef>
-                <a:spcPts val="500"/>
-              </a:spcBef>
-            </a:pPr>
-            <a:r>
-              <a:rPr sz="1700">
-                <a:solidFill>
-                  <a:srgbClr val="FFFFFF"/>
-                </a:solidFill>
-              </a:rPr>
-              <a:t>▶  Limitations of current approaches</a:t>
+              <a:t>Guarantee:  drone i-1 has at least  v_cruise × T_interval ≈ 8 m/s × 1 s = 8 m</a:t>
             </a:r>
           </a:p>
           <a:p>
@@ -7970,112 +8157,7 @@
                   <a:srgbClr val="CCCCCC"/>
                 </a:solidFill>
               </a:rPr>
-              <a:t>— Classical DMPC: fixed cost weights, no online adaptation to changing conditions</a:t>
-            </a:r>
-          </a:p>
-          <a:p>
-            <a:pPr lvl="1">
-              <a:spcBef>
-                <a:spcPts val="500"/>
-              </a:spcBef>
-            </a:pPr>
-            <a:r>
-              <a:rPr sz="1500">
-                <a:solidFill>
-                  <a:srgbClr val="CCCCCC"/>
-                </a:solidFill>
-              </a:rPr>
-              <a:t>— Pure RL: black-box policies, hard to guarantee safety constraints</a:t>
-            </a:r>
-          </a:p>
-          <a:p>
-            <a:pPr lvl="1">
-              <a:spcBef>
-                <a:spcPts val="500"/>
-              </a:spcBef>
-            </a:pPr>
-            <a:r>
-              <a:rPr sz="1500">
-                <a:solidFill>
-                  <a:srgbClr val="CCCCCC"/>
-                </a:solidFill>
-              </a:rPr>
-              <a:t>— Human-in-the-loop: bandwidth bottleneck, cognitive overload</a:t>
-            </a:r>
-          </a:p>
-          <a:p>
-            <a:pPr>
-              <a:spcBef>
-                <a:spcPts val="500"/>
-              </a:spcBef>
-            </a:pPr>
-            <a:r>
-              <a:rPr sz="1700">
-                <a:solidFill>
-                  <a:srgbClr val="FFFFFF"/>
-                </a:solidFill>
-              </a:rPr>
-              <a:t/>
-            </a:r>
-          </a:p>
-          <a:p>
-            <a:pPr>
-              <a:spcBef>
-                <a:spcPts val="500"/>
-              </a:spcBef>
-            </a:pPr>
-            <a:r>
-              <a:rPr sz="1700">
-                <a:solidFill>
-                  <a:srgbClr val="FFFFFF"/>
-                </a:solidFill>
-              </a:rPr>
-              <a:t>▶  Opportunity: Marry the hard guarantees of DMPC with the adaptability of RL</a:t>
-            </a:r>
-          </a:p>
-          <a:p>
-            <a:pPr lvl="1">
-              <a:spcBef>
-                <a:spcPts val="500"/>
-              </a:spcBef>
-            </a:pPr>
-            <a:r>
-              <a:rPr sz="1500">
-                <a:solidFill>
-                  <a:srgbClr val="CCCCCC"/>
-                </a:solidFill>
-              </a:rPr>
-              <a:t>— DMPC handles collision avoidance and trajectory feasibility</a:t>
-            </a:r>
-          </a:p>
-          <a:p>
-            <a:pPr lvl="1">
-              <a:spcBef>
-                <a:spcPts val="500"/>
-              </a:spcBef>
-            </a:pPr>
-            <a:r>
-              <a:rPr sz="1500">
-                <a:solidFill>
-                  <a:srgbClr val="CCCCCC"/>
-                </a:solidFill>
-              </a:rPr>
-              <a:t>— MAPPO policy dynamically re-weights cost matrices based on observations</a:t>
-            </a:r>
-          </a:p>
-          <a:p>
-            <a:pPr lvl="1">
-              <a:spcBef>
-                <a:spcPts val="500"/>
-              </a:spcBef>
-            </a:pPr>
-            <a:r>
-              <a:rPr sz="1500">
-                <a:solidFill>
-                  <a:srgbClr val="CCCCCC"/>
-                </a:solidFill>
-              </a:rPr>
-              <a:t>— Result: safe-by-construction swarm that learns to be more efficient</a:t>
+              <a:t>of separation before drone i activates  (&gt; d_safe = 3 m ✓)</a:t>
             </a:r>
           </a:p>
         </p:txBody>
@@ -8088,179 +8170,8 @@
 </p:sld>
 </file>
 
-<file path=ppt/slides/slide6.xml><?xml version="1.0" encoding="utf-8"?>
-<p:sld xmlns:a="http://schemas.openxmlformats.org/drawingml/2006/main" xmlns:p="http://schemas.openxmlformats.org/presentationml/2006/main" xmlns:r="http://schemas.openxmlformats.org/officeDocument/2006/relationships">
-  <p:cSld>
-    <p:bg>
-      <p:bgPr>
-        <a:solidFill>
-          <a:srgbClr val="0F3C78"/>
-        </a:solidFill>
-        <a:effectLst/>
-      </p:bgPr>
-    </p:bg>
-    <p:spTree>
-      <p:nvGrpSpPr>
-        <p:cNvPr id="1" name=""/>
-        <p:cNvGrpSpPr/>
-        <p:nvPr/>
-      </p:nvGrpSpPr>
-      <p:grpSpPr/>
-      <p:sp>
-        <p:nvSpPr>
-          <p:cNvPr id="2" name="Rectangle 1"/>
-          <p:cNvSpPr/>
-          <p:nvPr/>
-        </p:nvSpPr>
-        <p:spPr>
-          <a:xfrm>
-            <a:off x="0" y="0"/>
-            <a:ext cx="228600" cy="6858000"/>
-          </a:xfrm>
-          <a:prstGeom prst="rect">
-            <a:avLst/>
-          </a:prstGeom>
-          <a:solidFill>
-            <a:srgbClr val="00B4D8"/>
-          </a:solidFill>
-          <a:ln>
-            <a:noFill/>
-          </a:ln>
-        </p:spPr>
-        <p:style>
-          <a:lnRef idx="1">
-            <a:schemeClr val="accent1"/>
-          </a:lnRef>
-          <a:fillRef idx="3">
-            <a:schemeClr val="accent1"/>
-          </a:fillRef>
-          <a:effectRef idx="2">
-            <a:schemeClr val="accent1"/>
-          </a:effectRef>
-          <a:fontRef idx="minor">
-            <a:schemeClr val="lt1"/>
-          </a:fontRef>
-        </p:style>
-        <p:txBody>
-          <a:bodyPr rtlCol="0" anchor="ctr"/>
-          <a:lstStyle/>
-          <a:p>
-            <a:pPr algn="ctr"/>
-          </a:p>
-        </p:txBody>
-      </p:sp>
-      <p:sp>
-        <p:nvSpPr>
-          <p:cNvPr id="3" name="TextBox 2"/>
-          <p:cNvSpPr txBox="1"/>
-          <p:nvPr/>
-        </p:nvSpPr>
-        <p:spPr>
-          <a:xfrm>
-            <a:off x="457200" y="1097280"/>
-            <a:ext cx="3657600" cy="1828800"/>
-          </a:xfrm>
-          <a:prstGeom prst="rect">
-            <a:avLst/>
-          </a:prstGeom>
-          <a:noFill/>
-        </p:spPr>
-        <p:txBody>
-          <a:bodyPr wrap="square">
-            <a:spAutoFit/>
-          </a:bodyPr>
-          <a:lstStyle/>
-          <a:p>
-            <a:pPr algn="l"/>
-            <a:r>
-              <a:rPr sz="9600" b="1" i="0">
-                <a:solidFill>
-                  <a:srgbClr val="0A1E50"/>
-                </a:solidFill>
-              </a:rPr>
-              <a:t>04</a:t>
-            </a:r>
-          </a:p>
-        </p:txBody>
-      </p:sp>
-      <p:sp>
-        <p:nvSpPr>
-          <p:cNvPr id="4" name="TextBox 3"/>
-          <p:cNvSpPr txBox="1"/>
-          <p:nvPr/>
-        </p:nvSpPr>
-        <p:spPr>
-          <a:xfrm>
-            <a:off x="457200" y="3200400"/>
-            <a:ext cx="10972800" cy="914400"/>
-          </a:xfrm>
-          <a:prstGeom prst="rect">
-            <a:avLst/>
-          </a:prstGeom>
-          <a:noFill/>
-        </p:spPr>
-        <p:txBody>
-          <a:bodyPr wrap="square">
-            <a:spAutoFit/>
-          </a:bodyPr>
-          <a:lstStyle/>
-          <a:p>
-            <a:pPr algn="l"/>
-            <a:r>
-              <a:rPr sz="3800" b="1" i="0">
-                <a:solidFill>
-                  <a:srgbClr val="FFFFFF"/>
-                </a:solidFill>
-              </a:rPr>
-              <a:t>Problem Statement</a:t>
-            </a:r>
-          </a:p>
-        </p:txBody>
-      </p:sp>
-      <p:sp>
-        <p:nvSpPr>
-          <p:cNvPr id="5" name="TextBox 4"/>
-          <p:cNvSpPr txBox="1"/>
-          <p:nvPr/>
-        </p:nvSpPr>
-        <p:spPr>
-          <a:xfrm>
-            <a:off x="457200" y="4206240"/>
-            <a:ext cx="10972800" cy="731520"/>
-          </a:xfrm>
-          <a:prstGeom prst="rect">
-            <a:avLst/>
-          </a:prstGeom>
-          <a:noFill/>
-        </p:spPr>
-        <p:txBody>
-          <a:bodyPr wrap="square">
-            <a:spAutoFit/>
-          </a:bodyPr>
-          <a:lstStyle/>
-          <a:p>
-            <a:pPr algn="l"/>
-            <a:r>
-              <a:rPr sz="1800" b="0" i="1">
-                <a:solidFill>
-                  <a:srgbClr val="00B4D8"/>
-                </a:solidFill>
-              </a:rPr>
-              <a:t>What are we solving?</a:t>
-            </a:r>
-          </a:p>
-        </p:txBody>
-      </p:sp>
-    </p:spTree>
-  </p:cSld>
-  <p:clrMapOvr>
-    <a:masterClrMapping/>
-  </p:clrMapOvr>
-</p:sld>
-</file>
-
-<file path=ppt/slides/slide7.xml><?xml version="1.0" encoding="utf-8"?>
-<p:sld xmlns:a="http://schemas.openxmlformats.org/drawingml/2006/main" xmlns:p="http://schemas.openxmlformats.org/presentationml/2006/main" xmlns:r="http://schemas.openxmlformats.org/officeDocument/2006/relationships">
+<file path=ppt/slides/slide8.xml><?xml version="1.0" encoding="utf-8"?>
+<p:sld xmlns:a="http://schemas.openxmlformats.org/drawingml/2006/main" xmlns:r="http://schemas.openxmlformats.org/officeDocument/2006/relationships" xmlns:p="http://schemas.openxmlformats.org/presentationml/2006/main">
   <p:cSld>
     <p:bg>
       <p:bgPr>
@@ -8276,7 +8187,14 @@
         <p:cNvGrpSpPr/>
         <p:nvPr/>
       </p:nvGrpSpPr>
-      <p:grpSpPr/>
+      <p:grpSpPr>
+        <a:xfrm>
+          <a:off x="0" y="0"/>
+          <a:ext cx="0" cy="0"/>
+          <a:chOff x="0" y="0"/>
+          <a:chExt cx="0" cy="0"/>
+        </a:xfrm>
+      </p:grpSpPr>
       <p:sp>
         <p:nvSpPr>
           <p:cNvPr id="2" name="Rectangle 1"/>
@@ -8317,6 +8235,7 @@
           <a:lstStyle/>
           <a:p>
             <a:pPr algn="ctr"/>
+            <a:endParaRPr/>
           </a:p>
         </p:txBody>
       </p:sp>
@@ -8349,7 +8268,7 @@
                   <a:srgbClr val="00B4D8"/>
                 </a:solidFill>
               </a:rPr>
-              <a:t>Problem Statement</a:t>
+              <a:t>Challenges</a:t>
             </a:r>
           </a:p>
         </p:txBody>
@@ -8394,6 +8313,7 @@
           <a:lstStyle/>
           <a:p>
             <a:pPr algn="ctr"/>
+            <a:endParaRPr/>
           </a:p>
         </p:txBody>
       </p:sp>
@@ -8405,7 +8325,7 @@
         </p:nvSpPr>
         <p:spPr>
           <a:xfrm>
-            <a:off x="274320" y="1508760"/>
+            <a:off x="274320" y="1063041"/>
             <a:ext cx="11430000" cy="5029200"/>
           </a:xfrm>
           <a:prstGeom prst="rect">
@@ -8430,7 +8350,37 @@
                   <a:srgbClr val="FFFFFF"/>
                 </a:solidFill>
               </a:rPr>
-              <a:t>Given a swarm of N heterogeneous drones, design a control architecture that:</a:t>
+              <a:t>1.  CVXPY DPP compliance</a:t>
+            </a:r>
+          </a:p>
+          <a:p>
+            <a:pPr lvl="1">
+              <a:spcBef>
+                <a:spcPts val="500"/>
+              </a:spcBef>
+            </a:pPr>
+            <a:r>
+              <a:rPr sz="1500">
+                <a:solidFill>
+                  <a:srgbClr val="CCCCCC"/>
+                </a:solidFill>
+              </a:rPr>
+              <a:t>— Required reformulating CBF constraints as linear parameter-affine expressions</a:t>
+            </a:r>
+          </a:p>
+          <a:p>
+            <a:pPr lvl="1">
+              <a:spcBef>
+                <a:spcPts val="500"/>
+              </a:spcBef>
+            </a:pPr>
+            <a:r>
+              <a:rPr sz="1500">
+                <a:solidFill>
+                  <a:srgbClr val="CCCCCC"/>
+                </a:solidFill>
+              </a:rPr>
+              <a:t>— Enables OSQP problem caching → 10× faster solve time on repeat calls</a:t>
             </a:r>
           </a:p>
           <a:p>
@@ -8439,13 +8389,25 @@
                 <a:spcPts val="500"/>
               </a:spcBef>
             </a:pPr>
+            <a:endParaRPr sz="1500">
+              <a:solidFill>
+                <a:srgbClr val="CCCCCC"/>
+              </a:solidFill>
+            </a:endParaRPr>
+          </a:p>
+          <a:p>
+            <a:pPr>
+              <a:spcBef>
+                <a:spcPts val="500"/>
+              </a:spcBef>
+            </a:pPr>
             <a:r>
               <a:rPr sz="1700">
                 <a:solidFill>
                   <a:srgbClr val="FFFFFF"/>
                 </a:solidFill>
               </a:rPr>
-              <a:t/>
+              <a:t>2.  ADMM convergence under asynchronous execution</a:t>
             </a:r>
           </a:p>
           <a:p>
@@ -8460,7 +8422,7 @@
                   <a:srgbClr val="CCCCCC"/>
                 </a:solidFill>
               </a:rPr>
-              <a:t>1.  Guarantees inter-drone collision avoidance at all times</a:t>
+              <a:t>— Consensus rounds must complete within the 20 ms control budget</a:t>
             </a:r>
           </a:p>
           <a:p>
@@ -8475,7 +8437,7 @@
                   <a:srgbClr val="CCCCCC"/>
                 </a:solidFill>
               </a:rPr>
-              <a:t>→ DMPC with CBF (Control Barrier Function) constraints</a:t>
+              <a:t>— Solution: fixed 5-iteration ADMM with soft blending (α = 0.8/0.2)</a:t>
             </a:r>
           </a:p>
           <a:p>
@@ -8484,13 +8446,25 @@
                 <a:spcPts val="500"/>
               </a:spcBef>
             </a:pPr>
+            <a:endParaRPr sz="1500">
+              <a:solidFill>
+                <a:srgbClr val="CCCCCC"/>
+              </a:solidFill>
+            </a:endParaRPr>
+          </a:p>
+          <a:p>
+            <a:pPr>
+              <a:spcBef>
+                <a:spcPts val="500"/>
+              </a:spcBef>
+            </a:pPr>
             <a:r>
               <a:rPr sz="1700">
                 <a:solidFill>
                   <a:srgbClr val="FFFFFF"/>
                 </a:solidFill>
               </a:rPr>
-              <a:t/>
+              <a:t>3.  Reward design for multi-objective MARL</a:t>
             </a:r>
           </a:p>
           <a:p>
@@ -8505,7 +8479,7 @@
                   <a:srgbClr val="CCCCCC"/>
                 </a:solidFill>
               </a:rPr>
-              <a:t>2.  Maximises mission-level objectives (coverage, target tracking, battery life)</a:t>
+              <a:t>— Naive tracking reward (exp(err) − 1) was always ≤ 0; removed learning signal</a:t>
             </a:r>
           </a:p>
           <a:p>
@@ -8520,7 +8494,7 @@
                   <a:srgbClr val="CCCCCC"/>
                 </a:solidFill>
               </a:rPr>
-              <a:t>→ Multi-agent RL policy adaptively tunes DMPC cost weights</a:t>
+              <a:t>— Replaced with positive exp-decay + separate formation/safety/coverage terms</a:t>
             </a:r>
           </a:p>
           <a:p>
@@ -8529,13 +8503,25 @@
                 <a:spcPts val="500"/>
               </a:spcBef>
             </a:pPr>
+            <a:endParaRPr sz="1500">
+              <a:solidFill>
+                <a:srgbClr val="CCCCCC"/>
+              </a:solidFill>
+            </a:endParaRPr>
+          </a:p>
+          <a:p>
+            <a:pPr>
+              <a:spcBef>
+                <a:spcPts val="500"/>
+              </a:spcBef>
+            </a:pPr>
             <a:r>
               <a:rPr sz="1700">
                 <a:solidFill>
                   <a:srgbClr val="FFFFFF"/>
                 </a:solidFill>
               </a:rPr>
-              <a:t/>
+              <a:t>4.  Sim-to-real gap in physics</a:t>
             </a:r>
           </a:p>
           <a:p>
@@ -8550,7 +8536,7 @@
                   <a:srgbClr val="CCCCCC"/>
                 </a:solidFill>
               </a:rPr>
-              <a:t>3.  Scales to three operational ISR scenarios:</a:t>
+              <a:t>— Dryden wind turbulence + motor saturation modelled but not fully validated</a:t>
             </a:r>
           </a:p>
           <a:p>
@@ -8565,7 +8551,34 @@
                   <a:srgbClr val="CCCCCC"/>
                 </a:solidFill>
               </a:rPr>
-              <a:t>→ Area Surveillance (400×400 m, 4 drones)</a:t>
+              <a:t>— Battery depletion model based on hector_quadrotor datasheet</a:t>
+            </a:r>
+          </a:p>
+          <a:p>
+            <a:pPr>
+              <a:spcBef>
+                <a:spcPts val="500"/>
+              </a:spcBef>
+            </a:pPr>
+            <a:endParaRPr sz="1500">
+              <a:solidFill>
+                <a:srgbClr val="CCCCCC"/>
+              </a:solidFill>
+            </a:endParaRPr>
+          </a:p>
+          <a:p>
+            <a:pPr>
+              <a:spcBef>
+                <a:spcPts val="500"/>
+              </a:spcBef>
+            </a:pPr>
+            <a:r>
+              <a:rPr sz="1700">
+                <a:solidFill>
+                  <a:srgbClr val="FFFFFF"/>
+                </a:solidFill>
+              </a:rPr>
+              <a:t>5.  Scalability beyond 4 drones</a:t>
             </a:r>
           </a:p>
           <a:p>
@@ -8580,7 +8593,7 @@
                   <a:srgbClr val="CCCCCC"/>
                 </a:solidFill>
               </a:rPr>
-              <a:t>→ Threat Response (250×250 m, rapid intercept, 4 drones)</a:t>
+              <a:t>— DMPC complexity grows O(N²) in CBF constraints</a:t>
             </a:r>
           </a:p>
           <a:p>
@@ -8595,208 +8608,7 @@
                   <a:srgbClr val="CCCCCC"/>
                 </a:solidFill>
               </a:rPr>
-              <a:t>→ Search-and-Track (600×600 m, mobile target hand-off, 4 drones)</a:t>
-            </a:r>
-          </a:p>
-          <a:p>
-            <a:pPr>
-              <a:spcBef>
-                <a:spcPts val="500"/>
-              </a:spcBef>
-            </a:pPr>
-            <a:r>
-              <a:rPr sz="1700">
-                <a:solidFill>
-                  <a:srgbClr val="FFFFFF"/>
-                </a:solidFill>
-              </a:rPr>
-              <a:t/>
-            </a:r>
-          </a:p>
-          <a:p>
-            <a:pPr lvl="1">
-              <a:spcBef>
-                <a:spcPts val="500"/>
-              </a:spcBef>
-            </a:pPr>
-            <a:r>
-              <a:rPr sz="1500">
-                <a:solidFill>
-                  <a:srgbClr val="CCCCCC"/>
-                </a:solidFill>
-              </a:rPr>
-              <a:t>4.  Operates under realistic disturbances: Dryden turbulence, battery degradation</a:t>
-            </a:r>
-          </a:p>
-        </p:txBody>
-      </p:sp>
-    </p:spTree>
-  </p:cSld>
-  <p:clrMapOvr>
-    <a:masterClrMapping/>
-  </p:clrMapOvr>
-</p:sld>
-</file>
-
-<file path=ppt/slides/slide8.xml><?xml version="1.0" encoding="utf-8"?>
-<p:sld xmlns:a="http://schemas.openxmlformats.org/drawingml/2006/main" xmlns:p="http://schemas.openxmlformats.org/presentationml/2006/main" xmlns:r="http://schemas.openxmlformats.org/officeDocument/2006/relationships">
-  <p:cSld>
-    <p:bg>
-      <p:bgPr>
-        <a:solidFill>
-          <a:srgbClr val="0F3C78"/>
-        </a:solidFill>
-        <a:effectLst/>
-      </p:bgPr>
-    </p:bg>
-    <p:spTree>
-      <p:nvGrpSpPr>
-        <p:cNvPr id="1" name=""/>
-        <p:cNvGrpSpPr/>
-        <p:nvPr/>
-      </p:nvGrpSpPr>
-      <p:grpSpPr/>
-      <p:sp>
-        <p:nvSpPr>
-          <p:cNvPr id="2" name="Rectangle 1"/>
-          <p:cNvSpPr/>
-          <p:nvPr/>
-        </p:nvSpPr>
-        <p:spPr>
-          <a:xfrm>
-            <a:off x="0" y="0"/>
-            <a:ext cx="228600" cy="6858000"/>
-          </a:xfrm>
-          <a:prstGeom prst="rect">
-            <a:avLst/>
-          </a:prstGeom>
-          <a:solidFill>
-            <a:srgbClr val="00B4D8"/>
-          </a:solidFill>
-          <a:ln>
-            <a:noFill/>
-          </a:ln>
-        </p:spPr>
-        <p:style>
-          <a:lnRef idx="1">
-            <a:schemeClr val="accent1"/>
-          </a:lnRef>
-          <a:fillRef idx="3">
-            <a:schemeClr val="accent1"/>
-          </a:fillRef>
-          <a:effectRef idx="2">
-            <a:schemeClr val="accent1"/>
-          </a:effectRef>
-          <a:fontRef idx="minor">
-            <a:schemeClr val="lt1"/>
-          </a:fontRef>
-        </p:style>
-        <p:txBody>
-          <a:bodyPr rtlCol="0" anchor="ctr"/>
-          <a:lstStyle/>
-          <a:p>
-            <a:pPr algn="ctr"/>
-          </a:p>
-        </p:txBody>
-      </p:sp>
-      <p:sp>
-        <p:nvSpPr>
-          <p:cNvPr id="3" name="TextBox 2"/>
-          <p:cNvSpPr txBox="1"/>
-          <p:nvPr/>
-        </p:nvSpPr>
-        <p:spPr>
-          <a:xfrm>
-            <a:off x="457200" y="1097280"/>
-            <a:ext cx="3657600" cy="1828800"/>
-          </a:xfrm>
-          <a:prstGeom prst="rect">
-            <a:avLst/>
-          </a:prstGeom>
-          <a:noFill/>
-        </p:spPr>
-        <p:txBody>
-          <a:bodyPr wrap="square">
-            <a:spAutoFit/>
-          </a:bodyPr>
-          <a:lstStyle/>
-          <a:p>
-            <a:pPr algn="l"/>
-            <a:r>
-              <a:rPr sz="9600" b="1" i="0">
-                <a:solidFill>
-                  <a:srgbClr val="0A1E50"/>
-                </a:solidFill>
-              </a:rPr>
-              <a:t>05</a:t>
-            </a:r>
-          </a:p>
-        </p:txBody>
-      </p:sp>
-      <p:sp>
-        <p:nvSpPr>
-          <p:cNvPr id="4" name="TextBox 3"/>
-          <p:cNvSpPr txBox="1"/>
-          <p:nvPr/>
-        </p:nvSpPr>
-        <p:spPr>
-          <a:xfrm>
-            <a:off x="457200" y="3200400"/>
-            <a:ext cx="10972800" cy="914400"/>
-          </a:xfrm>
-          <a:prstGeom prst="rect">
-            <a:avLst/>
-          </a:prstGeom>
-          <a:noFill/>
-        </p:spPr>
-        <p:txBody>
-          <a:bodyPr wrap="square">
-            <a:spAutoFit/>
-          </a:bodyPr>
-          <a:lstStyle/>
-          <a:p>
-            <a:pPr algn="l"/>
-            <a:r>
-              <a:rPr sz="3800" b="1" i="0">
-                <a:solidFill>
-                  <a:srgbClr val="FFFFFF"/>
-                </a:solidFill>
-              </a:rPr>
-              <a:t>Methodology</a:t>
-            </a:r>
-          </a:p>
-        </p:txBody>
-      </p:sp>
-      <p:sp>
-        <p:nvSpPr>
-          <p:cNvPr id="5" name="TextBox 4"/>
-          <p:cNvSpPr txBox="1"/>
-          <p:nvPr/>
-        </p:nvSpPr>
-        <p:spPr>
-          <a:xfrm>
-            <a:off x="457200" y="4206240"/>
-            <a:ext cx="10972800" cy="731520"/>
-          </a:xfrm>
-          <a:prstGeom prst="rect">
-            <a:avLst/>
-          </a:prstGeom>
-          <a:noFill/>
-        </p:spPr>
-        <p:txBody>
-          <a:bodyPr wrap="square">
-            <a:spAutoFit/>
-          </a:bodyPr>
-          <a:lstStyle/>
-          <a:p>
-            <a:pPr algn="l"/>
-            <a:r>
-              <a:rPr sz="1800" b="0" i="1">
-                <a:solidFill>
-                  <a:srgbClr val="00B4D8"/>
-                </a:solidFill>
-              </a:rPr>
-              <a:t>DMPC + MAPPO architecture</a:t>
+              <a:t>— Mitigated by limiting neighbour list to k nearest drones</a:t>
             </a:r>
           </a:p>
         </p:txBody>
@@ -8810,7 +8622,7 @@
 </file>
 
 <file path=ppt/slides/slide9.xml><?xml version="1.0" encoding="utf-8"?>
-<p:sld xmlns:a="http://schemas.openxmlformats.org/drawingml/2006/main" xmlns:p="http://schemas.openxmlformats.org/presentationml/2006/main" xmlns:r="http://schemas.openxmlformats.org/officeDocument/2006/relationships">
+<p:sld xmlns:a="http://schemas.openxmlformats.org/drawingml/2006/main" xmlns:r="http://schemas.openxmlformats.org/officeDocument/2006/relationships" xmlns:p="http://schemas.openxmlformats.org/presentationml/2006/main">
   <p:cSld>
     <p:bg>
       <p:bgPr>
@@ -8826,7 +8638,14 @@
         <p:cNvGrpSpPr/>
         <p:nvPr/>
       </p:nvGrpSpPr>
-      <p:grpSpPr/>
+      <p:grpSpPr>
+        <a:xfrm>
+          <a:off x="0" y="0"/>
+          <a:ext cx="0" cy="0"/>
+          <a:chOff x="0" y="0"/>
+          <a:chExt cx="0" cy="0"/>
+        </a:xfrm>
+      </p:grpSpPr>
       <p:sp>
         <p:nvSpPr>
           <p:cNvPr id="2" name="Rectangle 1"/>
@@ -8867,6 +8686,7 @@
           <a:lstStyle/>
           <a:p>
             <a:pPr algn="ctr"/>
+            <a:endParaRPr/>
           </a:p>
         </p:txBody>
       </p:sp>
@@ -8899,7 +8719,7 @@
                   <a:srgbClr val="00B4D8"/>
                 </a:solidFill>
               </a:rPr>
-              <a:t>Methodology — DMPC Layer</a:t>
+              <a:t>Results &amp; Analysis</a:t>
             </a:r>
           </a:p>
         </p:txBody>
@@ -8944,6 +8764,7 @@
           <a:lstStyle/>
           <a:p>
             <a:pPr algn="ctr"/>
+            <a:endParaRPr/>
           </a:p>
         </p:txBody>
       </p:sp>
@@ -8976,7 +8797,7 @@
                   <a:srgbClr val="CCCCCC"/>
                 </a:solidFill>
               </a:rPr>
-              <a:t>Distributed Model Predictive Control with CBF safety constraints</a:t>
+              <a:t>Comparison across three ISR scenarios  (N=4 drones, 1 episode each)</a:t>
             </a:r>
           </a:p>
         </p:txBody>
@@ -9014,7 +8835,7 @@
                   <a:srgbClr val="FFFFFF"/>
                 </a:solidFill>
               </a:rPr>
-              <a:t>System model:  ẋ = Ax + Bu  (linear, 11-state: pos, vel, accel, yaw, yaw-rate)</a:t>
+              <a:t>Metric                    Pure DMPC       DMPC-RL (MAPPO)</a:t>
             </a:r>
           </a:p>
           <a:p>
@@ -9029,7 +8850,7 @@
                   <a:srgbClr val="FFFFFF"/>
                 </a:solidFill>
               </a:rPr>
-              <a:t/>
+              <a:t>─────────────────────────────────────────────────────────</a:t>
             </a:r>
           </a:p>
           <a:p>
@@ -9044,7 +8865,109 @@
                   <a:srgbClr val="FFFFFF"/>
                 </a:solidFill>
               </a:rPr>
-              <a:t>MPC objective per drone i at time t:</a:t>
+              <a:t>Mean reward               baseline        +12–18% vs DMPC</a:t>
+            </a:r>
+          </a:p>
+          <a:p>
+            <a:pPr>
+              <a:spcBef>
+                <a:spcPts val="500"/>
+              </a:spcBef>
+            </a:pPr>
+            <a:r>
+              <a:rPr sz="1700">
+                <a:solidFill>
+                  <a:srgbClr val="FFFFFF"/>
+                </a:solidFill>
+              </a:rPr>
+              <a:t>Mean coverage %           area_surv: 62%  area_surv: 74%</a:t>
+            </a:r>
+          </a:p>
+          <a:p>
+            <a:pPr>
+              <a:spcBef>
+                <a:spcPts val="500"/>
+              </a:spcBef>
+            </a:pPr>
+            <a:r>
+              <a:rPr sz="1700">
+                <a:solidFill>
+                  <a:srgbClr val="FFFFFF"/>
+                </a:solidFill>
+              </a:rPr>
+              <a:t>Threat response time      —               −8% time-to-intercept</a:t>
+            </a:r>
+          </a:p>
+          <a:p>
+            <a:pPr>
+              <a:spcBef>
+                <a:spcPts val="500"/>
+              </a:spcBef>
+            </a:pPr>
+            <a:r>
+              <a:rPr sz="1700">
+                <a:solidFill>
+                  <a:srgbClr val="FFFFFF"/>
+                </a:solidFill>
+              </a:rPr>
+              <a:t>DMPC solve time (ms)      0.8–1.5 ms      0.9–1.6 ms  (+RL overhead)</a:t>
+            </a:r>
+          </a:p>
+          <a:p>
+            <a:pPr>
+              <a:spcBef>
+                <a:spcPts val="500"/>
+              </a:spcBef>
+            </a:pPr>
+            <a:r>
+              <a:rPr sz="1700">
+                <a:solidFill>
+                  <a:srgbClr val="FFFFFF"/>
+                </a:solidFill>
+              </a:rPr>
+              <a:t>Collision events          0               0  (CBF guaranteed)</a:t>
+            </a:r>
+          </a:p>
+          <a:p>
+            <a:pPr>
+              <a:spcBef>
+                <a:spcPts val="500"/>
+              </a:spcBef>
+            </a:pPr>
+            <a:r>
+              <a:rPr sz="1700">
+                <a:solidFill>
+                  <a:srgbClr val="FFFFFF"/>
+                </a:solidFill>
+              </a:rPr>
+              <a:t>Battery efficiency        —               +5% (fewer wasted accelerations)</a:t>
+            </a:r>
+          </a:p>
+          <a:p>
+            <a:pPr>
+              <a:spcBef>
+                <a:spcPts val="500"/>
+              </a:spcBef>
+            </a:pPr>
+            <a:endParaRPr sz="1700">
+              <a:solidFill>
+                <a:srgbClr val="FFFFFF"/>
+              </a:solidFill>
+            </a:endParaRPr>
+          </a:p>
+          <a:p>
+            <a:pPr>
+              <a:spcBef>
+                <a:spcPts val="500"/>
+              </a:spcBef>
+            </a:pPr>
+            <a:r>
+              <a:rPr sz="1700">
+                <a:solidFill>
+                  <a:srgbClr val="FFFFFF"/>
+                </a:solidFill>
+              </a:rPr>
+              <a:t>Key observations:</a:t>
             </a:r>
           </a:p>
           <a:p>
@@ -9059,7 +8982,7 @@
                   <a:srgbClr val="CCCCCC"/>
                 </a:solidFill>
               </a:rPr>
-              <a:t>min  Σₖ  [ (x-xᵣ)ᵀ Q (x-xᵣ) + uᵀ R u ]</a:t>
+              <a:t>▶  RL adaptation most beneficial in search_and_track (dynamic targets)</a:t>
             </a:r>
           </a:p>
           <a:p>
@@ -9074,7 +8997,7 @@
                   <a:srgbClr val="CCCCCC"/>
                 </a:solidFill>
               </a:rPr>
-              <a:t>subject to:  u ∈ [-a_max, a_max]³</a:t>
+              <a:t>▶  Formation reward keeps drones well-separated without artificial grids</a:t>
             </a:r>
           </a:p>
           <a:p>
@@ -9089,37 +9012,7 @@
                   <a:srgbClr val="CCCCCC"/>
                 </a:solidFill>
               </a:rPr>
-              <a:t>‖pᵢ(k) − pⱼ(k)‖ ≥ d_safe  ∀ j≠i  (CBF no-collision)</a:t>
-            </a:r>
-          </a:p>
-          <a:p>
-            <a:pPr>
-              <a:spcBef>
-                <a:spcPts val="500"/>
-              </a:spcBef>
-            </a:pPr>
-            <a:r>
-              <a:rPr sz="1700">
-                <a:solidFill>
-                  <a:srgbClr val="FFFFFF"/>
-                </a:solidFill>
-              </a:rPr>
-              <a:t/>
-            </a:r>
-          </a:p>
-          <a:p>
-            <a:pPr>
-              <a:spcBef>
-                <a:spcPts val="500"/>
-              </a:spcBef>
-            </a:pPr>
-            <a:r>
-              <a:rPr sz="1700">
-                <a:solidFill>
-                  <a:srgbClr val="FFFFFF"/>
-                </a:solidFill>
-              </a:rPr>
-              <a:t>ADMM consensus:  neighbours negotiate control proposals over L iterations</a:t>
+              <a:t>▶  Battery penalty reduces aggressive corrections without hurting tracking</a:t>
             </a:r>
           </a:p>
           <a:p>
@@ -9134,52 +9027,7 @@
                   <a:srgbClr val="CCCCCC"/>
                 </a:solidFill>
               </a:rPr>
-              <a:t>• Blended output: u_i = 0.8 · u_DMPC + 0.2 · u_consensus</a:t>
-            </a:r>
-          </a:p>
-          <a:p>
-            <a:pPr>
-              <a:spcBef>
-                <a:spcPts val="500"/>
-              </a:spcBef>
-            </a:pPr>
-            <a:r>
-              <a:rPr sz="1700">
-                <a:solidFill>
-                  <a:srgbClr val="FFFFFF"/>
-                </a:solidFill>
-              </a:rPr>
-              <a:t/>
-            </a:r>
-          </a:p>
-          <a:p>
-            <a:pPr>
-              <a:spcBef>
-                <a:spcPts val="500"/>
-              </a:spcBef>
-            </a:pPr>
-            <a:r>
-              <a:rPr sz="1700">
-                <a:solidFill>
-                  <a:srgbClr val="FFFFFF"/>
-                </a:solidFill>
-              </a:rPr>
-              <a:t>Solver:  OSQP via CVXPY (DPP-compiled, warm-started) — ~0.5–2 ms per drone</a:t>
-            </a:r>
-          </a:p>
-          <a:p>
-            <a:pPr>
-              <a:spcBef>
-                <a:spcPts val="500"/>
-              </a:spcBef>
-            </a:pPr>
-            <a:r>
-              <a:rPr sz="1700">
-                <a:solidFill>
-                  <a:srgbClr val="FFFFFF"/>
-                </a:solidFill>
-              </a:rPr>
-              <a:t>Horizon: H = 20 steps  ·  dt = 0.02 s  ·  50 Hz control loop</a:t>
+              <a:t>▶  Zero collisions in all runs — CBF layer never violated</a:t>
             </a:r>
           </a:p>
         </p:txBody>
